--- a/docs/content/05-teaching-resources/slides/core/09-emerging-issues-and-technologies.pptx
+++ b/docs/content/05-teaching-resources/slides/core/09-emerging-issues-and-technologies.pptx
@@ -10,10 +10,16 @@
     <p:sldId id="258" r:id="rId9"/>
     <p:sldId id="259" r:id="rId10"/>
     <p:sldId id="260" r:id="rId11"/>
-    <p:sldId id="261" r:id="rId12"/>
+    <p:sldId id="261" r:id="rId13"/>
     <p:sldId id="262" r:id="rId14"/>
     <p:sldId id="263" r:id="rId15"/>
     <p:sldId id="264" r:id="rId16"/>
+    <p:sldId id="265" r:id="rId17"/>
+    <p:sldId id="266" r:id="rId18"/>
+    <p:sldId id="267" r:id="rId19"/>
+    <p:sldId id="268" r:id="rId20"/>
+    <p:sldId id="269" r:id="rId21"/>
+    <p:sldId id="270" r:id="rId22"/>
   </p:sldIdLst>
   <p:sldSz cx="12191695" cy="6858000" type="screen4x3"/>
   <p:notesSz cx="6858000" cy="9144000"/>
@@ -510,7 +516,22 @@
           <a:lstStyle/>
           <a:p>
             <a:r>
-              <a:t>Give students a few minutes to answer on mini whiteboards or paper, then reveal the answers on the next slide.</a:t>
+              <a:t>Answers:</a:t>
+            </a:r>
+          </a:p>
+          <a:p>
+            <a:r>
+              <a:t>1. E.g. remote working, monitoring, automation.</a:t>
+            </a:r>
+          </a:p>
+          <a:p>
+            <a:r>
+              <a:t>2. E.g. job losses, privacy concerns, isolation.</a:t>
+            </a:r>
+          </a:p>
+          <a:p>
+            <a:r>
+              <a:t>3. Less routine coding, more design, testing and review.</a:t>
             </a:r>
           </a:p>
         </p:txBody>
@@ -580,7 +601,22 @@
           <a:lstStyle/>
           <a:p>
             <a:r>
-              <a:t>Talk through any answers the class found difficult.</a:t>
+              <a:t>Answers:</a:t>
+            </a:r>
+          </a:p>
+          <a:p>
+            <a:r>
+              <a:t>1. Everyone being able to use digital products fairly.</a:t>
+            </a:r>
+          </a:p>
+          <a:p>
+            <a:r>
+              <a:t>2. Biased data produces unfair software.</a:t>
+            </a:r>
+          </a:p>
+          <a:p>
+            <a:r>
+              <a:t>3. E.g. age, digital skills, accessibility needs.</a:t>
             </a:r>
           </a:p>
         </p:txBody>
@@ -606,6 +642,231 @@
 </file>
 
 <file path=ppt/notesSlides/notesSlide3.xml><?xml version="1.0" encoding="utf-8"?>
+<p:notes xmlns:a="http://schemas.openxmlformats.org/drawingml/2006/main" xmlns:p="http://schemas.openxmlformats.org/presentationml/2006/main" xmlns:r="http://schemas.openxmlformats.org/officeDocument/2006/relationships">
+  <p:cSld>
+    <p:spTree>
+      <p:nvGrpSpPr>
+        <p:cNvPr id="1" name=""/>
+        <p:cNvGrpSpPr/>
+        <p:nvPr/>
+      </p:nvGrpSpPr>
+      <p:grpSpPr>
+        <a:xfrm>
+          <a:off x="0" y="0"/>
+          <a:ext cx="0" cy="0"/>
+          <a:chOff x="0" y="0"/>
+          <a:chExt cx="0" cy="0"/>
+        </a:xfrm>
+      </p:grpSpPr>
+      <p:sp>
+        <p:nvSpPr>
+          <p:cNvPr id="2" name="Slide Image Placeholder 1"/>
+          <p:cNvSpPr>
+            <a:spLocks noGrp="1"/>
+          </p:cNvSpPr>
+          <p:nvPr>
+            <p:ph type="sldImg" idx="2"/>
+          </p:nvPr>
+        </p:nvSpPr>
+        <p:spPr/>
+      </p:sp>
+      <p:sp>
+        <p:nvSpPr>
+          <p:cNvPr id="3" name="Notes Placeholder 2"/>
+          <p:cNvSpPr>
+            <a:spLocks noGrp="1"/>
+          </p:cNvSpPr>
+          <p:nvPr>
+            <p:ph type="body" idx="3" sz="quarter"/>
+          </p:nvPr>
+        </p:nvSpPr>
+        <p:spPr/>
+        <p:txBody>
+          <a:bodyPr/>
+          <a:lstStyle/>
+          <a:p>
+            <a:r>
+              <a:t>Answers:</a:t>
+            </a:r>
+          </a:p>
+          <a:p>
+            <a:r>
+              <a:t>1. Processing data close to where it's collected.</a:t>
+            </a:r>
+          </a:p>
+          <a:p>
+            <a:r>
+              <a:t>2. E.g. rare metals, energy use, disposal.</a:t>
+            </a:r>
+          </a:p>
+          <a:p>
+            <a:r>
+              <a:t>3. Finds patterns in data to make predictions.</a:t>
+            </a:r>
+          </a:p>
+        </p:txBody>
+      </p:sp>
+      <p:sp>
+        <p:nvSpPr>
+          <p:cNvPr id="4" name="Slide Number Placeholder 3"/>
+          <p:cNvSpPr>
+            <a:spLocks noGrp="1"/>
+          </p:cNvSpPr>
+          <p:nvPr>
+            <p:ph type="sldNum" idx="5" sz="quarter"/>
+          </p:nvPr>
+        </p:nvSpPr>
+        <p:spPr/>
+      </p:sp>
+    </p:spTree>
+  </p:cSld>
+  <p:clrMapOvr>
+    <a:masterClrMapping/>
+  </p:clrMapOvr>
+</p:notes>
+</file>
+
+<file path=ppt/notesSlides/notesSlide4.xml><?xml version="1.0" encoding="utf-8"?>
+<p:notes xmlns:a="http://schemas.openxmlformats.org/drawingml/2006/main" xmlns:p="http://schemas.openxmlformats.org/presentationml/2006/main" xmlns:r="http://schemas.openxmlformats.org/officeDocument/2006/relationships">
+  <p:cSld>
+    <p:spTree>
+      <p:nvGrpSpPr>
+        <p:cNvPr id="1" name=""/>
+        <p:cNvGrpSpPr/>
+        <p:nvPr/>
+      </p:nvGrpSpPr>
+      <p:grpSpPr>
+        <a:xfrm>
+          <a:off x="0" y="0"/>
+          <a:ext cx="0" cy="0"/>
+          <a:chOff x="0" y="0"/>
+          <a:chExt cx="0" cy="0"/>
+        </a:xfrm>
+      </p:grpSpPr>
+      <p:sp>
+        <p:nvSpPr>
+          <p:cNvPr id="2" name="Slide Image Placeholder 1"/>
+          <p:cNvSpPr>
+            <a:spLocks noGrp="1"/>
+          </p:cNvSpPr>
+          <p:nvPr>
+            <p:ph type="sldImg" idx="2"/>
+          </p:nvPr>
+        </p:nvSpPr>
+        <p:spPr/>
+      </p:sp>
+      <p:sp>
+        <p:nvSpPr>
+          <p:cNvPr id="3" name="Notes Placeholder 2"/>
+          <p:cNvSpPr>
+            <a:spLocks noGrp="1"/>
+          </p:cNvSpPr>
+          <p:nvPr>
+            <p:ph type="body" idx="3" sz="quarter"/>
+          </p:nvPr>
+        </p:nvSpPr>
+        <p:spPr/>
+        <p:txBody>
+          <a:bodyPr/>
+          <a:lstStyle/>
+          <a:p>
+            <a:r>
+              <a:t>Give students a few minutes to answer on mini whiteboards or paper, then reveal the answers on the next slide.</a:t>
+            </a:r>
+          </a:p>
+        </p:txBody>
+      </p:sp>
+      <p:sp>
+        <p:nvSpPr>
+          <p:cNvPr id="4" name="Slide Number Placeholder 3"/>
+          <p:cNvSpPr>
+            <a:spLocks noGrp="1"/>
+          </p:cNvSpPr>
+          <p:nvPr>
+            <p:ph type="sldNum" idx="5" sz="quarter"/>
+          </p:nvPr>
+        </p:nvSpPr>
+        <p:spPr/>
+      </p:sp>
+    </p:spTree>
+  </p:cSld>
+  <p:clrMapOvr>
+    <a:masterClrMapping/>
+  </p:clrMapOvr>
+</p:notes>
+</file>
+
+<file path=ppt/notesSlides/notesSlide5.xml><?xml version="1.0" encoding="utf-8"?>
+<p:notes xmlns:a="http://schemas.openxmlformats.org/drawingml/2006/main" xmlns:p="http://schemas.openxmlformats.org/presentationml/2006/main" xmlns:r="http://schemas.openxmlformats.org/officeDocument/2006/relationships">
+  <p:cSld>
+    <p:spTree>
+      <p:nvGrpSpPr>
+        <p:cNvPr id="1" name=""/>
+        <p:cNvGrpSpPr/>
+        <p:nvPr/>
+      </p:nvGrpSpPr>
+      <p:grpSpPr>
+        <a:xfrm>
+          <a:off x="0" y="0"/>
+          <a:ext cx="0" cy="0"/>
+          <a:chOff x="0" y="0"/>
+          <a:chExt cx="0" cy="0"/>
+        </a:xfrm>
+      </p:grpSpPr>
+      <p:sp>
+        <p:nvSpPr>
+          <p:cNvPr id="2" name="Slide Image Placeholder 1"/>
+          <p:cNvSpPr>
+            <a:spLocks noGrp="1"/>
+          </p:cNvSpPr>
+          <p:nvPr>
+            <p:ph type="sldImg" idx="2"/>
+          </p:nvPr>
+        </p:nvSpPr>
+        <p:spPr/>
+      </p:sp>
+      <p:sp>
+        <p:nvSpPr>
+          <p:cNvPr id="3" name="Notes Placeholder 2"/>
+          <p:cNvSpPr>
+            <a:spLocks noGrp="1"/>
+          </p:cNvSpPr>
+          <p:nvPr>
+            <p:ph type="body" idx="3" sz="quarter"/>
+          </p:nvPr>
+        </p:nvSpPr>
+        <p:spPr/>
+        <p:txBody>
+          <a:bodyPr/>
+          <a:lstStyle/>
+          <a:p>
+            <a:r>
+              <a:t>Talk through any answers the class found difficult.</a:t>
+            </a:r>
+          </a:p>
+        </p:txBody>
+      </p:sp>
+      <p:sp>
+        <p:nvSpPr>
+          <p:cNvPr id="4" name="Slide Number Placeholder 3"/>
+          <p:cNvSpPr>
+            <a:spLocks noGrp="1"/>
+          </p:cNvSpPr>
+          <p:nvPr>
+            <p:ph type="sldNum" idx="5" sz="quarter"/>
+          </p:nvPr>
+        </p:nvSpPr>
+        <p:spPr/>
+      </p:sp>
+    </p:spTree>
+  </p:cSld>
+  <p:clrMapOvr>
+    <a:masterClrMapping/>
+  </p:clrMapOvr>
+</p:notes>
+</file>
+
+<file path=ppt/notesSlides/notesSlide6.xml><?xml version="1.0" encoding="utf-8"?>
 <p:notes xmlns:a="http://schemas.openxmlformats.org/drawingml/2006/main" xmlns:p="http://schemas.openxmlformats.org/presentationml/2006/main" xmlns:r="http://schemas.openxmlformats.org/officeDocument/2006/relationships">
   <p:cSld>
     <p:spTree>
@@ -3975,6 +4236,3940 @@
 </p:sld>
 </file>
 
+<file path=ppt/slides/slide10.xml><?xml version="1.0" encoding="utf-8"?>
+<p:sld xmlns:a="http://schemas.openxmlformats.org/drawingml/2006/main" xmlns:p="http://schemas.openxmlformats.org/presentationml/2006/main" xmlns:r="http://schemas.openxmlformats.org/officeDocument/2006/relationships">
+  <p:cSld>
+    <p:bg>
+      <p:bgPr>
+        <a:solidFill>
+          <a:srgbClr val="FFFFFF"/>
+        </a:solidFill>
+        <a:effectLst/>
+      </p:bgPr>
+    </p:bg>
+    <p:spTree>
+      <p:nvGrpSpPr>
+        <p:cNvPr id="1" name=""/>
+        <p:cNvGrpSpPr/>
+        <p:nvPr/>
+      </p:nvGrpSpPr>
+      <p:grpSpPr/>
+      <p:sp>
+        <p:nvSpPr>
+          <p:cNvPr id="2" name="TextBox 1"/>
+          <p:cNvSpPr txBox="1"/>
+          <p:nvPr/>
+        </p:nvSpPr>
+        <p:spPr>
+          <a:xfrm>
+            <a:off x="548640" y="320040"/>
+            <a:ext cx="11094415" cy="274320"/>
+          </a:xfrm>
+          <a:prstGeom prst="rect">
+            <a:avLst/>
+          </a:prstGeom>
+          <a:noFill/>
+        </p:spPr>
+        <p:txBody>
+          <a:bodyPr wrap="square" anchor="t" lIns="0" rIns="0" tIns="0" bIns="0"/>
+          <a:lstStyle/>
+          <a:p>
+            <a:pPr algn="l"/>
+            <a:r>
+              <a:rPr sz="1100" b="1" i="0">
+                <a:solidFill>
+                  <a:srgbClr val="54595D"/>
+                </a:solidFill>
+                <a:latin typeface="Calibri"/>
+              </a:rPr>
+              <a:t>CORE COMPONENT  ·  Core Paper 1</a:t>
+            </a:r>
+          </a:p>
+        </p:txBody>
+      </p:sp>
+      <p:sp>
+        <p:nvSpPr>
+          <p:cNvPr id="3" name="TextBox 2"/>
+          <p:cNvSpPr txBox="1"/>
+          <p:nvPr/>
+        </p:nvSpPr>
+        <p:spPr>
+          <a:xfrm>
+            <a:off x="548640" y="566928"/>
+            <a:ext cx="11094415" cy="822960"/>
+          </a:xfrm>
+          <a:prstGeom prst="rect">
+            <a:avLst/>
+          </a:prstGeom>
+          <a:noFill/>
+        </p:spPr>
+        <p:txBody>
+          <a:bodyPr wrap="square" anchor="ctr" lIns="0" rIns="0" tIns="0" bIns="0"/>
+          <a:lstStyle/>
+          <a:p>
+            <a:pPr algn="l"/>
+            <a:r>
+              <a:rPr sz="3200" b="1" i="0">
+                <a:solidFill>
+                  <a:srgbClr val="03306E"/>
+                </a:solidFill>
+                <a:latin typeface="Cambria"/>
+              </a:rPr>
+              <a:t>Emerging technologies</a:t>
+            </a:r>
+          </a:p>
+        </p:txBody>
+      </p:sp>
+      <p:sp>
+        <p:nvSpPr>
+          <p:cNvPr id="4" name="TextBox 3"/>
+          <p:cNvSpPr txBox="1"/>
+          <p:nvPr/>
+        </p:nvSpPr>
+        <p:spPr>
+          <a:xfrm>
+            <a:off x="548640" y="6446520"/>
+            <a:ext cx="8229600" cy="274320"/>
+          </a:xfrm>
+          <a:prstGeom prst="rect">
+            <a:avLst/>
+          </a:prstGeom>
+          <a:noFill/>
+        </p:spPr>
+        <p:txBody>
+          <a:bodyPr wrap="square" anchor="t" lIns="0" rIns="0" tIns="0" bIns="0"/>
+          <a:lstStyle/>
+          <a:p>
+            <a:pPr algn="l"/>
+            <a:r>
+              <a:rPr sz="1000" b="0" i="0">
+                <a:solidFill>
+                  <a:srgbClr val="54595D"/>
+                </a:solidFill>
+                <a:latin typeface="Calibri"/>
+              </a:rPr>
+              <a:t>Digital Software Development T Level  ·  Emerging Issues and Technologies</a:t>
+            </a:r>
+          </a:p>
+        </p:txBody>
+      </p:sp>
+      <p:sp>
+        <p:nvSpPr>
+          <p:cNvPr id="5" name="TextBox 4"/>
+          <p:cNvSpPr txBox="1"/>
+          <p:nvPr/>
+        </p:nvSpPr>
+        <p:spPr>
+          <a:xfrm>
+            <a:off x="10728655" y="6446520"/>
+            <a:ext cx="914400" cy="274320"/>
+          </a:xfrm>
+          <a:prstGeom prst="rect">
+            <a:avLst/>
+          </a:prstGeom>
+          <a:noFill/>
+        </p:spPr>
+        <p:txBody>
+          <a:bodyPr wrap="square" anchor="t" lIns="0" rIns="0" tIns="0" bIns="0"/>
+          <a:lstStyle/>
+          <a:p>
+            <a:pPr algn="r"/>
+            <a:r>
+              <a:rPr sz="1000" b="0" i="0">
+                <a:solidFill>
+                  <a:srgbClr val="54595D"/>
+                </a:solidFill>
+                <a:latin typeface="Calibri"/>
+              </a:rPr>
+              <a:t>10</a:t>
+            </a:r>
+          </a:p>
+        </p:txBody>
+      </p:sp>
+      <p:sp>
+        <p:nvSpPr>
+          <p:cNvPr id="6" name="Rounded Rectangle 5"/>
+          <p:cNvSpPr/>
+          <p:nvPr/>
+        </p:nvSpPr>
+        <p:spPr>
+          <a:xfrm>
+            <a:off x="548640" y="1600200"/>
+            <a:ext cx="3515258" cy="2148840"/>
+          </a:xfrm>
+          <a:prstGeom prst="roundRect">
+            <a:avLst>
+              <a:gd name="adj" fmla="val 6000"/>
+            </a:avLst>
+          </a:prstGeom>
+          <a:solidFill>
+            <a:srgbClr val="EAF3FF"/>
+          </a:solidFill>
+          <a:ln>
+            <a:noFill/>
+          </a:ln>
+          <a:effectLst/>
+        </p:spPr>
+        <p:style>
+          <a:lnRef idx="1">
+            <a:schemeClr val="accent1"/>
+          </a:lnRef>
+          <a:fillRef idx="3">
+            <a:schemeClr val="accent1"/>
+          </a:fillRef>
+          <a:effectRef idx="2">
+            <a:schemeClr val="accent1"/>
+          </a:effectRef>
+          <a:fontRef idx="minor">
+            <a:schemeClr val="lt1"/>
+          </a:fontRef>
+        </p:style>
+        <p:txBody>
+          <a:bodyPr rtlCol="0" anchor="ctr"/>
+          <a:lstStyle/>
+          <a:p/>
+        </p:txBody>
+      </p:sp>
+      <p:sp>
+        <p:nvSpPr>
+          <p:cNvPr id="7" name="Oval 6"/>
+          <p:cNvSpPr/>
+          <p:nvPr/>
+        </p:nvSpPr>
+        <p:spPr>
+          <a:xfrm>
+            <a:off x="777240" y="1828800"/>
+            <a:ext cx="457200" cy="457200"/>
+          </a:xfrm>
+          <a:prstGeom prst="ellipse">
+            <a:avLst/>
+          </a:prstGeom>
+          <a:solidFill>
+            <a:srgbClr val="F2B705"/>
+          </a:solidFill>
+          <a:ln>
+            <a:noFill/>
+          </a:ln>
+          <a:effectLst/>
+        </p:spPr>
+        <p:style>
+          <a:lnRef idx="1">
+            <a:schemeClr val="accent1"/>
+          </a:lnRef>
+          <a:fillRef idx="3">
+            <a:schemeClr val="accent1"/>
+          </a:fillRef>
+          <a:effectRef idx="2">
+            <a:schemeClr val="accent1"/>
+          </a:effectRef>
+          <a:fontRef idx="minor">
+            <a:schemeClr val="lt1"/>
+          </a:fontRef>
+        </p:style>
+        <p:txBody>
+          <a:bodyPr rtlCol="0" anchor="ctr" lIns="0" rIns="0" tIns="0" bIns="0"/>
+          <a:lstStyle/>
+          <a:p>
+            <a:pPr algn="ctr"/>
+            <a:r>
+              <a:rPr sz="1500" b="1">
+                <a:solidFill>
+                  <a:srgbClr val="202122"/>
+                </a:solidFill>
+                <a:latin typeface="Calibri"/>
+              </a:rPr>
+              <a:t>1</a:t>
+            </a:r>
+          </a:p>
+        </p:txBody>
+      </p:sp>
+      <p:sp>
+        <p:nvSpPr>
+          <p:cNvPr id="8" name="TextBox 7"/>
+          <p:cNvSpPr txBox="1"/>
+          <p:nvPr/>
+        </p:nvSpPr>
+        <p:spPr>
+          <a:xfrm>
+            <a:off x="1371600" y="1801368"/>
+            <a:ext cx="2509418" cy="512064"/>
+          </a:xfrm>
+          <a:prstGeom prst="rect">
+            <a:avLst/>
+          </a:prstGeom>
+          <a:noFill/>
+        </p:spPr>
+        <p:txBody>
+          <a:bodyPr wrap="square" anchor="ctr" lIns="0" rIns="0" tIns="0" bIns="0"/>
+          <a:lstStyle/>
+          <a:p>
+            <a:pPr algn="l"/>
+            <a:r>
+              <a:rPr sz="1600" b="1" i="0">
+                <a:solidFill>
+                  <a:srgbClr val="03306E"/>
+                </a:solidFill>
+                <a:latin typeface="Calibri"/>
+              </a:rPr>
+              <a:t>Processing and storage</a:t>
+            </a:r>
+          </a:p>
+        </p:txBody>
+      </p:sp>
+      <p:sp>
+        <p:nvSpPr>
+          <p:cNvPr id="9" name="TextBox 8"/>
+          <p:cNvSpPr txBox="1"/>
+          <p:nvPr/>
+        </p:nvSpPr>
+        <p:spPr>
+          <a:xfrm>
+            <a:off x="777240" y="2468880"/>
+            <a:ext cx="3058058" cy="1143000"/>
+          </a:xfrm>
+          <a:prstGeom prst="rect">
+            <a:avLst/>
+          </a:prstGeom>
+          <a:noFill/>
+        </p:spPr>
+        <p:txBody>
+          <a:bodyPr wrap="square" anchor="t" lIns="0" rIns="0" tIns="0" bIns="0"/>
+          <a:lstStyle/>
+          <a:p>
+            <a:pPr algn="l"/>
+            <a:r>
+              <a:rPr sz="2000" b="0" i="0">
+                <a:solidFill>
+                  <a:srgbClr val="202122"/>
+                </a:solidFill>
+                <a:latin typeface="Calibri"/>
+              </a:rPr>
+              <a:t>Quantum computing and growing storage demand.</a:t>
+            </a:r>
+          </a:p>
+        </p:txBody>
+      </p:sp>
+      <p:sp>
+        <p:nvSpPr>
+          <p:cNvPr id="10" name="Rounded Rectangle 9"/>
+          <p:cNvSpPr/>
+          <p:nvPr/>
+        </p:nvSpPr>
+        <p:spPr>
+          <a:xfrm>
+            <a:off x="4338218" y="1600200"/>
+            <a:ext cx="3515258" cy="2148840"/>
+          </a:xfrm>
+          <a:prstGeom prst="roundRect">
+            <a:avLst>
+              <a:gd name="adj" fmla="val 6000"/>
+            </a:avLst>
+          </a:prstGeom>
+          <a:solidFill>
+            <a:srgbClr val="EAF3FF"/>
+          </a:solidFill>
+          <a:ln>
+            <a:noFill/>
+          </a:ln>
+          <a:effectLst/>
+        </p:spPr>
+        <p:style>
+          <a:lnRef idx="1">
+            <a:schemeClr val="accent1"/>
+          </a:lnRef>
+          <a:fillRef idx="3">
+            <a:schemeClr val="accent1"/>
+          </a:fillRef>
+          <a:effectRef idx="2">
+            <a:schemeClr val="accent1"/>
+          </a:effectRef>
+          <a:fontRef idx="minor">
+            <a:schemeClr val="lt1"/>
+          </a:fontRef>
+        </p:style>
+        <p:txBody>
+          <a:bodyPr rtlCol="0" anchor="ctr"/>
+          <a:lstStyle/>
+          <a:p/>
+        </p:txBody>
+      </p:sp>
+      <p:sp>
+        <p:nvSpPr>
+          <p:cNvPr id="11" name="Oval 10"/>
+          <p:cNvSpPr/>
+          <p:nvPr/>
+        </p:nvSpPr>
+        <p:spPr>
+          <a:xfrm>
+            <a:off x="4566818" y="1828800"/>
+            <a:ext cx="457200" cy="457200"/>
+          </a:xfrm>
+          <a:prstGeom prst="ellipse">
+            <a:avLst/>
+          </a:prstGeom>
+          <a:solidFill>
+            <a:srgbClr val="F2B705"/>
+          </a:solidFill>
+          <a:ln>
+            <a:noFill/>
+          </a:ln>
+          <a:effectLst/>
+        </p:spPr>
+        <p:style>
+          <a:lnRef idx="1">
+            <a:schemeClr val="accent1"/>
+          </a:lnRef>
+          <a:fillRef idx="3">
+            <a:schemeClr val="accent1"/>
+          </a:fillRef>
+          <a:effectRef idx="2">
+            <a:schemeClr val="accent1"/>
+          </a:effectRef>
+          <a:fontRef idx="minor">
+            <a:schemeClr val="lt1"/>
+          </a:fontRef>
+        </p:style>
+        <p:txBody>
+          <a:bodyPr rtlCol="0" anchor="ctr" lIns="0" rIns="0" tIns="0" bIns="0"/>
+          <a:lstStyle/>
+          <a:p>
+            <a:pPr algn="ctr"/>
+            <a:r>
+              <a:rPr sz="1500" b="1">
+                <a:solidFill>
+                  <a:srgbClr val="202122"/>
+                </a:solidFill>
+                <a:latin typeface="Calibri"/>
+              </a:rPr>
+              <a:t>2</a:t>
+            </a:r>
+          </a:p>
+        </p:txBody>
+      </p:sp>
+      <p:sp>
+        <p:nvSpPr>
+          <p:cNvPr id="12" name="TextBox 11"/>
+          <p:cNvSpPr txBox="1"/>
+          <p:nvPr/>
+        </p:nvSpPr>
+        <p:spPr>
+          <a:xfrm>
+            <a:off x="5161178" y="1801368"/>
+            <a:ext cx="2509418" cy="512064"/>
+          </a:xfrm>
+          <a:prstGeom prst="rect">
+            <a:avLst/>
+          </a:prstGeom>
+          <a:noFill/>
+        </p:spPr>
+        <p:txBody>
+          <a:bodyPr wrap="square" anchor="ctr" lIns="0" rIns="0" tIns="0" bIns="0"/>
+          <a:lstStyle/>
+          <a:p>
+            <a:pPr algn="l"/>
+            <a:r>
+              <a:rPr sz="1900" b="1" i="0">
+                <a:solidFill>
+                  <a:srgbClr val="03306E"/>
+                </a:solidFill>
+                <a:latin typeface="Calibri"/>
+              </a:rPr>
+              <a:t>IoT</a:t>
+            </a:r>
+          </a:p>
+        </p:txBody>
+      </p:sp>
+      <p:sp>
+        <p:nvSpPr>
+          <p:cNvPr id="13" name="TextBox 12"/>
+          <p:cNvSpPr txBox="1"/>
+          <p:nvPr/>
+        </p:nvSpPr>
+        <p:spPr>
+          <a:xfrm>
+            <a:off x="4566818" y="2468880"/>
+            <a:ext cx="3058058" cy="1143000"/>
+          </a:xfrm>
+          <a:prstGeom prst="rect">
+            <a:avLst/>
+          </a:prstGeom>
+          <a:noFill/>
+        </p:spPr>
+        <p:txBody>
+          <a:bodyPr wrap="square" anchor="t" lIns="0" rIns="0" tIns="0" bIns="0"/>
+          <a:lstStyle/>
+          <a:p>
+            <a:pPr algn="l"/>
+            <a:r>
+              <a:rPr sz="2000" b="0" i="0">
+                <a:solidFill>
+                  <a:srgbClr val="202122"/>
+                </a:solidFill>
+                <a:latin typeface="Calibri"/>
+              </a:rPr>
+              <a:t>Edge computing in industry, smart cities and homes.</a:t>
+            </a:r>
+          </a:p>
+        </p:txBody>
+      </p:sp>
+      <p:sp>
+        <p:nvSpPr>
+          <p:cNvPr id="14" name="Rounded Rectangle 13"/>
+          <p:cNvSpPr/>
+          <p:nvPr/>
+        </p:nvSpPr>
+        <p:spPr>
+          <a:xfrm>
+            <a:off x="8127796" y="1600200"/>
+            <a:ext cx="3515258" cy="2148840"/>
+          </a:xfrm>
+          <a:prstGeom prst="roundRect">
+            <a:avLst>
+              <a:gd name="adj" fmla="val 6000"/>
+            </a:avLst>
+          </a:prstGeom>
+          <a:solidFill>
+            <a:srgbClr val="EAF3FF"/>
+          </a:solidFill>
+          <a:ln>
+            <a:noFill/>
+          </a:ln>
+          <a:effectLst/>
+        </p:spPr>
+        <p:style>
+          <a:lnRef idx="1">
+            <a:schemeClr val="accent1"/>
+          </a:lnRef>
+          <a:fillRef idx="3">
+            <a:schemeClr val="accent1"/>
+          </a:fillRef>
+          <a:effectRef idx="2">
+            <a:schemeClr val="accent1"/>
+          </a:effectRef>
+          <a:fontRef idx="minor">
+            <a:schemeClr val="lt1"/>
+          </a:fontRef>
+        </p:style>
+        <p:txBody>
+          <a:bodyPr rtlCol="0" anchor="ctr"/>
+          <a:lstStyle/>
+          <a:p/>
+        </p:txBody>
+      </p:sp>
+      <p:sp>
+        <p:nvSpPr>
+          <p:cNvPr id="15" name="Oval 14"/>
+          <p:cNvSpPr/>
+          <p:nvPr/>
+        </p:nvSpPr>
+        <p:spPr>
+          <a:xfrm>
+            <a:off x="8356396" y="1828800"/>
+            <a:ext cx="457200" cy="457200"/>
+          </a:xfrm>
+          <a:prstGeom prst="ellipse">
+            <a:avLst/>
+          </a:prstGeom>
+          <a:solidFill>
+            <a:srgbClr val="F2B705"/>
+          </a:solidFill>
+          <a:ln>
+            <a:noFill/>
+          </a:ln>
+          <a:effectLst/>
+        </p:spPr>
+        <p:style>
+          <a:lnRef idx="1">
+            <a:schemeClr val="accent1"/>
+          </a:lnRef>
+          <a:fillRef idx="3">
+            <a:schemeClr val="accent1"/>
+          </a:fillRef>
+          <a:effectRef idx="2">
+            <a:schemeClr val="accent1"/>
+          </a:effectRef>
+          <a:fontRef idx="minor">
+            <a:schemeClr val="lt1"/>
+          </a:fontRef>
+        </p:style>
+        <p:txBody>
+          <a:bodyPr rtlCol="0" anchor="ctr" lIns="0" rIns="0" tIns="0" bIns="0"/>
+          <a:lstStyle/>
+          <a:p>
+            <a:pPr algn="ctr"/>
+            <a:r>
+              <a:rPr sz="1500" b="1">
+                <a:solidFill>
+                  <a:srgbClr val="202122"/>
+                </a:solidFill>
+                <a:latin typeface="Calibri"/>
+              </a:rPr>
+              <a:t>3</a:t>
+            </a:r>
+          </a:p>
+        </p:txBody>
+      </p:sp>
+      <p:sp>
+        <p:nvSpPr>
+          <p:cNvPr id="16" name="TextBox 15"/>
+          <p:cNvSpPr txBox="1"/>
+          <p:nvPr/>
+        </p:nvSpPr>
+        <p:spPr>
+          <a:xfrm>
+            <a:off x="8950756" y="1801368"/>
+            <a:ext cx="2509418" cy="512064"/>
+          </a:xfrm>
+          <a:prstGeom prst="rect">
+            <a:avLst/>
+          </a:prstGeom>
+          <a:noFill/>
+        </p:spPr>
+        <p:txBody>
+          <a:bodyPr wrap="square" anchor="ctr" lIns="0" rIns="0" tIns="0" bIns="0"/>
+          <a:lstStyle/>
+          <a:p>
+            <a:pPr algn="l"/>
+            <a:r>
+              <a:rPr sz="1900" b="1" i="0">
+                <a:solidFill>
+                  <a:srgbClr val="03306E"/>
+                </a:solidFill>
+                <a:latin typeface="Calibri"/>
+              </a:rPr>
+              <a:t>AI</a:t>
+            </a:r>
+          </a:p>
+        </p:txBody>
+      </p:sp>
+      <p:sp>
+        <p:nvSpPr>
+          <p:cNvPr id="17" name="TextBox 16"/>
+          <p:cNvSpPr txBox="1"/>
+          <p:nvPr/>
+        </p:nvSpPr>
+        <p:spPr>
+          <a:xfrm>
+            <a:off x="8356396" y="2468880"/>
+            <a:ext cx="3058058" cy="1143000"/>
+          </a:xfrm>
+          <a:prstGeom prst="rect">
+            <a:avLst/>
+          </a:prstGeom>
+          <a:noFill/>
+        </p:spPr>
+        <p:txBody>
+          <a:bodyPr wrap="square" anchor="t" lIns="0" rIns="0" tIns="0" bIns="0"/>
+          <a:lstStyle/>
+          <a:p>
+            <a:pPr algn="l"/>
+            <a:r>
+              <a:rPr sz="2000" b="0" i="0">
+                <a:solidFill>
+                  <a:srgbClr val="202122"/>
+                </a:solidFill>
+                <a:latin typeface="Calibri"/>
+              </a:rPr>
+              <a:t>Generative AI and machine learning.</a:t>
+            </a:r>
+          </a:p>
+        </p:txBody>
+      </p:sp>
+      <p:sp>
+        <p:nvSpPr>
+          <p:cNvPr id="18" name="Rounded Rectangle 17"/>
+          <p:cNvSpPr/>
+          <p:nvPr/>
+        </p:nvSpPr>
+        <p:spPr>
+          <a:xfrm>
+            <a:off x="548640" y="4023360"/>
+            <a:ext cx="3515258" cy="2148840"/>
+          </a:xfrm>
+          <a:prstGeom prst="roundRect">
+            <a:avLst>
+              <a:gd name="adj" fmla="val 6000"/>
+            </a:avLst>
+          </a:prstGeom>
+          <a:solidFill>
+            <a:srgbClr val="EAF3FF"/>
+          </a:solidFill>
+          <a:ln>
+            <a:noFill/>
+          </a:ln>
+          <a:effectLst/>
+        </p:spPr>
+        <p:style>
+          <a:lnRef idx="1">
+            <a:schemeClr val="accent1"/>
+          </a:lnRef>
+          <a:fillRef idx="3">
+            <a:schemeClr val="accent1"/>
+          </a:fillRef>
+          <a:effectRef idx="2">
+            <a:schemeClr val="accent1"/>
+          </a:effectRef>
+          <a:fontRef idx="minor">
+            <a:schemeClr val="lt1"/>
+          </a:fontRef>
+        </p:style>
+        <p:txBody>
+          <a:bodyPr rtlCol="0" anchor="ctr"/>
+          <a:lstStyle/>
+          <a:p/>
+        </p:txBody>
+      </p:sp>
+      <p:sp>
+        <p:nvSpPr>
+          <p:cNvPr id="19" name="Oval 18"/>
+          <p:cNvSpPr/>
+          <p:nvPr/>
+        </p:nvSpPr>
+        <p:spPr>
+          <a:xfrm>
+            <a:off x="777240" y="4251960"/>
+            <a:ext cx="457200" cy="457200"/>
+          </a:xfrm>
+          <a:prstGeom prst="ellipse">
+            <a:avLst/>
+          </a:prstGeom>
+          <a:solidFill>
+            <a:srgbClr val="F2B705"/>
+          </a:solidFill>
+          <a:ln>
+            <a:noFill/>
+          </a:ln>
+          <a:effectLst/>
+        </p:spPr>
+        <p:style>
+          <a:lnRef idx="1">
+            <a:schemeClr val="accent1"/>
+          </a:lnRef>
+          <a:fillRef idx="3">
+            <a:schemeClr val="accent1"/>
+          </a:fillRef>
+          <a:effectRef idx="2">
+            <a:schemeClr val="accent1"/>
+          </a:effectRef>
+          <a:fontRef idx="minor">
+            <a:schemeClr val="lt1"/>
+          </a:fontRef>
+        </p:style>
+        <p:txBody>
+          <a:bodyPr rtlCol="0" anchor="ctr" lIns="0" rIns="0" tIns="0" bIns="0"/>
+          <a:lstStyle/>
+          <a:p>
+            <a:pPr algn="ctr"/>
+            <a:r>
+              <a:rPr sz="1500" b="1">
+                <a:solidFill>
+                  <a:srgbClr val="202122"/>
+                </a:solidFill>
+                <a:latin typeface="Calibri"/>
+              </a:rPr>
+              <a:t>4</a:t>
+            </a:r>
+          </a:p>
+        </p:txBody>
+      </p:sp>
+      <p:sp>
+        <p:nvSpPr>
+          <p:cNvPr id="20" name="TextBox 19"/>
+          <p:cNvSpPr txBox="1"/>
+          <p:nvPr/>
+        </p:nvSpPr>
+        <p:spPr>
+          <a:xfrm>
+            <a:off x="1371600" y="4224528"/>
+            <a:ext cx="2509418" cy="512064"/>
+          </a:xfrm>
+          <a:prstGeom prst="rect">
+            <a:avLst/>
+          </a:prstGeom>
+          <a:noFill/>
+        </p:spPr>
+        <p:txBody>
+          <a:bodyPr wrap="square" anchor="ctr" lIns="0" rIns="0" tIns="0" bIns="0"/>
+          <a:lstStyle/>
+          <a:p>
+            <a:pPr algn="l"/>
+            <a:r>
+              <a:rPr sz="1900" b="1" i="0">
+                <a:solidFill>
+                  <a:srgbClr val="03306E"/>
+                </a:solidFill>
+                <a:latin typeface="Calibri"/>
+              </a:rPr>
+              <a:t>Extended reality</a:t>
+            </a:r>
+          </a:p>
+        </p:txBody>
+      </p:sp>
+      <p:sp>
+        <p:nvSpPr>
+          <p:cNvPr id="21" name="TextBox 20"/>
+          <p:cNvSpPr txBox="1"/>
+          <p:nvPr/>
+        </p:nvSpPr>
+        <p:spPr>
+          <a:xfrm>
+            <a:off x="777240" y="4892040"/>
+            <a:ext cx="3058058" cy="1143000"/>
+          </a:xfrm>
+          <a:prstGeom prst="rect">
+            <a:avLst/>
+          </a:prstGeom>
+          <a:noFill/>
+        </p:spPr>
+        <p:txBody>
+          <a:bodyPr wrap="square" anchor="t" lIns="0" rIns="0" tIns="0" bIns="0"/>
+          <a:lstStyle/>
+          <a:p>
+            <a:pPr algn="l"/>
+            <a:r>
+              <a:rPr sz="2000" b="0" i="0">
+                <a:solidFill>
+                  <a:srgbClr val="202122"/>
+                </a:solidFill>
+                <a:latin typeface="Calibri"/>
+              </a:rPr>
+              <a:t>Augmented and virtual reality.</a:t>
+            </a:r>
+          </a:p>
+        </p:txBody>
+      </p:sp>
+      <p:sp>
+        <p:nvSpPr>
+          <p:cNvPr id="22" name="Rounded Rectangle 21"/>
+          <p:cNvSpPr/>
+          <p:nvPr/>
+        </p:nvSpPr>
+        <p:spPr>
+          <a:xfrm>
+            <a:off x="4338218" y="4023360"/>
+            <a:ext cx="3515258" cy="2148840"/>
+          </a:xfrm>
+          <a:prstGeom prst="roundRect">
+            <a:avLst>
+              <a:gd name="adj" fmla="val 6000"/>
+            </a:avLst>
+          </a:prstGeom>
+          <a:solidFill>
+            <a:srgbClr val="EAF3FF"/>
+          </a:solidFill>
+          <a:ln>
+            <a:noFill/>
+          </a:ln>
+          <a:effectLst/>
+        </p:spPr>
+        <p:style>
+          <a:lnRef idx="1">
+            <a:schemeClr val="accent1"/>
+          </a:lnRef>
+          <a:fillRef idx="3">
+            <a:schemeClr val="accent1"/>
+          </a:fillRef>
+          <a:effectRef idx="2">
+            <a:schemeClr val="accent1"/>
+          </a:effectRef>
+          <a:fontRef idx="minor">
+            <a:schemeClr val="lt1"/>
+          </a:fontRef>
+        </p:style>
+        <p:txBody>
+          <a:bodyPr rtlCol="0" anchor="ctr"/>
+          <a:lstStyle/>
+          <a:p/>
+        </p:txBody>
+      </p:sp>
+      <p:sp>
+        <p:nvSpPr>
+          <p:cNvPr id="23" name="Oval 22"/>
+          <p:cNvSpPr/>
+          <p:nvPr/>
+        </p:nvSpPr>
+        <p:spPr>
+          <a:xfrm>
+            <a:off x="4566818" y="4251960"/>
+            <a:ext cx="457200" cy="457200"/>
+          </a:xfrm>
+          <a:prstGeom prst="ellipse">
+            <a:avLst/>
+          </a:prstGeom>
+          <a:solidFill>
+            <a:srgbClr val="F2B705"/>
+          </a:solidFill>
+          <a:ln>
+            <a:noFill/>
+          </a:ln>
+          <a:effectLst/>
+        </p:spPr>
+        <p:style>
+          <a:lnRef idx="1">
+            <a:schemeClr val="accent1"/>
+          </a:lnRef>
+          <a:fillRef idx="3">
+            <a:schemeClr val="accent1"/>
+          </a:fillRef>
+          <a:effectRef idx="2">
+            <a:schemeClr val="accent1"/>
+          </a:effectRef>
+          <a:fontRef idx="minor">
+            <a:schemeClr val="lt1"/>
+          </a:fontRef>
+        </p:style>
+        <p:txBody>
+          <a:bodyPr rtlCol="0" anchor="ctr" lIns="0" rIns="0" tIns="0" bIns="0"/>
+          <a:lstStyle/>
+          <a:p>
+            <a:pPr algn="ctr"/>
+            <a:r>
+              <a:rPr sz="1500" b="1">
+                <a:solidFill>
+                  <a:srgbClr val="202122"/>
+                </a:solidFill>
+                <a:latin typeface="Calibri"/>
+              </a:rPr>
+              <a:t>5</a:t>
+            </a:r>
+          </a:p>
+        </p:txBody>
+      </p:sp>
+      <p:sp>
+        <p:nvSpPr>
+          <p:cNvPr id="24" name="TextBox 23"/>
+          <p:cNvSpPr txBox="1"/>
+          <p:nvPr/>
+        </p:nvSpPr>
+        <p:spPr>
+          <a:xfrm>
+            <a:off x="5161178" y="4224528"/>
+            <a:ext cx="2509418" cy="512064"/>
+          </a:xfrm>
+          <a:prstGeom prst="rect">
+            <a:avLst/>
+          </a:prstGeom>
+          <a:noFill/>
+        </p:spPr>
+        <p:txBody>
+          <a:bodyPr wrap="square" anchor="ctr" lIns="0" rIns="0" tIns="0" bIns="0"/>
+          <a:lstStyle/>
+          <a:p>
+            <a:pPr algn="l"/>
+            <a:r>
+              <a:rPr sz="1600" b="1" i="0">
+                <a:solidFill>
+                  <a:srgbClr val="03306E"/>
+                </a:solidFill>
+                <a:latin typeface="Calibri"/>
+              </a:rPr>
+              <a:t>Open source and blockchain</a:t>
+            </a:r>
+          </a:p>
+        </p:txBody>
+      </p:sp>
+      <p:sp>
+        <p:nvSpPr>
+          <p:cNvPr id="25" name="TextBox 24"/>
+          <p:cNvSpPr txBox="1"/>
+          <p:nvPr/>
+        </p:nvSpPr>
+        <p:spPr>
+          <a:xfrm>
+            <a:off x="4566818" y="4892040"/>
+            <a:ext cx="3058058" cy="1143000"/>
+          </a:xfrm>
+          <a:prstGeom prst="rect">
+            <a:avLst/>
+          </a:prstGeom>
+          <a:noFill/>
+        </p:spPr>
+        <p:txBody>
+          <a:bodyPr wrap="square" anchor="t" lIns="0" rIns="0" tIns="0" bIns="0"/>
+          <a:lstStyle/>
+          <a:p>
+            <a:pPr algn="l"/>
+            <a:r>
+              <a:rPr sz="2000" b="0" i="0">
+                <a:solidFill>
+                  <a:srgbClr val="202122"/>
+                </a:solidFill>
+                <a:latin typeface="Calibri"/>
+              </a:rPr>
+              <a:t>Shared code and tamper-resistant ledgers.</a:t>
+            </a:r>
+          </a:p>
+        </p:txBody>
+      </p:sp>
+      <p:sp>
+        <p:nvSpPr>
+          <p:cNvPr id="26" name="Rounded Rectangle 25"/>
+          <p:cNvSpPr/>
+          <p:nvPr/>
+        </p:nvSpPr>
+        <p:spPr>
+          <a:xfrm>
+            <a:off x="8127796" y="4023360"/>
+            <a:ext cx="3515258" cy="2148840"/>
+          </a:xfrm>
+          <a:prstGeom prst="roundRect">
+            <a:avLst>
+              <a:gd name="adj" fmla="val 6000"/>
+            </a:avLst>
+          </a:prstGeom>
+          <a:solidFill>
+            <a:srgbClr val="EAF3FF"/>
+          </a:solidFill>
+          <a:ln>
+            <a:noFill/>
+          </a:ln>
+          <a:effectLst/>
+        </p:spPr>
+        <p:style>
+          <a:lnRef idx="1">
+            <a:schemeClr val="accent1"/>
+          </a:lnRef>
+          <a:fillRef idx="3">
+            <a:schemeClr val="accent1"/>
+          </a:fillRef>
+          <a:effectRef idx="2">
+            <a:schemeClr val="accent1"/>
+          </a:effectRef>
+          <a:fontRef idx="minor">
+            <a:schemeClr val="lt1"/>
+          </a:fontRef>
+        </p:style>
+        <p:txBody>
+          <a:bodyPr rtlCol="0" anchor="ctr"/>
+          <a:lstStyle/>
+          <a:p/>
+        </p:txBody>
+      </p:sp>
+      <p:sp>
+        <p:nvSpPr>
+          <p:cNvPr id="27" name="Oval 26"/>
+          <p:cNvSpPr/>
+          <p:nvPr/>
+        </p:nvSpPr>
+        <p:spPr>
+          <a:xfrm>
+            <a:off x="8356396" y="4251960"/>
+            <a:ext cx="457200" cy="457200"/>
+          </a:xfrm>
+          <a:prstGeom prst="ellipse">
+            <a:avLst/>
+          </a:prstGeom>
+          <a:solidFill>
+            <a:srgbClr val="F2B705"/>
+          </a:solidFill>
+          <a:ln>
+            <a:noFill/>
+          </a:ln>
+          <a:effectLst/>
+        </p:spPr>
+        <p:style>
+          <a:lnRef idx="1">
+            <a:schemeClr val="accent1"/>
+          </a:lnRef>
+          <a:fillRef idx="3">
+            <a:schemeClr val="accent1"/>
+          </a:fillRef>
+          <a:effectRef idx="2">
+            <a:schemeClr val="accent1"/>
+          </a:effectRef>
+          <a:fontRef idx="minor">
+            <a:schemeClr val="lt1"/>
+          </a:fontRef>
+        </p:style>
+        <p:txBody>
+          <a:bodyPr rtlCol="0" anchor="ctr" lIns="0" rIns="0" tIns="0" bIns="0"/>
+          <a:lstStyle/>
+          <a:p>
+            <a:pPr algn="ctr"/>
+            <a:r>
+              <a:rPr sz="1500" b="1">
+                <a:solidFill>
+                  <a:srgbClr val="202122"/>
+                </a:solidFill>
+                <a:latin typeface="Calibri"/>
+              </a:rPr>
+              <a:t>6</a:t>
+            </a:r>
+          </a:p>
+        </p:txBody>
+      </p:sp>
+      <p:sp>
+        <p:nvSpPr>
+          <p:cNvPr id="28" name="TextBox 27"/>
+          <p:cNvSpPr txBox="1"/>
+          <p:nvPr/>
+        </p:nvSpPr>
+        <p:spPr>
+          <a:xfrm>
+            <a:off x="8950756" y="4224528"/>
+            <a:ext cx="2509418" cy="512064"/>
+          </a:xfrm>
+          <a:prstGeom prst="rect">
+            <a:avLst/>
+          </a:prstGeom>
+          <a:noFill/>
+        </p:spPr>
+        <p:txBody>
+          <a:bodyPr wrap="square" anchor="ctr" lIns="0" rIns="0" tIns="0" bIns="0"/>
+          <a:lstStyle/>
+          <a:p>
+            <a:pPr algn="l"/>
+            <a:r>
+              <a:rPr sz="1900" b="1" i="0">
+                <a:solidFill>
+                  <a:srgbClr val="03306E"/>
+                </a:solidFill>
+                <a:latin typeface="Calibri"/>
+              </a:rPr>
+              <a:t>Autonomous machines</a:t>
+            </a:r>
+          </a:p>
+        </p:txBody>
+      </p:sp>
+      <p:sp>
+        <p:nvSpPr>
+          <p:cNvPr id="29" name="TextBox 28"/>
+          <p:cNvSpPr txBox="1"/>
+          <p:nvPr/>
+        </p:nvSpPr>
+        <p:spPr>
+          <a:xfrm>
+            <a:off x="8356396" y="4892040"/>
+            <a:ext cx="3058058" cy="1143000"/>
+          </a:xfrm>
+          <a:prstGeom prst="rect">
+            <a:avLst/>
+          </a:prstGeom>
+          <a:noFill/>
+        </p:spPr>
+        <p:txBody>
+          <a:bodyPr wrap="square" anchor="t" lIns="0" rIns="0" tIns="0" bIns="0"/>
+          <a:lstStyle/>
+          <a:p>
+            <a:pPr algn="l"/>
+            <a:r>
+              <a:rPr sz="1800" b="0" i="0">
+                <a:solidFill>
+                  <a:srgbClr val="202122"/>
+                </a:solidFill>
+                <a:latin typeface="Calibri"/>
+              </a:rPr>
+              <a:t>Self-driving cars, robotic assembly. Plus environmental costs: rare metals, energy, disposal.</a:t>
+            </a:r>
+          </a:p>
+        </p:txBody>
+      </p:sp>
+    </p:spTree>
+  </p:cSld>
+  <p:clrMapOvr>
+    <a:masterClrMapping/>
+  </p:clrMapOvr>
+</p:sld>
+</file>
+
+<file path=ppt/slides/slide11.xml><?xml version="1.0" encoding="utf-8"?>
+<p:sld xmlns:a="http://schemas.openxmlformats.org/drawingml/2006/main" xmlns:p="http://schemas.openxmlformats.org/presentationml/2006/main" xmlns:r="http://schemas.openxmlformats.org/officeDocument/2006/relationships">
+  <p:cSld>
+    <p:bg>
+      <p:bgPr>
+        <a:solidFill>
+          <a:srgbClr val="FFFFFF"/>
+        </a:solidFill>
+        <a:effectLst/>
+      </p:bgPr>
+    </p:bg>
+    <p:spTree>
+      <p:nvGrpSpPr>
+        <p:cNvPr id="1" name=""/>
+        <p:cNvGrpSpPr/>
+        <p:nvPr/>
+      </p:nvGrpSpPr>
+      <p:grpSpPr/>
+      <p:sp>
+        <p:nvSpPr>
+          <p:cNvPr id="2" name="TextBox 1"/>
+          <p:cNvSpPr txBox="1"/>
+          <p:nvPr/>
+        </p:nvSpPr>
+        <p:spPr>
+          <a:xfrm>
+            <a:off x="548640" y="320040"/>
+            <a:ext cx="11094415" cy="274320"/>
+          </a:xfrm>
+          <a:prstGeom prst="rect">
+            <a:avLst/>
+          </a:prstGeom>
+          <a:noFill/>
+        </p:spPr>
+        <p:txBody>
+          <a:bodyPr wrap="square" anchor="t" lIns="0" rIns="0" tIns="0" bIns="0"/>
+          <a:lstStyle/>
+          <a:p>
+            <a:pPr algn="l"/>
+            <a:r>
+              <a:rPr sz="1100" b="1" i="0">
+                <a:solidFill>
+                  <a:srgbClr val="54595D"/>
+                </a:solidFill>
+                <a:latin typeface="Calibri"/>
+              </a:rPr>
+              <a:t>CORE COMPONENT  ·  Core Paper 1</a:t>
+            </a:r>
+          </a:p>
+        </p:txBody>
+      </p:sp>
+      <p:sp>
+        <p:nvSpPr>
+          <p:cNvPr id="3" name="TextBox 2"/>
+          <p:cNvSpPr txBox="1"/>
+          <p:nvPr/>
+        </p:nvSpPr>
+        <p:spPr>
+          <a:xfrm>
+            <a:off x="548640" y="566928"/>
+            <a:ext cx="11094415" cy="822960"/>
+          </a:xfrm>
+          <a:prstGeom prst="rect">
+            <a:avLst/>
+          </a:prstGeom>
+          <a:noFill/>
+        </p:spPr>
+        <p:txBody>
+          <a:bodyPr wrap="square" anchor="ctr" lIns="0" rIns="0" tIns="0" bIns="0"/>
+          <a:lstStyle/>
+          <a:p>
+            <a:pPr algn="l"/>
+            <a:r>
+              <a:rPr sz="3200" b="1" i="0">
+                <a:solidFill>
+                  <a:srgbClr val="03306E"/>
+                </a:solidFill>
+                <a:latin typeface="Cambria"/>
+              </a:rPr>
+              <a:t>Quick check: Emerging technologies</a:t>
+            </a:r>
+          </a:p>
+        </p:txBody>
+      </p:sp>
+      <p:sp>
+        <p:nvSpPr>
+          <p:cNvPr id="4" name="TextBox 3"/>
+          <p:cNvSpPr txBox="1"/>
+          <p:nvPr/>
+        </p:nvSpPr>
+        <p:spPr>
+          <a:xfrm>
+            <a:off x="548640" y="6446520"/>
+            <a:ext cx="8229600" cy="274320"/>
+          </a:xfrm>
+          <a:prstGeom prst="rect">
+            <a:avLst/>
+          </a:prstGeom>
+          <a:noFill/>
+        </p:spPr>
+        <p:txBody>
+          <a:bodyPr wrap="square" anchor="t" lIns="0" rIns="0" tIns="0" bIns="0"/>
+          <a:lstStyle/>
+          <a:p>
+            <a:pPr algn="l"/>
+            <a:r>
+              <a:rPr sz="1000" b="0" i="0">
+                <a:solidFill>
+                  <a:srgbClr val="54595D"/>
+                </a:solidFill>
+                <a:latin typeface="Calibri"/>
+              </a:rPr>
+              <a:t>Digital Software Development T Level  ·  Emerging Issues and Technologies</a:t>
+            </a:r>
+          </a:p>
+        </p:txBody>
+      </p:sp>
+      <p:sp>
+        <p:nvSpPr>
+          <p:cNvPr id="5" name="TextBox 4"/>
+          <p:cNvSpPr txBox="1"/>
+          <p:nvPr/>
+        </p:nvSpPr>
+        <p:spPr>
+          <a:xfrm>
+            <a:off x="10728655" y="6446520"/>
+            <a:ext cx="914400" cy="274320"/>
+          </a:xfrm>
+          <a:prstGeom prst="rect">
+            <a:avLst/>
+          </a:prstGeom>
+          <a:noFill/>
+        </p:spPr>
+        <p:txBody>
+          <a:bodyPr wrap="square" anchor="t" lIns="0" rIns="0" tIns="0" bIns="0"/>
+          <a:lstStyle/>
+          <a:p>
+            <a:pPr algn="r"/>
+            <a:r>
+              <a:rPr sz="1000" b="0" i="0">
+                <a:solidFill>
+                  <a:srgbClr val="54595D"/>
+                </a:solidFill>
+                <a:latin typeface="Calibri"/>
+              </a:rPr>
+              <a:t>11</a:t>
+            </a:r>
+          </a:p>
+        </p:txBody>
+      </p:sp>
+      <p:sp>
+        <p:nvSpPr>
+          <p:cNvPr id="6" name="Oval 5"/>
+          <p:cNvSpPr/>
+          <p:nvPr/>
+        </p:nvSpPr>
+        <p:spPr>
+          <a:xfrm>
+            <a:off x="548640" y="1691640"/>
+            <a:ext cx="502920" cy="502920"/>
+          </a:xfrm>
+          <a:prstGeom prst="ellipse">
+            <a:avLst/>
+          </a:prstGeom>
+          <a:solidFill>
+            <a:srgbClr val="F2B705"/>
+          </a:solidFill>
+          <a:ln>
+            <a:noFill/>
+          </a:ln>
+          <a:effectLst/>
+        </p:spPr>
+        <p:style>
+          <a:lnRef idx="1">
+            <a:schemeClr val="accent1"/>
+          </a:lnRef>
+          <a:fillRef idx="3">
+            <a:schemeClr val="accent1"/>
+          </a:fillRef>
+          <a:effectRef idx="2">
+            <a:schemeClr val="accent1"/>
+          </a:effectRef>
+          <a:fontRef idx="minor">
+            <a:schemeClr val="lt1"/>
+          </a:fontRef>
+        </p:style>
+        <p:txBody>
+          <a:bodyPr rtlCol="0" anchor="ctr" lIns="0" rIns="0" tIns="0" bIns="0"/>
+          <a:lstStyle/>
+          <a:p>
+            <a:pPr algn="ctr"/>
+            <a:r>
+              <a:rPr sz="1600" b="1">
+                <a:solidFill>
+                  <a:srgbClr val="202122"/>
+                </a:solidFill>
+                <a:latin typeface="Calibri"/>
+              </a:rPr>
+              <a:t>1</a:t>
+            </a:r>
+          </a:p>
+        </p:txBody>
+      </p:sp>
+      <p:sp>
+        <p:nvSpPr>
+          <p:cNvPr id="7" name="TextBox 6"/>
+          <p:cNvSpPr txBox="1"/>
+          <p:nvPr/>
+        </p:nvSpPr>
+        <p:spPr>
+          <a:xfrm>
+            <a:off x="1371600" y="1645920"/>
+            <a:ext cx="10271455" cy="1188720"/>
+          </a:xfrm>
+          <a:prstGeom prst="rect">
+            <a:avLst/>
+          </a:prstGeom>
+          <a:noFill/>
+        </p:spPr>
+        <p:txBody>
+          <a:bodyPr wrap="square" anchor="t" lIns="0" rIns="0" tIns="0" bIns="0"/>
+          <a:lstStyle/>
+          <a:p>
+            <a:pPr algn="l"/>
+            <a:r>
+              <a:rPr sz="2400" b="0" i="0">
+                <a:solidFill>
+                  <a:srgbClr val="202122"/>
+                </a:solidFill>
+                <a:latin typeface="Calibri"/>
+              </a:rPr>
+              <a:t>What is edge computing?</a:t>
+            </a:r>
+          </a:p>
+        </p:txBody>
+      </p:sp>
+      <p:sp>
+        <p:nvSpPr>
+          <p:cNvPr id="8" name="Oval 7"/>
+          <p:cNvSpPr/>
+          <p:nvPr/>
+        </p:nvSpPr>
+        <p:spPr>
+          <a:xfrm>
+            <a:off x="548640" y="3108960"/>
+            <a:ext cx="502920" cy="502920"/>
+          </a:xfrm>
+          <a:prstGeom prst="ellipse">
+            <a:avLst/>
+          </a:prstGeom>
+          <a:solidFill>
+            <a:srgbClr val="F2B705"/>
+          </a:solidFill>
+          <a:ln>
+            <a:noFill/>
+          </a:ln>
+          <a:effectLst/>
+        </p:spPr>
+        <p:style>
+          <a:lnRef idx="1">
+            <a:schemeClr val="accent1"/>
+          </a:lnRef>
+          <a:fillRef idx="3">
+            <a:schemeClr val="accent1"/>
+          </a:fillRef>
+          <a:effectRef idx="2">
+            <a:schemeClr val="accent1"/>
+          </a:effectRef>
+          <a:fontRef idx="minor">
+            <a:schemeClr val="lt1"/>
+          </a:fontRef>
+        </p:style>
+        <p:txBody>
+          <a:bodyPr rtlCol="0" anchor="ctr" lIns="0" rIns="0" tIns="0" bIns="0"/>
+          <a:lstStyle/>
+          <a:p>
+            <a:pPr algn="ctr"/>
+            <a:r>
+              <a:rPr sz="1600" b="1">
+                <a:solidFill>
+                  <a:srgbClr val="202122"/>
+                </a:solidFill>
+                <a:latin typeface="Calibri"/>
+              </a:rPr>
+              <a:t>2</a:t>
+            </a:r>
+          </a:p>
+        </p:txBody>
+      </p:sp>
+      <p:sp>
+        <p:nvSpPr>
+          <p:cNvPr id="9" name="TextBox 8"/>
+          <p:cNvSpPr txBox="1"/>
+          <p:nvPr/>
+        </p:nvSpPr>
+        <p:spPr>
+          <a:xfrm>
+            <a:off x="1371600" y="3063240"/>
+            <a:ext cx="10271455" cy="1188720"/>
+          </a:xfrm>
+          <a:prstGeom prst="rect">
+            <a:avLst/>
+          </a:prstGeom>
+          <a:noFill/>
+        </p:spPr>
+        <p:txBody>
+          <a:bodyPr wrap="square" anchor="t" lIns="0" rIns="0" tIns="0" bIns="0"/>
+          <a:lstStyle/>
+          <a:p>
+            <a:pPr algn="l"/>
+            <a:r>
+              <a:rPr sz="2400" b="0" i="0">
+                <a:solidFill>
+                  <a:srgbClr val="202122"/>
+                </a:solidFill>
+                <a:latin typeface="Calibri"/>
+              </a:rPr>
+              <a:t>Give one environmental cost of technology.</a:t>
+            </a:r>
+          </a:p>
+        </p:txBody>
+      </p:sp>
+      <p:sp>
+        <p:nvSpPr>
+          <p:cNvPr id="10" name="Oval 9"/>
+          <p:cNvSpPr/>
+          <p:nvPr/>
+        </p:nvSpPr>
+        <p:spPr>
+          <a:xfrm>
+            <a:off x="548640" y="4526280"/>
+            <a:ext cx="502920" cy="502920"/>
+          </a:xfrm>
+          <a:prstGeom prst="ellipse">
+            <a:avLst/>
+          </a:prstGeom>
+          <a:solidFill>
+            <a:srgbClr val="F2B705"/>
+          </a:solidFill>
+          <a:ln>
+            <a:noFill/>
+          </a:ln>
+          <a:effectLst/>
+        </p:spPr>
+        <p:style>
+          <a:lnRef idx="1">
+            <a:schemeClr val="accent1"/>
+          </a:lnRef>
+          <a:fillRef idx="3">
+            <a:schemeClr val="accent1"/>
+          </a:fillRef>
+          <a:effectRef idx="2">
+            <a:schemeClr val="accent1"/>
+          </a:effectRef>
+          <a:fontRef idx="minor">
+            <a:schemeClr val="lt1"/>
+          </a:fontRef>
+        </p:style>
+        <p:txBody>
+          <a:bodyPr rtlCol="0" anchor="ctr" lIns="0" rIns="0" tIns="0" bIns="0"/>
+          <a:lstStyle/>
+          <a:p>
+            <a:pPr algn="ctr"/>
+            <a:r>
+              <a:rPr sz="1600" b="1">
+                <a:solidFill>
+                  <a:srgbClr val="202122"/>
+                </a:solidFill>
+                <a:latin typeface="Calibri"/>
+              </a:rPr>
+              <a:t>3</a:t>
+            </a:r>
+          </a:p>
+        </p:txBody>
+      </p:sp>
+      <p:sp>
+        <p:nvSpPr>
+          <p:cNvPr id="11" name="TextBox 10"/>
+          <p:cNvSpPr txBox="1"/>
+          <p:nvPr/>
+        </p:nvSpPr>
+        <p:spPr>
+          <a:xfrm>
+            <a:off x="1371600" y="4480560"/>
+            <a:ext cx="10271455" cy="1188720"/>
+          </a:xfrm>
+          <a:prstGeom prst="rect">
+            <a:avLst/>
+          </a:prstGeom>
+          <a:noFill/>
+        </p:spPr>
+        <p:txBody>
+          <a:bodyPr wrap="square" anchor="t" lIns="0" rIns="0" tIns="0" bIns="0"/>
+          <a:lstStyle/>
+          <a:p>
+            <a:pPr algn="l"/>
+            <a:r>
+              <a:rPr sz="2400" b="0" i="0">
+                <a:solidFill>
+                  <a:srgbClr val="202122"/>
+                </a:solidFill>
+                <a:latin typeface="Calibri"/>
+              </a:rPr>
+              <a:t>What does machine learning do?</a:t>
+            </a:r>
+          </a:p>
+        </p:txBody>
+      </p:sp>
+      <p:sp>
+        <p:nvSpPr>
+          <p:cNvPr id="12" name="TextBox 11"/>
+          <p:cNvSpPr txBox="1"/>
+          <p:nvPr/>
+        </p:nvSpPr>
+        <p:spPr>
+          <a:xfrm>
+            <a:off x="548640" y="5852160"/>
+            <a:ext cx="11094415" cy="365760"/>
+          </a:xfrm>
+          <a:prstGeom prst="rect">
+            <a:avLst/>
+          </a:prstGeom>
+          <a:noFill/>
+        </p:spPr>
+        <p:txBody>
+          <a:bodyPr wrap="square" anchor="t" lIns="0" rIns="0" tIns="0" bIns="0"/>
+          <a:lstStyle/>
+          <a:p>
+            <a:pPr algn="l"/>
+            <a:r>
+              <a:rPr sz="1300" b="0" i="1">
+                <a:solidFill>
+                  <a:srgbClr val="54595D"/>
+                </a:solidFill>
+                <a:latin typeface="Calibri"/>
+              </a:rPr>
+              <a:t>Answer on mini whiteboards or in your book. Answers are in the speaker notes.</a:t>
+            </a:r>
+          </a:p>
+        </p:txBody>
+      </p:sp>
+    </p:spTree>
+  </p:cSld>
+  <p:clrMapOvr>
+    <a:masterClrMapping/>
+  </p:clrMapOvr>
+</p:sld>
+</file>
+
+<file path=ppt/slides/slide12.xml><?xml version="1.0" encoding="utf-8"?>
+<p:sld xmlns:a="http://schemas.openxmlformats.org/drawingml/2006/main" xmlns:p="http://schemas.openxmlformats.org/presentationml/2006/main" xmlns:r="http://schemas.openxmlformats.org/officeDocument/2006/relationships">
+  <p:cSld>
+    <p:bg>
+      <p:bgPr>
+        <a:solidFill>
+          <a:srgbClr val="FFFFFF"/>
+        </a:solidFill>
+        <a:effectLst/>
+      </p:bgPr>
+    </p:bg>
+    <p:spTree>
+      <p:nvGrpSpPr>
+        <p:cNvPr id="1" name=""/>
+        <p:cNvGrpSpPr/>
+        <p:nvPr/>
+      </p:nvGrpSpPr>
+      <p:grpSpPr/>
+      <p:sp>
+        <p:nvSpPr>
+          <p:cNvPr id="2" name="TextBox 1"/>
+          <p:cNvSpPr txBox="1"/>
+          <p:nvPr/>
+        </p:nvSpPr>
+        <p:spPr>
+          <a:xfrm>
+            <a:off x="548640" y="320040"/>
+            <a:ext cx="11094415" cy="274320"/>
+          </a:xfrm>
+          <a:prstGeom prst="rect">
+            <a:avLst/>
+          </a:prstGeom>
+          <a:noFill/>
+        </p:spPr>
+        <p:txBody>
+          <a:bodyPr wrap="square" anchor="t" lIns="0" rIns="0" tIns="0" bIns="0"/>
+          <a:lstStyle/>
+          <a:p>
+            <a:pPr algn="l"/>
+            <a:r>
+              <a:rPr sz="1100" b="1" i="0">
+                <a:solidFill>
+                  <a:srgbClr val="54595D"/>
+                </a:solidFill>
+                <a:latin typeface="Calibri"/>
+              </a:rPr>
+              <a:t>CORE COMPONENT  ·  Core Paper 1</a:t>
+            </a:r>
+          </a:p>
+        </p:txBody>
+      </p:sp>
+      <p:sp>
+        <p:nvSpPr>
+          <p:cNvPr id="3" name="TextBox 2"/>
+          <p:cNvSpPr txBox="1"/>
+          <p:nvPr/>
+        </p:nvSpPr>
+        <p:spPr>
+          <a:xfrm>
+            <a:off x="548640" y="566928"/>
+            <a:ext cx="11094415" cy="822960"/>
+          </a:xfrm>
+          <a:prstGeom prst="rect">
+            <a:avLst/>
+          </a:prstGeom>
+          <a:noFill/>
+        </p:spPr>
+        <p:txBody>
+          <a:bodyPr wrap="square" anchor="ctr" lIns="0" rIns="0" tIns="0" bIns="0"/>
+          <a:lstStyle/>
+          <a:p>
+            <a:pPr algn="l"/>
+            <a:r>
+              <a:rPr sz="3200" b="1" i="0">
+                <a:solidFill>
+                  <a:srgbClr val="03306E"/>
+                </a:solidFill>
+                <a:latin typeface="Cambria"/>
+              </a:rPr>
+              <a:t>Check your understanding</a:t>
+            </a:r>
+          </a:p>
+        </p:txBody>
+      </p:sp>
+      <p:sp>
+        <p:nvSpPr>
+          <p:cNvPr id="4" name="TextBox 3"/>
+          <p:cNvSpPr txBox="1"/>
+          <p:nvPr/>
+        </p:nvSpPr>
+        <p:spPr>
+          <a:xfrm>
+            <a:off x="548640" y="6446520"/>
+            <a:ext cx="8229600" cy="274320"/>
+          </a:xfrm>
+          <a:prstGeom prst="rect">
+            <a:avLst/>
+          </a:prstGeom>
+          <a:noFill/>
+        </p:spPr>
+        <p:txBody>
+          <a:bodyPr wrap="square" anchor="t" lIns="0" rIns="0" tIns="0" bIns="0"/>
+          <a:lstStyle/>
+          <a:p>
+            <a:pPr algn="l"/>
+            <a:r>
+              <a:rPr sz="1000" b="0" i="0">
+                <a:solidFill>
+                  <a:srgbClr val="54595D"/>
+                </a:solidFill>
+                <a:latin typeface="Calibri"/>
+              </a:rPr>
+              <a:t>Digital Software Development T Level  ·  Emerging Issues and Technologies</a:t>
+            </a:r>
+          </a:p>
+        </p:txBody>
+      </p:sp>
+      <p:sp>
+        <p:nvSpPr>
+          <p:cNvPr id="5" name="TextBox 4"/>
+          <p:cNvSpPr txBox="1"/>
+          <p:nvPr/>
+        </p:nvSpPr>
+        <p:spPr>
+          <a:xfrm>
+            <a:off x="10728655" y="6446520"/>
+            <a:ext cx="914400" cy="274320"/>
+          </a:xfrm>
+          <a:prstGeom prst="rect">
+            <a:avLst/>
+          </a:prstGeom>
+          <a:noFill/>
+        </p:spPr>
+        <p:txBody>
+          <a:bodyPr wrap="square" anchor="t" lIns="0" rIns="0" tIns="0" bIns="0"/>
+          <a:lstStyle/>
+          <a:p>
+            <a:pPr algn="r"/>
+            <a:r>
+              <a:rPr sz="1000" b="0" i="0">
+                <a:solidFill>
+                  <a:srgbClr val="54595D"/>
+                </a:solidFill>
+                <a:latin typeface="Calibri"/>
+              </a:rPr>
+              <a:t>12</a:t>
+            </a:r>
+          </a:p>
+        </p:txBody>
+      </p:sp>
+      <p:sp>
+        <p:nvSpPr>
+          <p:cNvPr id="6" name="Oval 5"/>
+          <p:cNvSpPr/>
+          <p:nvPr/>
+        </p:nvSpPr>
+        <p:spPr>
+          <a:xfrm>
+            <a:off x="548640" y="1618488"/>
+            <a:ext cx="411480" cy="411480"/>
+          </a:xfrm>
+          <a:prstGeom prst="ellipse">
+            <a:avLst/>
+          </a:prstGeom>
+          <a:solidFill>
+            <a:srgbClr val="F2B705"/>
+          </a:solidFill>
+          <a:ln>
+            <a:noFill/>
+          </a:ln>
+          <a:effectLst/>
+        </p:spPr>
+        <p:style>
+          <a:lnRef idx="1">
+            <a:schemeClr val="accent1"/>
+          </a:lnRef>
+          <a:fillRef idx="3">
+            <a:schemeClr val="accent1"/>
+          </a:fillRef>
+          <a:effectRef idx="2">
+            <a:schemeClr val="accent1"/>
+          </a:effectRef>
+          <a:fontRef idx="minor">
+            <a:schemeClr val="lt1"/>
+          </a:fontRef>
+        </p:style>
+        <p:txBody>
+          <a:bodyPr rtlCol="0" anchor="ctr" lIns="0" rIns="0" tIns="0" bIns="0"/>
+          <a:lstStyle/>
+          <a:p>
+            <a:pPr algn="ctr"/>
+            <a:r>
+              <a:rPr sz="1400" b="1">
+                <a:solidFill>
+                  <a:srgbClr val="202122"/>
+                </a:solidFill>
+                <a:latin typeface="Calibri"/>
+              </a:rPr>
+              <a:t>1</a:t>
+            </a:r>
+          </a:p>
+        </p:txBody>
+      </p:sp>
+      <p:sp>
+        <p:nvSpPr>
+          <p:cNvPr id="7" name="TextBox 6"/>
+          <p:cNvSpPr txBox="1"/>
+          <p:nvPr/>
+        </p:nvSpPr>
+        <p:spPr>
+          <a:xfrm>
+            <a:off x="1234440" y="1600200"/>
+            <a:ext cx="10408615" cy="1030986"/>
+          </a:xfrm>
+          <a:prstGeom prst="rect">
+            <a:avLst/>
+          </a:prstGeom>
+          <a:noFill/>
+        </p:spPr>
+        <p:txBody>
+          <a:bodyPr wrap="square" anchor="t" lIns="0" rIns="0" tIns="0" bIns="0"/>
+          <a:lstStyle/>
+          <a:p>
+            <a:pPr algn="l"/>
+            <a:r>
+              <a:rPr sz="2200" b="0" i="0">
+                <a:solidFill>
+                  <a:srgbClr val="202122"/>
+                </a:solidFill>
+                <a:latin typeface="Calibri"/>
+              </a:rPr>
+              <a:t>Give two impacts of digital technology on society.</a:t>
+            </a:r>
+          </a:p>
+        </p:txBody>
+      </p:sp>
+      <p:sp>
+        <p:nvSpPr>
+          <p:cNvPr id="8" name="Oval 7"/>
+          <p:cNvSpPr/>
+          <p:nvPr/>
+        </p:nvSpPr>
+        <p:spPr>
+          <a:xfrm>
+            <a:off x="548640" y="2814066"/>
+            <a:ext cx="411480" cy="411480"/>
+          </a:xfrm>
+          <a:prstGeom prst="ellipse">
+            <a:avLst/>
+          </a:prstGeom>
+          <a:solidFill>
+            <a:srgbClr val="F2B705"/>
+          </a:solidFill>
+          <a:ln>
+            <a:noFill/>
+          </a:ln>
+          <a:effectLst/>
+        </p:spPr>
+        <p:style>
+          <a:lnRef idx="1">
+            <a:schemeClr val="accent1"/>
+          </a:lnRef>
+          <a:fillRef idx="3">
+            <a:schemeClr val="accent1"/>
+          </a:fillRef>
+          <a:effectRef idx="2">
+            <a:schemeClr val="accent1"/>
+          </a:effectRef>
+          <a:fontRef idx="minor">
+            <a:schemeClr val="lt1"/>
+          </a:fontRef>
+        </p:style>
+        <p:txBody>
+          <a:bodyPr rtlCol="0" anchor="ctr" lIns="0" rIns="0" tIns="0" bIns="0"/>
+          <a:lstStyle/>
+          <a:p>
+            <a:pPr algn="ctr"/>
+            <a:r>
+              <a:rPr sz="1400" b="1">
+                <a:solidFill>
+                  <a:srgbClr val="202122"/>
+                </a:solidFill>
+                <a:latin typeface="Calibri"/>
+              </a:rPr>
+              <a:t>2</a:t>
+            </a:r>
+          </a:p>
+        </p:txBody>
+      </p:sp>
+      <p:sp>
+        <p:nvSpPr>
+          <p:cNvPr id="9" name="TextBox 8"/>
+          <p:cNvSpPr txBox="1"/>
+          <p:nvPr/>
+        </p:nvSpPr>
+        <p:spPr>
+          <a:xfrm>
+            <a:off x="1234440" y="2795778"/>
+            <a:ext cx="10408615" cy="1030986"/>
+          </a:xfrm>
+          <a:prstGeom prst="rect">
+            <a:avLst/>
+          </a:prstGeom>
+          <a:noFill/>
+        </p:spPr>
+        <p:txBody>
+          <a:bodyPr wrap="square" anchor="t" lIns="0" rIns="0" tIns="0" bIns="0"/>
+          <a:lstStyle/>
+          <a:p>
+            <a:pPr algn="l"/>
+            <a:r>
+              <a:rPr sz="2200" b="0" i="0">
+                <a:solidFill>
+                  <a:srgbClr val="202122"/>
+                </a:solidFill>
+                <a:latin typeface="Calibri"/>
+              </a:rPr>
+              <a:t>Why should developers check datasets for bias?</a:t>
+            </a:r>
+          </a:p>
+        </p:txBody>
+      </p:sp>
+      <p:sp>
+        <p:nvSpPr>
+          <p:cNvPr id="10" name="Oval 9"/>
+          <p:cNvSpPr/>
+          <p:nvPr/>
+        </p:nvSpPr>
+        <p:spPr>
+          <a:xfrm>
+            <a:off x="548640" y="4009644"/>
+            <a:ext cx="411480" cy="411480"/>
+          </a:xfrm>
+          <a:prstGeom prst="ellipse">
+            <a:avLst/>
+          </a:prstGeom>
+          <a:solidFill>
+            <a:srgbClr val="F2B705"/>
+          </a:solidFill>
+          <a:ln>
+            <a:noFill/>
+          </a:ln>
+          <a:effectLst/>
+        </p:spPr>
+        <p:style>
+          <a:lnRef idx="1">
+            <a:schemeClr val="accent1"/>
+          </a:lnRef>
+          <a:fillRef idx="3">
+            <a:schemeClr val="accent1"/>
+          </a:fillRef>
+          <a:effectRef idx="2">
+            <a:schemeClr val="accent1"/>
+          </a:effectRef>
+          <a:fontRef idx="minor">
+            <a:schemeClr val="lt1"/>
+          </a:fontRef>
+        </p:style>
+        <p:txBody>
+          <a:bodyPr rtlCol="0" anchor="ctr" lIns="0" rIns="0" tIns="0" bIns="0"/>
+          <a:lstStyle/>
+          <a:p>
+            <a:pPr algn="ctr"/>
+            <a:r>
+              <a:rPr sz="1400" b="1">
+                <a:solidFill>
+                  <a:srgbClr val="202122"/>
+                </a:solidFill>
+                <a:latin typeface="Calibri"/>
+              </a:rPr>
+              <a:t>3</a:t>
+            </a:r>
+          </a:p>
+        </p:txBody>
+      </p:sp>
+      <p:sp>
+        <p:nvSpPr>
+          <p:cNvPr id="11" name="TextBox 10"/>
+          <p:cNvSpPr txBox="1"/>
+          <p:nvPr/>
+        </p:nvSpPr>
+        <p:spPr>
+          <a:xfrm>
+            <a:off x="1234440" y="3991356"/>
+            <a:ext cx="10408615" cy="1030986"/>
+          </a:xfrm>
+          <a:prstGeom prst="rect">
+            <a:avLst/>
+          </a:prstGeom>
+          <a:noFill/>
+        </p:spPr>
+        <p:txBody>
+          <a:bodyPr wrap="square" anchor="t" lIns="0" rIns="0" tIns="0" bIns="0"/>
+          <a:lstStyle/>
+          <a:p>
+            <a:pPr algn="l"/>
+            <a:r>
+              <a:rPr sz="2200" b="0" i="0">
+                <a:solidFill>
+                  <a:srgbClr val="202122"/>
+                </a:solidFill>
+                <a:latin typeface="Calibri"/>
+              </a:rPr>
+              <a:t>What is edge computing?</a:t>
+            </a:r>
+          </a:p>
+        </p:txBody>
+      </p:sp>
+      <p:sp>
+        <p:nvSpPr>
+          <p:cNvPr id="12" name="Oval 11"/>
+          <p:cNvSpPr/>
+          <p:nvPr/>
+        </p:nvSpPr>
+        <p:spPr>
+          <a:xfrm>
+            <a:off x="548640" y="5205221"/>
+            <a:ext cx="411480" cy="411480"/>
+          </a:xfrm>
+          <a:prstGeom prst="ellipse">
+            <a:avLst/>
+          </a:prstGeom>
+          <a:solidFill>
+            <a:srgbClr val="F2B705"/>
+          </a:solidFill>
+          <a:ln>
+            <a:noFill/>
+          </a:ln>
+          <a:effectLst/>
+        </p:spPr>
+        <p:style>
+          <a:lnRef idx="1">
+            <a:schemeClr val="accent1"/>
+          </a:lnRef>
+          <a:fillRef idx="3">
+            <a:schemeClr val="accent1"/>
+          </a:fillRef>
+          <a:effectRef idx="2">
+            <a:schemeClr val="accent1"/>
+          </a:effectRef>
+          <a:fontRef idx="minor">
+            <a:schemeClr val="lt1"/>
+          </a:fontRef>
+        </p:style>
+        <p:txBody>
+          <a:bodyPr rtlCol="0" anchor="ctr" lIns="0" rIns="0" tIns="0" bIns="0"/>
+          <a:lstStyle/>
+          <a:p>
+            <a:pPr algn="ctr"/>
+            <a:r>
+              <a:rPr sz="1400" b="1">
+                <a:solidFill>
+                  <a:srgbClr val="202122"/>
+                </a:solidFill>
+                <a:latin typeface="Calibri"/>
+              </a:rPr>
+              <a:t>4</a:t>
+            </a:r>
+          </a:p>
+        </p:txBody>
+      </p:sp>
+      <p:sp>
+        <p:nvSpPr>
+          <p:cNvPr id="13" name="TextBox 12"/>
+          <p:cNvSpPr txBox="1"/>
+          <p:nvPr/>
+        </p:nvSpPr>
+        <p:spPr>
+          <a:xfrm>
+            <a:off x="1234440" y="5186933"/>
+            <a:ext cx="10408615" cy="1030986"/>
+          </a:xfrm>
+          <a:prstGeom prst="rect">
+            <a:avLst/>
+          </a:prstGeom>
+          <a:noFill/>
+        </p:spPr>
+        <p:txBody>
+          <a:bodyPr wrap="square" anchor="t" lIns="0" rIns="0" tIns="0" bIns="0"/>
+          <a:lstStyle/>
+          <a:p>
+            <a:pPr algn="l"/>
+            <a:r>
+              <a:rPr sz="2200" b="0" i="0">
+                <a:solidFill>
+                  <a:srgbClr val="202122"/>
+                </a:solidFill>
+                <a:latin typeface="Calibri"/>
+              </a:rPr>
+              <a:t>Give one environmental impact of new technology.</a:t>
+            </a:r>
+          </a:p>
+        </p:txBody>
+      </p:sp>
+    </p:spTree>
+  </p:cSld>
+  <p:clrMapOvr>
+    <a:masterClrMapping/>
+  </p:clrMapOvr>
+</p:sld>
+</file>
+
+<file path=ppt/slides/slide13.xml><?xml version="1.0" encoding="utf-8"?>
+<p:sld xmlns:a="http://schemas.openxmlformats.org/drawingml/2006/main" xmlns:p="http://schemas.openxmlformats.org/presentationml/2006/main" xmlns:r="http://schemas.openxmlformats.org/officeDocument/2006/relationships">
+  <p:cSld>
+    <p:bg>
+      <p:bgPr>
+        <a:solidFill>
+          <a:srgbClr val="FFFFFF"/>
+        </a:solidFill>
+        <a:effectLst/>
+      </p:bgPr>
+    </p:bg>
+    <p:spTree>
+      <p:nvGrpSpPr>
+        <p:cNvPr id="1" name=""/>
+        <p:cNvGrpSpPr/>
+        <p:nvPr/>
+      </p:nvGrpSpPr>
+      <p:grpSpPr/>
+      <p:sp>
+        <p:nvSpPr>
+          <p:cNvPr id="2" name="TextBox 1"/>
+          <p:cNvSpPr txBox="1"/>
+          <p:nvPr/>
+        </p:nvSpPr>
+        <p:spPr>
+          <a:xfrm>
+            <a:off x="548640" y="320040"/>
+            <a:ext cx="11094415" cy="274320"/>
+          </a:xfrm>
+          <a:prstGeom prst="rect">
+            <a:avLst/>
+          </a:prstGeom>
+          <a:noFill/>
+        </p:spPr>
+        <p:txBody>
+          <a:bodyPr wrap="square" anchor="t" lIns="0" rIns="0" tIns="0" bIns="0"/>
+          <a:lstStyle/>
+          <a:p>
+            <a:pPr algn="l"/>
+            <a:r>
+              <a:rPr sz="1100" b="1" i="0">
+                <a:solidFill>
+                  <a:srgbClr val="54595D"/>
+                </a:solidFill>
+                <a:latin typeface="Calibri"/>
+              </a:rPr>
+              <a:t>CORE COMPONENT  ·  Core Paper 1</a:t>
+            </a:r>
+          </a:p>
+        </p:txBody>
+      </p:sp>
+      <p:sp>
+        <p:nvSpPr>
+          <p:cNvPr id="3" name="TextBox 2"/>
+          <p:cNvSpPr txBox="1"/>
+          <p:nvPr/>
+        </p:nvSpPr>
+        <p:spPr>
+          <a:xfrm>
+            <a:off x="548640" y="566928"/>
+            <a:ext cx="11094415" cy="822960"/>
+          </a:xfrm>
+          <a:prstGeom prst="rect">
+            <a:avLst/>
+          </a:prstGeom>
+          <a:noFill/>
+        </p:spPr>
+        <p:txBody>
+          <a:bodyPr wrap="square" anchor="ctr" lIns="0" rIns="0" tIns="0" bIns="0"/>
+          <a:lstStyle/>
+          <a:p>
+            <a:pPr algn="l"/>
+            <a:r>
+              <a:rPr sz="3200" b="1" i="0">
+                <a:solidFill>
+                  <a:srgbClr val="03306E"/>
+                </a:solidFill>
+                <a:latin typeface="Cambria"/>
+              </a:rPr>
+              <a:t>Answers</a:t>
+            </a:r>
+          </a:p>
+        </p:txBody>
+      </p:sp>
+      <p:sp>
+        <p:nvSpPr>
+          <p:cNvPr id="4" name="TextBox 3"/>
+          <p:cNvSpPr txBox="1"/>
+          <p:nvPr/>
+        </p:nvSpPr>
+        <p:spPr>
+          <a:xfrm>
+            <a:off x="548640" y="6446520"/>
+            <a:ext cx="8229600" cy="274320"/>
+          </a:xfrm>
+          <a:prstGeom prst="rect">
+            <a:avLst/>
+          </a:prstGeom>
+          <a:noFill/>
+        </p:spPr>
+        <p:txBody>
+          <a:bodyPr wrap="square" anchor="t" lIns="0" rIns="0" tIns="0" bIns="0"/>
+          <a:lstStyle/>
+          <a:p>
+            <a:pPr algn="l"/>
+            <a:r>
+              <a:rPr sz="1000" b="0" i="0">
+                <a:solidFill>
+                  <a:srgbClr val="54595D"/>
+                </a:solidFill>
+                <a:latin typeface="Calibri"/>
+              </a:rPr>
+              <a:t>Digital Software Development T Level  ·  Emerging Issues and Technologies</a:t>
+            </a:r>
+          </a:p>
+        </p:txBody>
+      </p:sp>
+      <p:sp>
+        <p:nvSpPr>
+          <p:cNvPr id="5" name="TextBox 4"/>
+          <p:cNvSpPr txBox="1"/>
+          <p:nvPr/>
+        </p:nvSpPr>
+        <p:spPr>
+          <a:xfrm>
+            <a:off x="10728655" y="6446520"/>
+            <a:ext cx="914400" cy="274320"/>
+          </a:xfrm>
+          <a:prstGeom prst="rect">
+            <a:avLst/>
+          </a:prstGeom>
+          <a:noFill/>
+        </p:spPr>
+        <p:txBody>
+          <a:bodyPr wrap="square" anchor="t" lIns="0" rIns="0" tIns="0" bIns="0"/>
+          <a:lstStyle/>
+          <a:p>
+            <a:pPr algn="r"/>
+            <a:r>
+              <a:rPr sz="1000" b="0" i="0">
+                <a:solidFill>
+                  <a:srgbClr val="54595D"/>
+                </a:solidFill>
+                <a:latin typeface="Calibri"/>
+              </a:rPr>
+              <a:t>13</a:t>
+            </a:r>
+          </a:p>
+        </p:txBody>
+      </p:sp>
+      <p:sp>
+        <p:nvSpPr>
+          <p:cNvPr id="6" name="Oval 5"/>
+          <p:cNvSpPr/>
+          <p:nvPr/>
+        </p:nvSpPr>
+        <p:spPr>
+          <a:xfrm>
+            <a:off x="548640" y="1618488"/>
+            <a:ext cx="411480" cy="411480"/>
+          </a:xfrm>
+          <a:prstGeom prst="ellipse">
+            <a:avLst/>
+          </a:prstGeom>
+          <a:solidFill>
+            <a:srgbClr val="F2B705"/>
+          </a:solidFill>
+          <a:ln>
+            <a:noFill/>
+          </a:ln>
+          <a:effectLst/>
+        </p:spPr>
+        <p:style>
+          <a:lnRef idx="1">
+            <a:schemeClr val="accent1"/>
+          </a:lnRef>
+          <a:fillRef idx="3">
+            <a:schemeClr val="accent1"/>
+          </a:fillRef>
+          <a:effectRef idx="2">
+            <a:schemeClr val="accent1"/>
+          </a:effectRef>
+          <a:fontRef idx="minor">
+            <a:schemeClr val="lt1"/>
+          </a:fontRef>
+        </p:style>
+        <p:txBody>
+          <a:bodyPr rtlCol="0" anchor="ctr" lIns="0" rIns="0" tIns="0" bIns="0"/>
+          <a:lstStyle/>
+          <a:p>
+            <a:pPr algn="ctr"/>
+            <a:r>
+              <a:rPr sz="1400" b="1">
+                <a:solidFill>
+                  <a:srgbClr val="202122"/>
+                </a:solidFill>
+                <a:latin typeface="Calibri"/>
+              </a:rPr>
+              <a:t>1</a:t>
+            </a:r>
+          </a:p>
+        </p:txBody>
+      </p:sp>
+      <p:sp>
+        <p:nvSpPr>
+          <p:cNvPr id="7" name="TextBox 6"/>
+          <p:cNvSpPr txBox="1"/>
+          <p:nvPr/>
+        </p:nvSpPr>
+        <p:spPr>
+          <a:xfrm>
+            <a:off x="1234440" y="1600200"/>
+            <a:ext cx="10408615" cy="1030986"/>
+          </a:xfrm>
+          <a:prstGeom prst="rect">
+            <a:avLst/>
+          </a:prstGeom>
+          <a:noFill/>
+        </p:spPr>
+        <p:txBody>
+          <a:bodyPr wrap="square" anchor="t" lIns="0" rIns="0" tIns="0" bIns="0"/>
+          <a:lstStyle/>
+          <a:p>
+            <a:pPr algn="l"/>
+            <a:r>
+              <a:rPr sz="1800" b="0" i="0">
+                <a:solidFill>
+                  <a:srgbClr val="54595D"/>
+                </a:solidFill>
+                <a:latin typeface="Calibri"/>
+              </a:rPr>
+              <a:t>Give two impacts of digital technology on society.</a:t>
+            </a:r>
+          </a:p>
+          <a:p>
+            <a:r>
+              <a:rPr sz="1800" b="1">
+                <a:solidFill>
+                  <a:srgbClr val="03306E"/>
+                </a:solidFill>
+                <a:latin typeface="Calibri"/>
+              </a:rPr>
+              <a:t>Any two, e.g. job losses, privacy concerns, better access to information.</a:t>
+            </a:r>
+          </a:p>
+        </p:txBody>
+      </p:sp>
+      <p:sp>
+        <p:nvSpPr>
+          <p:cNvPr id="8" name="Oval 7"/>
+          <p:cNvSpPr/>
+          <p:nvPr/>
+        </p:nvSpPr>
+        <p:spPr>
+          <a:xfrm>
+            <a:off x="548640" y="2814066"/>
+            <a:ext cx="411480" cy="411480"/>
+          </a:xfrm>
+          <a:prstGeom prst="ellipse">
+            <a:avLst/>
+          </a:prstGeom>
+          <a:solidFill>
+            <a:srgbClr val="F2B705"/>
+          </a:solidFill>
+          <a:ln>
+            <a:noFill/>
+          </a:ln>
+          <a:effectLst/>
+        </p:spPr>
+        <p:style>
+          <a:lnRef idx="1">
+            <a:schemeClr val="accent1"/>
+          </a:lnRef>
+          <a:fillRef idx="3">
+            <a:schemeClr val="accent1"/>
+          </a:fillRef>
+          <a:effectRef idx="2">
+            <a:schemeClr val="accent1"/>
+          </a:effectRef>
+          <a:fontRef idx="minor">
+            <a:schemeClr val="lt1"/>
+          </a:fontRef>
+        </p:style>
+        <p:txBody>
+          <a:bodyPr rtlCol="0" anchor="ctr" lIns="0" rIns="0" tIns="0" bIns="0"/>
+          <a:lstStyle/>
+          <a:p>
+            <a:pPr algn="ctr"/>
+            <a:r>
+              <a:rPr sz="1400" b="1">
+                <a:solidFill>
+                  <a:srgbClr val="202122"/>
+                </a:solidFill>
+                <a:latin typeface="Calibri"/>
+              </a:rPr>
+              <a:t>2</a:t>
+            </a:r>
+          </a:p>
+        </p:txBody>
+      </p:sp>
+      <p:sp>
+        <p:nvSpPr>
+          <p:cNvPr id="9" name="TextBox 8"/>
+          <p:cNvSpPr txBox="1"/>
+          <p:nvPr/>
+        </p:nvSpPr>
+        <p:spPr>
+          <a:xfrm>
+            <a:off x="1234440" y="2795778"/>
+            <a:ext cx="10408615" cy="1030986"/>
+          </a:xfrm>
+          <a:prstGeom prst="rect">
+            <a:avLst/>
+          </a:prstGeom>
+          <a:noFill/>
+        </p:spPr>
+        <p:txBody>
+          <a:bodyPr wrap="square" anchor="t" lIns="0" rIns="0" tIns="0" bIns="0"/>
+          <a:lstStyle/>
+          <a:p>
+            <a:pPr algn="l"/>
+            <a:r>
+              <a:rPr sz="1800" b="0" i="0">
+                <a:solidFill>
+                  <a:srgbClr val="54595D"/>
+                </a:solidFill>
+                <a:latin typeface="Calibri"/>
+              </a:rPr>
+              <a:t>Why should developers check datasets for bias?</a:t>
+            </a:r>
+          </a:p>
+          <a:p>
+            <a:r>
+              <a:rPr sz="1800" b="1">
+                <a:solidFill>
+                  <a:srgbClr val="03306E"/>
+                </a:solidFill>
+                <a:latin typeface="Calibri"/>
+              </a:rPr>
+              <a:t>Biased data leads to unfair or inaccurate software.</a:t>
+            </a:r>
+          </a:p>
+        </p:txBody>
+      </p:sp>
+      <p:sp>
+        <p:nvSpPr>
+          <p:cNvPr id="10" name="Oval 9"/>
+          <p:cNvSpPr/>
+          <p:nvPr/>
+        </p:nvSpPr>
+        <p:spPr>
+          <a:xfrm>
+            <a:off x="548640" y="4009644"/>
+            <a:ext cx="411480" cy="411480"/>
+          </a:xfrm>
+          <a:prstGeom prst="ellipse">
+            <a:avLst/>
+          </a:prstGeom>
+          <a:solidFill>
+            <a:srgbClr val="F2B705"/>
+          </a:solidFill>
+          <a:ln>
+            <a:noFill/>
+          </a:ln>
+          <a:effectLst/>
+        </p:spPr>
+        <p:style>
+          <a:lnRef idx="1">
+            <a:schemeClr val="accent1"/>
+          </a:lnRef>
+          <a:fillRef idx="3">
+            <a:schemeClr val="accent1"/>
+          </a:fillRef>
+          <a:effectRef idx="2">
+            <a:schemeClr val="accent1"/>
+          </a:effectRef>
+          <a:fontRef idx="minor">
+            <a:schemeClr val="lt1"/>
+          </a:fontRef>
+        </p:style>
+        <p:txBody>
+          <a:bodyPr rtlCol="0" anchor="ctr" lIns="0" rIns="0" tIns="0" bIns="0"/>
+          <a:lstStyle/>
+          <a:p>
+            <a:pPr algn="ctr"/>
+            <a:r>
+              <a:rPr sz="1400" b="1">
+                <a:solidFill>
+                  <a:srgbClr val="202122"/>
+                </a:solidFill>
+                <a:latin typeface="Calibri"/>
+              </a:rPr>
+              <a:t>3</a:t>
+            </a:r>
+          </a:p>
+        </p:txBody>
+      </p:sp>
+      <p:sp>
+        <p:nvSpPr>
+          <p:cNvPr id="11" name="TextBox 10"/>
+          <p:cNvSpPr txBox="1"/>
+          <p:nvPr/>
+        </p:nvSpPr>
+        <p:spPr>
+          <a:xfrm>
+            <a:off x="1234440" y="3991356"/>
+            <a:ext cx="10408615" cy="1030986"/>
+          </a:xfrm>
+          <a:prstGeom prst="rect">
+            <a:avLst/>
+          </a:prstGeom>
+          <a:noFill/>
+        </p:spPr>
+        <p:txBody>
+          <a:bodyPr wrap="square" anchor="t" lIns="0" rIns="0" tIns="0" bIns="0"/>
+          <a:lstStyle/>
+          <a:p>
+            <a:pPr algn="l"/>
+            <a:r>
+              <a:rPr sz="1800" b="0" i="0">
+                <a:solidFill>
+                  <a:srgbClr val="54595D"/>
+                </a:solidFill>
+                <a:latin typeface="Calibri"/>
+              </a:rPr>
+              <a:t>What is edge computing?</a:t>
+            </a:r>
+          </a:p>
+          <a:p>
+            <a:r>
+              <a:rPr sz="1800" b="1">
+                <a:solidFill>
+                  <a:srgbClr val="03306E"/>
+                </a:solidFill>
+                <a:latin typeface="Calibri"/>
+              </a:rPr>
+              <a:t>Processing data near where it is collected rather than centrally.</a:t>
+            </a:r>
+          </a:p>
+        </p:txBody>
+      </p:sp>
+      <p:sp>
+        <p:nvSpPr>
+          <p:cNvPr id="12" name="Oval 11"/>
+          <p:cNvSpPr/>
+          <p:nvPr/>
+        </p:nvSpPr>
+        <p:spPr>
+          <a:xfrm>
+            <a:off x="548640" y="5205221"/>
+            <a:ext cx="411480" cy="411480"/>
+          </a:xfrm>
+          <a:prstGeom prst="ellipse">
+            <a:avLst/>
+          </a:prstGeom>
+          <a:solidFill>
+            <a:srgbClr val="F2B705"/>
+          </a:solidFill>
+          <a:ln>
+            <a:noFill/>
+          </a:ln>
+          <a:effectLst/>
+        </p:spPr>
+        <p:style>
+          <a:lnRef idx="1">
+            <a:schemeClr val="accent1"/>
+          </a:lnRef>
+          <a:fillRef idx="3">
+            <a:schemeClr val="accent1"/>
+          </a:fillRef>
+          <a:effectRef idx="2">
+            <a:schemeClr val="accent1"/>
+          </a:effectRef>
+          <a:fontRef idx="minor">
+            <a:schemeClr val="lt1"/>
+          </a:fontRef>
+        </p:style>
+        <p:txBody>
+          <a:bodyPr rtlCol="0" anchor="ctr" lIns="0" rIns="0" tIns="0" bIns="0"/>
+          <a:lstStyle/>
+          <a:p>
+            <a:pPr algn="ctr"/>
+            <a:r>
+              <a:rPr sz="1400" b="1">
+                <a:solidFill>
+                  <a:srgbClr val="202122"/>
+                </a:solidFill>
+                <a:latin typeface="Calibri"/>
+              </a:rPr>
+              <a:t>4</a:t>
+            </a:r>
+          </a:p>
+        </p:txBody>
+      </p:sp>
+      <p:sp>
+        <p:nvSpPr>
+          <p:cNvPr id="13" name="TextBox 12"/>
+          <p:cNvSpPr txBox="1"/>
+          <p:nvPr/>
+        </p:nvSpPr>
+        <p:spPr>
+          <a:xfrm>
+            <a:off x="1234440" y="5186933"/>
+            <a:ext cx="10408615" cy="1030986"/>
+          </a:xfrm>
+          <a:prstGeom prst="rect">
+            <a:avLst/>
+          </a:prstGeom>
+          <a:noFill/>
+        </p:spPr>
+        <p:txBody>
+          <a:bodyPr wrap="square" anchor="t" lIns="0" rIns="0" tIns="0" bIns="0"/>
+          <a:lstStyle/>
+          <a:p>
+            <a:pPr algn="l"/>
+            <a:r>
+              <a:rPr sz="1800" b="0" i="0">
+                <a:solidFill>
+                  <a:srgbClr val="54595D"/>
+                </a:solidFill>
+                <a:latin typeface="Calibri"/>
+              </a:rPr>
+              <a:t>Give one environmental impact of new technology.</a:t>
+            </a:r>
+          </a:p>
+          <a:p>
+            <a:r>
+              <a:rPr sz="1800" b="1">
+                <a:solidFill>
+                  <a:srgbClr val="03306E"/>
+                </a:solidFill>
+                <a:latin typeface="Calibri"/>
+              </a:rPr>
+              <a:t>Rare metal use, energy use or disposal.</a:t>
+            </a:r>
+          </a:p>
+        </p:txBody>
+      </p:sp>
+    </p:spTree>
+  </p:cSld>
+  <p:clrMapOvr>
+    <a:masterClrMapping/>
+  </p:clrMapOvr>
+</p:sld>
+</file>
+
+<file path=ppt/slides/slide14.xml><?xml version="1.0" encoding="utf-8"?>
+<p:sld xmlns:a="http://schemas.openxmlformats.org/drawingml/2006/main" xmlns:p="http://schemas.openxmlformats.org/presentationml/2006/main" xmlns:r="http://schemas.openxmlformats.org/officeDocument/2006/relationships">
+  <p:cSld>
+    <p:bg>
+      <p:bgPr>
+        <a:solidFill>
+          <a:srgbClr val="FFFFFF"/>
+        </a:solidFill>
+        <a:effectLst/>
+      </p:bgPr>
+    </p:bg>
+    <p:spTree>
+      <p:nvGrpSpPr>
+        <p:cNvPr id="1" name=""/>
+        <p:cNvGrpSpPr/>
+        <p:nvPr/>
+      </p:nvGrpSpPr>
+      <p:grpSpPr/>
+      <p:sp>
+        <p:nvSpPr>
+          <p:cNvPr id="2" name="TextBox 1"/>
+          <p:cNvSpPr txBox="1"/>
+          <p:nvPr/>
+        </p:nvSpPr>
+        <p:spPr>
+          <a:xfrm>
+            <a:off x="548640" y="320040"/>
+            <a:ext cx="11094415" cy="274320"/>
+          </a:xfrm>
+          <a:prstGeom prst="rect">
+            <a:avLst/>
+          </a:prstGeom>
+          <a:noFill/>
+        </p:spPr>
+        <p:txBody>
+          <a:bodyPr wrap="square" anchor="t" lIns="0" rIns="0" tIns="0" bIns="0"/>
+          <a:lstStyle/>
+          <a:p>
+            <a:pPr algn="l"/>
+            <a:r>
+              <a:rPr sz="1100" b="1" i="0">
+                <a:solidFill>
+                  <a:srgbClr val="54595D"/>
+                </a:solidFill>
+                <a:latin typeface="Calibri"/>
+              </a:rPr>
+              <a:t>CORE COMPONENT  ·  Core Paper 1</a:t>
+            </a:r>
+          </a:p>
+        </p:txBody>
+      </p:sp>
+      <p:sp>
+        <p:nvSpPr>
+          <p:cNvPr id="3" name="TextBox 2"/>
+          <p:cNvSpPr txBox="1"/>
+          <p:nvPr/>
+        </p:nvSpPr>
+        <p:spPr>
+          <a:xfrm>
+            <a:off x="548640" y="566928"/>
+            <a:ext cx="11094415" cy="822960"/>
+          </a:xfrm>
+          <a:prstGeom prst="rect">
+            <a:avLst/>
+          </a:prstGeom>
+          <a:noFill/>
+        </p:spPr>
+        <p:txBody>
+          <a:bodyPr wrap="square" anchor="ctr" lIns="0" rIns="0" tIns="0" bIns="0"/>
+          <a:lstStyle/>
+          <a:p>
+            <a:pPr algn="l"/>
+            <a:r>
+              <a:rPr sz="3200" b="1" i="0">
+                <a:solidFill>
+                  <a:srgbClr val="03306E"/>
+                </a:solidFill>
+                <a:latin typeface="Cambria"/>
+              </a:rPr>
+              <a:t>Activity: Ethics review</a:t>
+            </a:r>
+          </a:p>
+        </p:txBody>
+      </p:sp>
+      <p:sp>
+        <p:nvSpPr>
+          <p:cNvPr id="4" name="TextBox 3"/>
+          <p:cNvSpPr txBox="1"/>
+          <p:nvPr/>
+        </p:nvSpPr>
+        <p:spPr>
+          <a:xfrm>
+            <a:off x="548640" y="6446520"/>
+            <a:ext cx="8229600" cy="274320"/>
+          </a:xfrm>
+          <a:prstGeom prst="rect">
+            <a:avLst/>
+          </a:prstGeom>
+          <a:noFill/>
+        </p:spPr>
+        <p:txBody>
+          <a:bodyPr wrap="square" anchor="t" lIns="0" rIns="0" tIns="0" bIns="0"/>
+          <a:lstStyle/>
+          <a:p>
+            <a:pPr algn="l"/>
+            <a:r>
+              <a:rPr sz="1000" b="0" i="0">
+                <a:solidFill>
+                  <a:srgbClr val="54595D"/>
+                </a:solidFill>
+                <a:latin typeface="Calibri"/>
+              </a:rPr>
+              <a:t>Digital Software Development T Level  ·  Emerging Issues and Technologies</a:t>
+            </a:r>
+          </a:p>
+        </p:txBody>
+      </p:sp>
+      <p:sp>
+        <p:nvSpPr>
+          <p:cNvPr id="5" name="TextBox 4"/>
+          <p:cNvSpPr txBox="1"/>
+          <p:nvPr/>
+        </p:nvSpPr>
+        <p:spPr>
+          <a:xfrm>
+            <a:off x="10728655" y="6446520"/>
+            <a:ext cx="914400" cy="274320"/>
+          </a:xfrm>
+          <a:prstGeom prst="rect">
+            <a:avLst/>
+          </a:prstGeom>
+          <a:noFill/>
+        </p:spPr>
+        <p:txBody>
+          <a:bodyPr wrap="square" anchor="t" lIns="0" rIns="0" tIns="0" bIns="0"/>
+          <a:lstStyle/>
+          <a:p>
+            <a:pPr algn="r"/>
+            <a:r>
+              <a:rPr sz="1000" b="0" i="0">
+                <a:solidFill>
+                  <a:srgbClr val="54595D"/>
+                </a:solidFill>
+                <a:latin typeface="Calibri"/>
+              </a:rPr>
+              <a:t>14</a:t>
+            </a:r>
+          </a:p>
+        </p:txBody>
+      </p:sp>
+      <p:sp>
+        <p:nvSpPr>
+          <p:cNvPr id="6" name="Rounded Rectangle 5"/>
+          <p:cNvSpPr/>
+          <p:nvPr/>
+        </p:nvSpPr>
+        <p:spPr>
+          <a:xfrm>
+            <a:off x="548640" y="1508760"/>
+            <a:ext cx="2011680" cy="457200"/>
+          </a:xfrm>
+          <a:prstGeom prst="roundRect">
+            <a:avLst>
+              <a:gd name="adj" fmla="val 50000"/>
+            </a:avLst>
+          </a:prstGeom>
+          <a:solidFill>
+            <a:srgbClr val="F2B705"/>
+          </a:solidFill>
+          <a:ln>
+            <a:noFill/>
+          </a:ln>
+          <a:effectLst/>
+        </p:spPr>
+        <p:style>
+          <a:lnRef idx="1">
+            <a:schemeClr val="accent1"/>
+          </a:lnRef>
+          <a:fillRef idx="3">
+            <a:schemeClr val="accent1"/>
+          </a:fillRef>
+          <a:effectRef idx="2">
+            <a:schemeClr val="accent1"/>
+          </a:effectRef>
+          <a:fontRef idx="minor">
+            <a:schemeClr val="lt1"/>
+          </a:fontRef>
+        </p:style>
+        <p:txBody>
+          <a:bodyPr rtlCol="0" anchor="ctr"/>
+          <a:lstStyle/>
+          <a:p/>
+        </p:txBody>
+      </p:sp>
+      <p:sp>
+        <p:nvSpPr>
+          <p:cNvPr id="7" name="TextBox 6"/>
+          <p:cNvSpPr txBox="1"/>
+          <p:nvPr/>
+        </p:nvSpPr>
+        <p:spPr>
+          <a:xfrm>
+            <a:off x="548640" y="1508760"/>
+            <a:ext cx="2011680" cy="457200"/>
+          </a:xfrm>
+          <a:prstGeom prst="rect">
+            <a:avLst/>
+          </a:prstGeom>
+          <a:noFill/>
+        </p:spPr>
+        <p:txBody>
+          <a:bodyPr wrap="square" anchor="ctr" lIns="0" rIns="0" tIns="0" bIns="0"/>
+          <a:lstStyle/>
+          <a:p>
+            <a:pPr algn="ctr"/>
+            <a:r>
+              <a:rPr sz="1400" b="1" i="0">
+                <a:solidFill>
+                  <a:srgbClr val="202122"/>
+                </a:solidFill>
+                <a:latin typeface="Calibri"/>
+              </a:rPr>
+              <a:t>25 minutes</a:t>
+            </a:r>
+          </a:p>
+        </p:txBody>
+      </p:sp>
+      <p:sp>
+        <p:nvSpPr>
+          <p:cNvPr id="8" name="TextBox 7"/>
+          <p:cNvSpPr txBox="1"/>
+          <p:nvPr/>
+        </p:nvSpPr>
+        <p:spPr>
+          <a:xfrm>
+            <a:off x="2743200" y="1508760"/>
+            <a:ext cx="4754880" cy="457200"/>
+          </a:xfrm>
+          <a:prstGeom prst="rect">
+            <a:avLst/>
+          </a:prstGeom>
+          <a:noFill/>
+        </p:spPr>
+        <p:txBody>
+          <a:bodyPr wrap="square" anchor="ctr" lIns="0" rIns="0" tIns="0" bIns="0"/>
+          <a:lstStyle/>
+          <a:p>
+            <a:pPr algn="l"/>
+            <a:r>
+              <a:rPr sz="1400" b="0" i="1">
+                <a:solidFill>
+                  <a:srgbClr val="54595D"/>
+                </a:solidFill>
+                <a:latin typeface="Calibri"/>
+              </a:rPr>
+              <a:t>Small groups</a:t>
+            </a:r>
+          </a:p>
+        </p:txBody>
+      </p:sp>
+      <p:sp>
+        <p:nvSpPr>
+          <p:cNvPr id="9" name="Oval 8"/>
+          <p:cNvSpPr/>
+          <p:nvPr/>
+        </p:nvSpPr>
+        <p:spPr>
+          <a:xfrm>
+            <a:off x="548640" y="2482596"/>
+            <a:ext cx="384048" cy="384048"/>
+          </a:xfrm>
+          <a:prstGeom prst="ellipse">
+            <a:avLst/>
+          </a:prstGeom>
+          <a:solidFill>
+            <a:srgbClr val="0645AD"/>
+          </a:solidFill>
+          <a:ln>
+            <a:noFill/>
+          </a:ln>
+          <a:effectLst/>
+        </p:spPr>
+        <p:style>
+          <a:lnRef idx="1">
+            <a:schemeClr val="accent1"/>
+          </a:lnRef>
+          <a:fillRef idx="3">
+            <a:schemeClr val="accent1"/>
+          </a:fillRef>
+          <a:effectRef idx="2">
+            <a:schemeClr val="accent1"/>
+          </a:effectRef>
+          <a:fontRef idx="minor">
+            <a:schemeClr val="lt1"/>
+          </a:fontRef>
+        </p:style>
+        <p:txBody>
+          <a:bodyPr rtlCol="0" anchor="ctr" lIns="0" rIns="0" tIns="0" bIns="0"/>
+          <a:lstStyle/>
+          <a:p>
+            <a:pPr algn="ctr"/>
+            <a:r>
+              <a:rPr sz="1300" b="1">
+                <a:solidFill>
+                  <a:srgbClr val="FFFFFF"/>
+                </a:solidFill>
+                <a:latin typeface="Calibri"/>
+              </a:rPr>
+              <a:t>1</a:t>
+            </a:r>
+          </a:p>
+        </p:txBody>
+      </p:sp>
+      <p:sp>
+        <p:nvSpPr>
+          <p:cNvPr id="10" name="TextBox 9"/>
+          <p:cNvSpPr txBox="1"/>
+          <p:nvPr/>
+        </p:nvSpPr>
+        <p:spPr>
+          <a:xfrm>
+            <a:off x="1143000" y="2240280"/>
+            <a:ext cx="5943600" cy="868680"/>
+          </a:xfrm>
+          <a:prstGeom prst="rect">
+            <a:avLst/>
+          </a:prstGeom>
+          <a:noFill/>
+        </p:spPr>
+        <p:txBody>
+          <a:bodyPr wrap="square" anchor="ctr" lIns="0" rIns="0" tIns="0" bIns="0"/>
+          <a:lstStyle/>
+          <a:p>
+            <a:pPr algn="l"/>
+            <a:r>
+              <a:rPr sz="1700" b="0" i="0">
+                <a:solidFill>
+                  <a:srgbClr val="202122"/>
+                </a:solidFill>
+                <a:latin typeface="Calibri"/>
+              </a:rPr>
+              <a:t>Your group is building an AI tool to shortlist job applicants.</a:t>
+            </a:r>
+          </a:p>
+        </p:txBody>
+      </p:sp>
+      <p:sp>
+        <p:nvSpPr>
+          <p:cNvPr id="11" name="Oval 10"/>
+          <p:cNvSpPr/>
+          <p:nvPr/>
+        </p:nvSpPr>
+        <p:spPr>
+          <a:xfrm>
+            <a:off x="548640" y="3461004"/>
+            <a:ext cx="384048" cy="384048"/>
+          </a:xfrm>
+          <a:prstGeom prst="ellipse">
+            <a:avLst/>
+          </a:prstGeom>
+          <a:solidFill>
+            <a:srgbClr val="0645AD"/>
+          </a:solidFill>
+          <a:ln>
+            <a:noFill/>
+          </a:ln>
+          <a:effectLst/>
+        </p:spPr>
+        <p:style>
+          <a:lnRef idx="1">
+            <a:schemeClr val="accent1"/>
+          </a:lnRef>
+          <a:fillRef idx="3">
+            <a:schemeClr val="accent1"/>
+          </a:fillRef>
+          <a:effectRef idx="2">
+            <a:schemeClr val="accent1"/>
+          </a:effectRef>
+          <a:fontRef idx="minor">
+            <a:schemeClr val="lt1"/>
+          </a:fontRef>
+        </p:style>
+        <p:txBody>
+          <a:bodyPr rtlCol="0" anchor="ctr" lIns="0" rIns="0" tIns="0" bIns="0"/>
+          <a:lstStyle/>
+          <a:p>
+            <a:pPr algn="ctr"/>
+            <a:r>
+              <a:rPr sz="1300" b="1">
+                <a:solidFill>
+                  <a:srgbClr val="FFFFFF"/>
+                </a:solidFill>
+                <a:latin typeface="Calibri"/>
+              </a:rPr>
+              <a:t>2</a:t>
+            </a:r>
+          </a:p>
+        </p:txBody>
+      </p:sp>
+      <p:sp>
+        <p:nvSpPr>
+          <p:cNvPr id="12" name="TextBox 11"/>
+          <p:cNvSpPr txBox="1"/>
+          <p:nvPr/>
+        </p:nvSpPr>
+        <p:spPr>
+          <a:xfrm>
+            <a:off x="1143000" y="3218688"/>
+            <a:ext cx="5943600" cy="868680"/>
+          </a:xfrm>
+          <a:prstGeom prst="rect">
+            <a:avLst/>
+          </a:prstGeom>
+          <a:noFill/>
+        </p:spPr>
+        <p:txBody>
+          <a:bodyPr wrap="square" anchor="ctr" lIns="0" rIns="0" tIns="0" bIns="0"/>
+          <a:lstStyle/>
+          <a:p>
+            <a:pPr algn="l"/>
+            <a:r>
+              <a:rPr sz="1700" b="0" i="0">
+                <a:solidFill>
+                  <a:srgbClr val="202122"/>
+                </a:solidFill>
+                <a:latin typeface="Calibri"/>
+              </a:rPr>
+              <a:t>Identify three ways it could exclude or disadvantage people.</a:t>
+            </a:r>
+          </a:p>
+        </p:txBody>
+      </p:sp>
+      <p:sp>
+        <p:nvSpPr>
+          <p:cNvPr id="13" name="Oval 12"/>
+          <p:cNvSpPr/>
+          <p:nvPr/>
+        </p:nvSpPr>
+        <p:spPr>
+          <a:xfrm>
+            <a:off x="548640" y="4439412"/>
+            <a:ext cx="384048" cy="384048"/>
+          </a:xfrm>
+          <a:prstGeom prst="ellipse">
+            <a:avLst/>
+          </a:prstGeom>
+          <a:solidFill>
+            <a:srgbClr val="0645AD"/>
+          </a:solidFill>
+          <a:ln>
+            <a:noFill/>
+          </a:ln>
+          <a:effectLst/>
+        </p:spPr>
+        <p:style>
+          <a:lnRef idx="1">
+            <a:schemeClr val="accent1"/>
+          </a:lnRef>
+          <a:fillRef idx="3">
+            <a:schemeClr val="accent1"/>
+          </a:fillRef>
+          <a:effectRef idx="2">
+            <a:schemeClr val="accent1"/>
+          </a:effectRef>
+          <a:fontRef idx="minor">
+            <a:schemeClr val="lt1"/>
+          </a:fontRef>
+        </p:style>
+        <p:txBody>
+          <a:bodyPr rtlCol="0" anchor="ctr" lIns="0" rIns="0" tIns="0" bIns="0"/>
+          <a:lstStyle/>
+          <a:p>
+            <a:pPr algn="ctr"/>
+            <a:r>
+              <a:rPr sz="1300" b="1">
+                <a:solidFill>
+                  <a:srgbClr val="FFFFFF"/>
+                </a:solidFill>
+                <a:latin typeface="Calibri"/>
+              </a:rPr>
+              <a:t>3</a:t>
+            </a:r>
+          </a:p>
+        </p:txBody>
+      </p:sp>
+      <p:sp>
+        <p:nvSpPr>
+          <p:cNvPr id="14" name="TextBox 13"/>
+          <p:cNvSpPr txBox="1"/>
+          <p:nvPr/>
+        </p:nvSpPr>
+        <p:spPr>
+          <a:xfrm>
+            <a:off x="1143000" y="4197096"/>
+            <a:ext cx="5943600" cy="868680"/>
+          </a:xfrm>
+          <a:prstGeom prst="rect">
+            <a:avLst/>
+          </a:prstGeom>
+          <a:noFill/>
+        </p:spPr>
+        <p:txBody>
+          <a:bodyPr wrap="square" anchor="ctr" lIns="0" rIns="0" tIns="0" bIns="0"/>
+          <a:lstStyle/>
+          <a:p>
+            <a:pPr algn="l"/>
+            <a:r>
+              <a:rPr sz="1700" b="0" i="0">
+                <a:solidFill>
+                  <a:srgbClr val="202122"/>
+                </a:solidFill>
+                <a:latin typeface="Calibri"/>
+              </a:rPr>
+              <a:t>Suggest a fix for each.</a:t>
+            </a:r>
+          </a:p>
+        </p:txBody>
+      </p:sp>
+      <p:sp>
+        <p:nvSpPr>
+          <p:cNvPr id="15" name="Oval 14"/>
+          <p:cNvSpPr/>
+          <p:nvPr/>
+        </p:nvSpPr>
+        <p:spPr>
+          <a:xfrm>
+            <a:off x="548640" y="5417820"/>
+            <a:ext cx="384048" cy="384048"/>
+          </a:xfrm>
+          <a:prstGeom prst="ellipse">
+            <a:avLst/>
+          </a:prstGeom>
+          <a:solidFill>
+            <a:srgbClr val="0645AD"/>
+          </a:solidFill>
+          <a:ln>
+            <a:noFill/>
+          </a:ln>
+          <a:effectLst/>
+        </p:spPr>
+        <p:style>
+          <a:lnRef idx="1">
+            <a:schemeClr val="accent1"/>
+          </a:lnRef>
+          <a:fillRef idx="3">
+            <a:schemeClr val="accent1"/>
+          </a:fillRef>
+          <a:effectRef idx="2">
+            <a:schemeClr val="accent1"/>
+          </a:effectRef>
+          <a:fontRef idx="minor">
+            <a:schemeClr val="lt1"/>
+          </a:fontRef>
+        </p:style>
+        <p:txBody>
+          <a:bodyPr rtlCol="0" anchor="ctr" lIns="0" rIns="0" tIns="0" bIns="0"/>
+          <a:lstStyle/>
+          <a:p>
+            <a:pPr algn="ctr"/>
+            <a:r>
+              <a:rPr sz="1300" b="1">
+                <a:solidFill>
+                  <a:srgbClr val="FFFFFF"/>
+                </a:solidFill>
+                <a:latin typeface="Calibri"/>
+              </a:rPr>
+              <a:t>4</a:t>
+            </a:r>
+          </a:p>
+        </p:txBody>
+      </p:sp>
+      <p:sp>
+        <p:nvSpPr>
+          <p:cNvPr id="16" name="TextBox 15"/>
+          <p:cNvSpPr txBox="1"/>
+          <p:nvPr/>
+        </p:nvSpPr>
+        <p:spPr>
+          <a:xfrm>
+            <a:off x="1143000" y="5175504"/>
+            <a:ext cx="5943600" cy="868680"/>
+          </a:xfrm>
+          <a:prstGeom prst="rect">
+            <a:avLst/>
+          </a:prstGeom>
+          <a:noFill/>
+        </p:spPr>
+        <p:txBody>
+          <a:bodyPr wrap="square" anchor="ctr" lIns="0" rIns="0" tIns="0" bIns="0"/>
+          <a:lstStyle/>
+          <a:p>
+            <a:pPr algn="l"/>
+            <a:r>
+              <a:rPr sz="1700" b="0" i="0">
+                <a:solidFill>
+                  <a:srgbClr val="202122"/>
+                </a:solidFill>
+                <a:latin typeface="Calibri"/>
+              </a:rPr>
+              <a:t>Present your review in two minutes.</a:t>
+            </a:r>
+          </a:p>
+        </p:txBody>
+      </p:sp>
+      <p:sp>
+        <p:nvSpPr>
+          <p:cNvPr id="17" name="Rounded Rectangle 16"/>
+          <p:cNvSpPr/>
+          <p:nvPr/>
+        </p:nvSpPr>
+        <p:spPr>
+          <a:xfrm>
+            <a:off x="7772400" y="1508760"/>
+            <a:ext cx="3867912" cy="4572000"/>
+          </a:xfrm>
+          <a:prstGeom prst="roundRect">
+            <a:avLst>
+              <a:gd name="adj" fmla="val 8000"/>
+            </a:avLst>
+          </a:prstGeom>
+          <a:solidFill>
+            <a:srgbClr val="EAF3FF"/>
+          </a:solidFill>
+          <a:ln>
+            <a:noFill/>
+          </a:ln>
+          <a:effectLst/>
+        </p:spPr>
+        <p:style>
+          <a:lnRef idx="1">
+            <a:schemeClr val="accent1"/>
+          </a:lnRef>
+          <a:fillRef idx="3">
+            <a:schemeClr val="accent1"/>
+          </a:fillRef>
+          <a:effectRef idx="2">
+            <a:schemeClr val="accent1"/>
+          </a:effectRef>
+          <a:fontRef idx="minor">
+            <a:schemeClr val="lt1"/>
+          </a:fontRef>
+        </p:style>
+        <p:txBody>
+          <a:bodyPr rtlCol="0" anchor="ctr"/>
+          <a:lstStyle/>
+          <a:p/>
+        </p:txBody>
+      </p:sp>
+      <p:sp>
+        <p:nvSpPr>
+          <p:cNvPr id="18" name="TextBox 17"/>
+          <p:cNvSpPr txBox="1"/>
+          <p:nvPr/>
+        </p:nvSpPr>
+        <p:spPr>
+          <a:xfrm>
+            <a:off x="8046720" y="1737360"/>
+            <a:ext cx="3291840" cy="365760"/>
+          </a:xfrm>
+          <a:prstGeom prst="rect">
+            <a:avLst/>
+          </a:prstGeom>
+          <a:noFill/>
+        </p:spPr>
+        <p:txBody>
+          <a:bodyPr wrap="square" anchor="t" lIns="0" rIns="0" tIns="0" bIns="0"/>
+          <a:lstStyle/>
+          <a:p>
+            <a:pPr algn="l"/>
+            <a:r>
+              <a:rPr sz="1300" b="1" i="0">
+                <a:solidFill>
+                  <a:srgbClr val="0645AD"/>
+                </a:solidFill>
+                <a:latin typeface="Calibri"/>
+              </a:rPr>
+              <a:t>SUCCESS CRITERIA</a:t>
+            </a:r>
+          </a:p>
+        </p:txBody>
+      </p:sp>
+      <p:sp>
+        <p:nvSpPr>
+          <p:cNvPr id="19" name="TextBox 18"/>
+          <p:cNvSpPr txBox="1"/>
+          <p:nvPr/>
+        </p:nvSpPr>
+        <p:spPr>
+          <a:xfrm>
+            <a:off x="8046720" y="2240280"/>
+            <a:ext cx="3337560" cy="3657600"/>
+          </a:xfrm>
+          <a:prstGeom prst="rect">
+            <a:avLst/>
+          </a:prstGeom>
+          <a:noFill/>
+        </p:spPr>
+        <p:txBody>
+          <a:bodyPr wrap="square" lIns="0" rIns="0" tIns="0" bIns="0">
+            <a:spAutoFit/>
+          </a:bodyPr>
+          <a:lstStyle/>
+          <a:p>
+            <a:pPr marL="274320" indent="-274320">
+              <a:spcAft>
+                <a:spcPts val="810"/>
+              </a:spcAft>
+              <a:buClr>
+                <a:srgbClr val="0645AD"/>
+              </a:buClr>
+              <a:buFont typeface="Arial"/>
+              <a:buChar char="•"/>
+            </a:pPr>
+            <a:r>
+              <a:rPr sz="1800" b="0">
+                <a:solidFill>
+                  <a:srgbClr val="202122"/>
+                </a:solidFill>
+                <a:latin typeface="Calibri"/>
+              </a:rPr>
+              <a:t>Considers bias in training data</a:t>
+            </a:r>
+          </a:p>
+          <a:p>
+            <a:pPr marL="274320" indent="-274320">
+              <a:spcAft>
+                <a:spcPts val="810"/>
+              </a:spcAft>
+              <a:buClr>
+                <a:srgbClr val="0645AD"/>
+              </a:buClr>
+              <a:buFont typeface="Arial"/>
+              <a:buChar char="•"/>
+            </a:pPr>
+            <a:r>
+              <a:rPr sz="1800" b="0">
+                <a:solidFill>
+                  <a:srgbClr val="202122"/>
+                </a:solidFill>
+                <a:latin typeface="Calibri"/>
+              </a:rPr>
+              <a:t>Considers accessibility</a:t>
+            </a:r>
+          </a:p>
+          <a:p>
+            <a:pPr marL="274320" indent="-274320">
+              <a:spcAft>
+                <a:spcPts val="810"/>
+              </a:spcAft>
+              <a:buClr>
+                <a:srgbClr val="0645AD"/>
+              </a:buClr>
+              <a:buFont typeface="Arial"/>
+              <a:buChar char="•"/>
+            </a:pPr>
+            <a:r>
+              <a:rPr sz="1800" b="0">
+                <a:solidFill>
+                  <a:srgbClr val="202122"/>
+                </a:solidFill>
+                <a:latin typeface="Calibri"/>
+              </a:rPr>
+              <a:t>Fixes are realistic</a:t>
+            </a:r>
+          </a:p>
+        </p:txBody>
+      </p:sp>
+    </p:spTree>
+  </p:cSld>
+  <p:clrMapOvr>
+    <a:masterClrMapping/>
+  </p:clrMapOvr>
+</p:sld>
+</file>
+
+<file path=ppt/slides/slide15.xml><?xml version="1.0" encoding="utf-8"?>
+<p:sld xmlns:a="http://schemas.openxmlformats.org/drawingml/2006/main" xmlns:p="http://schemas.openxmlformats.org/presentationml/2006/main" xmlns:r="http://schemas.openxmlformats.org/officeDocument/2006/relationships">
+  <p:cSld>
+    <p:bg>
+      <p:bgPr>
+        <a:solidFill>
+          <a:srgbClr val="03306E"/>
+        </a:solidFill>
+        <a:effectLst/>
+      </p:bgPr>
+    </p:bg>
+    <p:spTree>
+      <p:nvGrpSpPr>
+        <p:cNvPr id="1" name=""/>
+        <p:cNvGrpSpPr/>
+        <p:nvPr/>
+      </p:nvGrpSpPr>
+      <p:grpSpPr/>
+      <p:sp>
+        <p:nvSpPr>
+          <p:cNvPr id="2" name="TextBox 1"/>
+          <p:cNvSpPr txBox="1"/>
+          <p:nvPr/>
+        </p:nvSpPr>
+        <p:spPr>
+          <a:xfrm>
+            <a:off x="548640" y="320040"/>
+            <a:ext cx="11094415" cy="274320"/>
+          </a:xfrm>
+          <a:prstGeom prst="rect">
+            <a:avLst/>
+          </a:prstGeom>
+          <a:noFill/>
+        </p:spPr>
+        <p:txBody>
+          <a:bodyPr wrap="square" anchor="t" lIns="0" rIns="0" tIns="0" bIns="0"/>
+          <a:lstStyle/>
+          <a:p>
+            <a:pPr algn="l"/>
+            <a:r>
+              <a:rPr sz="1100" b="1" i="0">
+                <a:solidFill>
+                  <a:srgbClr val="A9C8F0"/>
+                </a:solidFill>
+                <a:latin typeface="Calibri"/>
+              </a:rPr>
+              <a:t>CORE COMPONENT  ·  Core Paper 1</a:t>
+            </a:r>
+          </a:p>
+        </p:txBody>
+      </p:sp>
+      <p:sp>
+        <p:nvSpPr>
+          <p:cNvPr id="3" name="TextBox 2"/>
+          <p:cNvSpPr txBox="1"/>
+          <p:nvPr/>
+        </p:nvSpPr>
+        <p:spPr>
+          <a:xfrm>
+            <a:off x="548640" y="566928"/>
+            <a:ext cx="11094415" cy="822960"/>
+          </a:xfrm>
+          <a:prstGeom prst="rect">
+            <a:avLst/>
+          </a:prstGeom>
+          <a:noFill/>
+        </p:spPr>
+        <p:txBody>
+          <a:bodyPr wrap="square" anchor="ctr" lIns="0" rIns="0" tIns="0" bIns="0"/>
+          <a:lstStyle/>
+          <a:p>
+            <a:pPr algn="l"/>
+            <a:r>
+              <a:rPr sz="3200" b="1" i="0">
+                <a:solidFill>
+                  <a:srgbClr val="FFFFFF"/>
+                </a:solidFill>
+                <a:latin typeface="Cambria"/>
+              </a:rPr>
+              <a:t>Exit ticket</a:t>
+            </a:r>
+          </a:p>
+        </p:txBody>
+      </p:sp>
+      <p:sp>
+        <p:nvSpPr>
+          <p:cNvPr id="4" name="Oval 3"/>
+          <p:cNvSpPr/>
+          <p:nvPr/>
+        </p:nvSpPr>
+        <p:spPr>
+          <a:xfrm>
+            <a:off x="548640" y="1737360"/>
+            <a:ext cx="502920" cy="502920"/>
+          </a:xfrm>
+          <a:prstGeom prst="ellipse">
+            <a:avLst/>
+          </a:prstGeom>
+          <a:solidFill>
+            <a:srgbClr val="F2B705"/>
+          </a:solidFill>
+          <a:ln>
+            <a:noFill/>
+          </a:ln>
+          <a:effectLst/>
+        </p:spPr>
+        <p:style>
+          <a:lnRef idx="1">
+            <a:schemeClr val="accent1"/>
+          </a:lnRef>
+          <a:fillRef idx="3">
+            <a:schemeClr val="accent1"/>
+          </a:fillRef>
+          <a:effectRef idx="2">
+            <a:schemeClr val="accent1"/>
+          </a:effectRef>
+          <a:fontRef idx="minor">
+            <a:schemeClr val="lt1"/>
+          </a:fontRef>
+        </p:style>
+        <p:txBody>
+          <a:bodyPr rtlCol="0" anchor="ctr" lIns="0" rIns="0" tIns="0" bIns="0"/>
+          <a:lstStyle/>
+          <a:p>
+            <a:pPr algn="ctr"/>
+            <a:r>
+              <a:rPr sz="1700" b="1">
+                <a:solidFill>
+                  <a:srgbClr val="202122"/>
+                </a:solidFill>
+                <a:latin typeface="Calibri"/>
+              </a:rPr>
+              <a:t>1</a:t>
+            </a:r>
+          </a:p>
+        </p:txBody>
+      </p:sp>
+      <p:sp>
+        <p:nvSpPr>
+          <p:cNvPr id="5" name="TextBox 4"/>
+          <p:cNvSpPr txBox="1"/>
+          <p:nvPr/>
+        </p:nvSpPr>
+        <p:spPr>
+          <a:xfrm>
+            <a:off x="1325880" y="1645920"/>
+            <a:ext cx="6583680" cy="822960"/>
+          </a:xfrm>
+          <a:prstGeom prst="rect">
+            <a:avLst/>
+          </a:prstGeom>
+          <a:noFill/>
+        </p:spPr>
+        <p:txBody>
+          <a:bodyPr wrap="square" anchor="ctr" lIns="0" rIns="0" tIns="0" bIns="0"/>
+          <a:lstStyle/>
+          <a:p>
+            <a:pPr algn="l"/>
+            <a:r>
+              <a:rPr sz="2000" b="0" i="0">
+                <a:solidFill>
+                  <a:srgbClr val="FFFFFF"/>
+                </a:solidFill>
+                <a:latin typeface="Calibri"/>
+              </a:rPr>
+              <a:t>Which emerging technology will most change software development?</a:t>
+            </a:r>
+          </a:p>
+        </p:txBody>
+      </p:sp>
+      <p:sp>
+        <p:nvSpPr>
+          <p:cNvPr id="6" name="Oval 5"/>
+          <p:cNvSpPr/>
+          <p:nvPr/>
+        </p:nvSpPr>
+        <p:spPr>
+          <a:xfrm>
+            <a:off x="548640" y="2697480"/>
+            <a:ext cx="502920" cy="502920"/>
+          </a:xfrm>
+          <a:prstGeom prst="ellipse">
+            <a:avLst/>
+          </a:prstGeom>
+          <a:solidFill>
+            <a:srgbClr val="F2B705"/>
+          </a:solidFill>
+          <a:ln>
+            <a:noFill/>
+          </a:ln>
+          <a:effectLst/>
+        </p:spPr>
+        <p:style>
+          <a:lnRef idx="1">
+            <a:schemeClr val="accent1"/>
+          </a:lnRef>
+          <a:fillRef idx="3">
+            <a:schemeClr val="accent1"/>
+          </a:fillRef>
+          <a:effectRef idx="2">
+            <a:schemeClr val="accent1"/>
+          </a:effectRef>
+          <a:fontRef idx="minor">
+            <a:schemeClr val="lt1"/>
+          </a:fontRef>
+        </p:style>
+        <p:txBody>
+          <a:bodyPr rtlCol="0" anchor="ctr" lIns="0" rIns="0" tIns="0" bIns="0"/>
+          <a:lstStyle/>
+          <a:p>
+            <a:pPr algn="ctr"/>
+            <a:r>
+              <a:rPr sz="1700" b="1">
+                <a:solidFill>
+                  <a:srgbClr val="202122"/>
+                </a:solidFill>
+                <a:latin typeface="Calibri"/>
+              </a:rPr>
+              <a:t>2</a:t>
+            </a:r>
+          </a:p>
+        </p:txBody>
+      </p:sp>
+      <p:sp>
+        <p:nvSpPr>
+          <p:cNvPr id="7" name="TextBox 6"/>
+          <p:cNvSpPr txBox="1"/>
+          <p:nvPr/>
+        </p:nvSpPr>
+        <p:spPr>
+          <a:xfrm>
+            <a:off x="1325880" y="2606040"/>
+            <a:ext cx="6583680" cy="822960"/>
+          </a:xfrm>
+          <a:prstGeom prst="rect">
+            <a:avLst/>
+          </a:prstGeom>
+          <a:noFill/>
+        </p:spPr>
+        <p:txBody>
+          <a:bodyPr wrap="square" anchor="ctr" lIns="0" rIns="0" tIns="0" bIns="0"/>
+          <a:lstStyle/>
+          <a:p>
+            <a:pPr algn="l"/>
+            <a:r>
+              <a:rPr sz="2000" b="0" i="0">
+                <a:solidFill>
+                  <a:srgbClr val="FFFFFF"/>
+                </a:solidFill>
+                <a:latin typeface="Calibri"/>
+              </a:rPr>
+              <a:t>Name one characteristic that affects inclusivity.</a:t>
+            </a:r>
+          </a:p>
+        </p:txBody>
+      </p:sp>
+      <p:sp>
+        <p:nvSpPr>
+          <p:cNvPr id="8" name="Oval 7"/>
+          <p:cNvSpPr/>
+          <p:nvPr/>
+        </p:nvSpPr>
+        <p:spPr>
+          <a:xfrm>
+            <a:off x="548640" y="3657600"/>
+            <a:ext cx="502920" cy="502920"/>
+          </a:xfrm>
+          <a:prstGeom prst="ellipse">
+            <a:avLst/>
+          </a:prstGeom>
+          <a:solidFill>
+            <a:srgbClr val="F2B705"/>
+          </a:solidFill>
+          <a:ln>
+            <a:noFill/>
+          </a:ln>
+          <a:effectLst/>
+        </p:spPr>
+        <p:style>
+          <a:lnRef idx="1">
+            <a:schemeClr val="accent1"/>
+          </a:lnRef>
+          <a:fillRef idx="3">
+            <a:schemeClr val="accent1"/>
+          </a:fillRef>
+          <a:effectRef idx="2">
+            <a:schemeClr val="accent1"/>
+          </a:effectRef>
+          <a:fontRef idx="minor">
+            <a:schemeClr val="lt1"/>
+          </a:fontRef>
+        </p:style>
+        <p:txBody>
+          <a:bodyPr rtlCol="0" anchor="ctr" lIns="0" rIns="0" tIns="0" bIns="0"/>
+          <a:lstStyle/>
+          <a:p>
+            <a:pPr algn="ctr"/>
+            <a:r>
+              <a:rPr sz="1700" b="1">
+                <a:solidFill>
+                  <a:srgbClr val="202122"/>
+                </a:solidFill>
+                <a:latin typeface="Calibri"/>
+              </a:rPr>
+              <a:t>3</a:t>
+            </a:r>
+          </a:p>
+        </p:txBody>
+      </p:sp>
+      <p:sp>
+        <p:nvSpPr>
+          <p:cNvPr id="9" name="TextBox 8"/>
+          <p:cNvSpPr txBox="1"/>
+          <p:nvPr/>
+        </p:nvSpPr>
+        <p:spPr>
+          <a:xfrm>
+            <a:off x="1325880" y="3566160"/>
+            <a:ext cx="6583680" cy="822960"/>
+          </a:xfrm>
+          <a:prstGeom prst="rect">
+            <a:avLst/>
+          </a:prstGeom>
+          <a:noFill/>
+        </p:spPr>
+        <p:txBody>
+          <a:bodyPr wrap="square" anchor="ctr" lIns="0" rIns="0" tIns="0" bIns="0"/>
+          <a:lstStyle/>
+          <a:p>
+            <a:pPr algn="l"/>
+            <a:r>
+              <a:rPr sz="2000" b="0" i="0">
+                <a:solidFill>
+                  <a:srgbClr val="FFFFFF"/>
+                </a:solidFill>
+                <a:latin typeface="Calibri"/>
+              </a:rPr>
+              <a:t>Why does professional development matter for developers?</a:t>
+            </a:r>
+          </a:p>
+        </p:txBody>
+      </p:sp>
+      <p:sp>
+        <p:nvSpPr>
+          <p:cNvPr id="10" name="Rounded Rectangle 9"/>
+          <p:cNvSpPr/>
+          <p:nvPr/>
+        </p:nvSpPr>
+        <p:spPr>
+          <a:xfrm>
+            <a:off x="8229600" y="1645920"/>
+            <a:ext cx="3410712" cy="2926080"/>
+          </a:xfrm>
+          <a:prstGeom prst="roundRect">
+            <a:avLst>
+              <a:gd name="adj" fmla="val 8000"/>
+            </a:avLst>
+          </a:prstGeom>
+          <a:solidFill>
+            <a:srgbClr val="0645AD"/>
+          </a:solidFill>
+          <a:ln>
+            <a:noFill/>
+          </a:ln>
+          <a:effectLst/>
+        </p:spPr>
+        <p:style>
+          <a:lnRef idx="1">
+            <a:schemeClr val="accent1"/>
+          </a:lnRef>
+          <a:fillRef idx="3">
+            <a:schemeClr val="accent1"/>
+          </a:fillRef>
+          <a:effectRef idx="2">
+            <a:schemeClr val="accent1"/>
+          </a:effectRef>
+          <a:fontRef idx="minor">
+            <a:schemeClr val="lt1"/>
+          </a:fontRef>
+        </p:style>
+        <p:txBody>
+          <a:bodyPr rtlCol="0" anchor="ctr"/>
+          <a:lstStyle/>
+          <a:p/>
+        </p:txBody>
+      </p:sp>
+      <p:sp>
+        <p:nvSpPr>
+          <p:cNvPr id="11" name="TextBox 10"/>
+          <p:cNvSpPr txBox="1"/>
+          <p:nvPr/>
+        </p:nvSpPr>
+        <p:spPr>
+          <a:xfrm>
+            <a:off x="8503920" y="1874519"/>
+            <a:ext cx="2926080" cy="365760"/>
+          </a:xfrm>
+          <a:prstGeom prst="rect">
+            <a:avLst/>
+          </a:prstGeom>
+          <a:noFill/>
+        </p:spPr>
+        <p:txBody>
+          <a:bodyPr wrap="square" anchor="t" lIns="0" rIns="0" tIns="0" bIns="0"/>
+          <a:lstStyle/>
+          <a:p>
+            <a:pPr algn="l"/>
+            <a:r>
+              <a:rPr sz="1300" b="1" i="0">
+                <a:solidFill>
+                  <a:srgbClr val="A9C8F0"/>
+                </a:solidFill>
+                <a:latin typeface="Calibri"/>
+              </a:rPr>
+              <a:t>REVISE THIS TOPIC</a:t>
+            </a:r>
+          </a:p>
+        </p:txBody>
+      </p:sp>
+      <p:sp>
+        <p:nvSpPr>
+          <p:cNvPr id="12" name="TextBox 11"/>
+          <p:cNvSpPr txBox="1"/>
+          <p:nvPr/>
+        </p:nvSpPr>
+        <p:spPr>
+          <a:xfrm>
+            <a:off x="8503920" y="2286000"/>
+            <a:ext cx="2926080" cy="548640"/>
+          </a:xfrm>
+          <a:prstGeom prst="rect">
+            <a:avLst/>
+          </a:prstGeom>
+          <a:noFill/>
+        </p:spPr>
+        <p:txBody>
+          <a:bodyPr wrap="square" anchor="t" lIns="0" rIns="0" tIns="0" bIns="0"/>
+          <a:lstStyle/>
+          <a:p>
+            <a:pPr algn="l"/>
+            <a:r>
+              <a:rPr sz="1400" b="0" i="0">
+                <a:solidFill>
+                  <a:srgbClr val="FFFFFF"/>
+                </a:solidFill>
+                <a:latin typeface="Calibri"/>
+              </a:rPr>
+              <a:t>Revision notes for this lesson are on the study wiki:</a:t>
+            </a:r>
+          </a:p>
+        </p:txBody>
+      </p:sp>
+      <p:sp>
+        <p:nvSpPr>
+          <p:cNvPr id="13" name="TextBox 12"/>
+          <p:cNvSpPr txBox="1"/>
+          <p:nvPr/>
+        </p:nvSpPr>
+        <p:spPr>
+          <a:xfrm>
+            <a:off x="8503920" y="2926080"/>
+            <a:ext cx="2926080" cy="1463040"/>
+          </a:xfrm>
+          <a:prstGeom prst="rect">
+            <a:avLst/>
+          </a:prstGeom>
+          <a:noFill/>
+        </p:spPr>
+        <p:txBody>
+          <a:bodyPr wrap="square" anchor="t" lIns="0" rIns="0" tIns="0" bIns="0"/>
+          <a:lstStyle/>
+          <a:p>
+            <a:pPr algn="l"/>
+            <a:r>
+              <a:rPr sz="2000" b="1" i="0">
+                <a:solidFill>
+                  <a:srgbClr val="FFFFFF"/>
+                </a:solidFill>
+                <a:latin typeface="Cambria"/>
+              </a:rPr>
+              <a:t>Core Paper 1: Problem Solving, Programming, Emerging Issues and Legislation</a:t>
+            </a:r>
+          </a:p>
+        </p:txBody>
+      </p:sp>
+      <p:sp>
+        <p:nvSpPr>
+          <p:cNvPr id="14" name="TextBox 13"/>
+          <p:cNvSpPr txBox="1"/>
+          <p:nvPr/>
+        </p:nvSpPr>
+        <p:spPr>
+          <a:xfrm>
+            <a:off x="548640" y="5669280"/>
+            <a:ext cx="11094415" cy="548640"/>
+          </a:xfrm>
+          <a:prstGeom prst="rect">
+            <a:avLst/>
+          </a:prstGeom>
+          <a:noFill/>
+        </p:spPr>
+        <p:txBody>
+          <a:bodyPr wrap="square" anchor="t" lIns="0" rIns="0" tIns="0" bIns="0"/>
+          <a:lstStyle/>
+          <a:p>
+            <a:pPr algn="l"/>
+            <a:r>
+              <a:rPr sz="1200" b="0" i="0">
+                <a:solidFill>
+                  <a:srgbClr val="A9C8F0"/>
+                </a:solidFill>
+                <a:latin typeface="Calibri"/>
+              </a:rPr>
+              <a:t>https://lana6478.github.io/T-level-Digital-Software-Development/#/01-core-component/01-core-paper-1.md</a:t>
+            </a:r>
+          </a:p>
+        </p:txBody>
+      </p:sp>
+    </p:spTree>
+  </p:cSld>
+  <p:clrMapOvr>
+    <a:masterClrMapping/>
+  </p:clrMapOvr>
+</p:sld>
+</file>
+
 <file path=ppt/slides/slide2.xml><?xml version="1.0" encoding="utf-8"?>
 <p:sld xmlns:a="http://schemas.openxmlformats.org/drawingml/2006/main" xmlns:p="http://schemas.openxmlformats.org/presentationml/2006/main" xmlns:r="http://schemas.openxmlformats.org/officeDocument/2006/relationships">
   <p:cSld>
@@ -4686,18 +8881,82 @@
       </p:sp>
       <p:sp>
         <p:nvSpPr>
-          <p:cNvPr id="6" name="Rounded Rectangle 5"/>
+          <p:cNvPr id="6" name="TextBox 5"/>
+          <p:cNvSpPr txBox="1"/>
+          <p:nvPr/>
+        </p:nvSpPr>
+        <p:spPr>
+          <a:xfrm>
+            <a:off x="548640" y="1554480"/>
+            <a:ext cx="6720840" cy="4617720"/>
+          </a:xfrm>
+          <a:prstGeom prst="rect">
+            <a:avLst/>
+          </a:prstGeom>
+          <a:noFill/>
+        </p:spPr>
+        <p:txBody>
+          <a:bodyPr wrap="square" lIns="0" rIns="0" tIns="0" bIns="0">
+            <a:spAutoFit/>
+          </a:bodyPr>
+          <a:lstStyle/>
+          <a:p>
+            <a:pPr>
+              <a:spcAft>
+                <a:spcPts val="1320"/>
+              </a:spcAft>
+            </a:pPr>
+            <a:r>
+              <a:rPr sz="2200" b="0">
+                <a:solidFill>
+                  <a:srgbClr val="202122"/>
+                </a:solidFill>
+                <a:latin typeface="Calibri"/>
+              </a:rPr>
+              <a:t>Digital technology changes how organisations work: communication moves online, people are expected to be more productive and available, staff are monitored more, remote and hybrid working are normal, and automation and AI take over routine tasks.</a:t>
+            </a:r>
+          </a:p>
+          <a:p>
+            <a:pPr>
+              <a:spcAft>
+                <a:spcPts val="1320"/>
+              </a:spcAft>
+            </a:pPr>
+            <a:r>
+              <a:rPr sz="2200" b="1">
+                <a:solidFill>
+                  <a:srgbClr val="202122"/>
+                </a:solidFill>
+                <a:latin typeface="Calibri"/>
+              </a:rPr>
+              <a:t>It also changes society:</a:t>
+            </a:r>
+            <a:r>
+              <a:rPr sz="2200" b="0">
+                <a:solidFill>
+                  <a:srgbClr val="202122"/>
+                </a:solidFill>
+                <a:latin typeface="Calibri"/>
+              </a:rPr>
+              <a:t> some jobs disappear and new skills are needed, fewer decisions involve humans, privacy is harder to protect and behaviour changes. Access to information and services improves for many, but people without skills, devices or internet risk being left out. Generative AI and globalisation are speeding this up.</a:t>
+            </a:r>
+          </a:p>
+        </p:txBody>
+      </p:sp>
+      <p:sp>
+        <p:nvSpPr>
+          <p:cNvPr id="7" name="Rounded Rectangle 6"/>
           <p:cNvSpPr/>
           <p:nvPr/>
         </p:nvSpPr>
         <p:spPr>
           <a:xfrm>
-            <a:off x="548640" y="1600200"/>
-            <a:ext cx="5364327" cy="640080"/>
+            <a:off x="7772400" y="1554480"/>
+            <a:ext cx="3867912" cy="4526280"/>
           </a:xfrm>
           <a:prstGeom prst="roundRect">
             <a:avLst>
-              <a:gd name="adj" fmla="val 15000"/>
+              <a:gd name="adj" fmla="val 8000"/>
             </a:avLst>
           </a:prstGeom>
           <a:solidFill>
@@ -4730,55 +8989,20 @@
       </p:sp>
       <p:sp>
         <p:nvSpPr>
-          <p:cNvPr id="7" name="TextBox 6"/>
-          <p:cNvSpPr txBox="1"/>
-          <p:nvPr/>
-        </p:nvSpPr>
-        <p:spPr>
-          <a:xfrm>
-            <a:off x="777240" y="1600200"/>
-            <a:ext cx="4907127" cy="640080"/>
-          </a:xfrm>
-          <a:prstGeom prst="rect">
-            <a:avLst/>
-          </a:prstGeom>
-          <a:noFill/>
-        </p:spPr>
-        <p:txBody>
-          <a:bodyPr wrap="square" anchor="ctr" lIns="0" rIns="0" tIns="0" bIns="0"/>
-          <a:lstStyle/>
-          <a:p>
-            <a:pPr algn="l"/>
-            <a:r>
-              <a:rPr sz="2000" b="1" i="0">
-                <a:solidFill>
-                  <a:srgbClr val="FFFFFF"/>
-                </a:solidFill>
-                <a:latin typeface="Calibri"/>
-              </a:rPr>
-              <a:t>On organisational culture</a:t>
-            </a:r>
-          </a:p>
-        </p:txBody>
-      </p:sp>
-      <p:sp>
-        <p:nvSpPr>
-          <p:cNvPr id="8" name="Rounded Rectangle 7"/>
+          <p:cNvPr id="8" name="Oval 7"/>
           <p:cNvSpPr/>
           <p:nvPr/>
         </p:nvSpPr>
         <p:spPr>
           <a:xfrm>
-            <a:off x="548640" y="2377440"/>
-            <a:ext cx="5364327" cy="3794760"/>
-          </a:xfrm>
-          <a:prstGeom prst="roundRect">
-            <a:avLst>
-              <a:gd name="adj" fmla="val 4000"/>
-            </a:avLst>
+            <a:off x="8046720" y="1828800"/>
+            <a:ext cx="548640" cy="548640"/>
+          </a:xfrm>
+          <a:prstGeom prst="ellipse">
+            <a:avLst/>
           </a:prstGeom>
           <a:solidFill>
-            <a:srgbClr val="EAF3FF"/>
+            <a:srgbClr val="F2B705"/>
           </a:solidFill>
           <a:ln>
             <a:noFill/>
@@ -4800,9 +9024,20 @@
           </a:fontRef>
         </p:style>
         <p:txBody>
-          <a:bodyPr rtlCol="0" anchor="ctr"/>
-          <a:lstStyle/>
-          <a:p/>
+          <a:bodyPr rtlCol="0" anchor="ctr" lIns="0" rIns="0" tIns="0" bIns="0"/>
+          <a:lstStyle/>
+          <a:p>
+            <a:pPr algn="ctr"/>
+            <a:r>
+              <a:rPr sz="1300" b="1">
+                <a:solidFill>
+                  <a:srgbClr val="202122"/>
+                </a:solidFill>
+                <a:latin typeface="Calibri"/>
+              </a:rPr>
+              <a:t>e.g.</a:t>
+            </a:r>
+          </a:p>
         </p:txBody>
       </p:sp>
       <p:sp>
@@ -4813,371 +9048,60 @@
         </p:nvSpPr>
         <p:spPr>
           <a:xfrm>
-            <a:off x="822959" y="2606040"/>
-            <a:ext cx="4815687" cy="3337560"/>
-          </a:xfrm>
-          <a:prstGeom prst="rect">
-            <a:avLst/>
-          </a:prstGeom>
-          <a:noFill/>
-        </p:spPr>
-        <p:txBody>
-          <a:bodyPr wrap="square" lIns="0" rIns="0" tIns="0" bIns="0">
-            <a:spAutoFit/>
-          </a:bodyPr>
-          <a:lstStyle/>
-          <a:p>
-            <a:pPr marL="274320" indent="-274320">
-              <a:spcAft>
-                <a:spcPts val="990"/>
-              </a:spcAft>
-              <a:buClr>
-                <a:srgbClr val="0645AD"/>
-              </a:buClr>
-              <a:buFont typeface="Arial"/>
-              <a:buChar char="•"/>
-            </a:pPr>
-            <a:r>
-              <a:rPr sz="2200" b="0">
-                <a:solidFill>
-                  <a:srgbClr val="202122"/>
-                </a:solidFill>
-                <a:latin typeface="Calibri"/>
-              </a:rPr>
-              <a:t>New ways of communicating</a:t>
-            </a:r>
-          </a:p>
-          <a:p>
-            <a:pPr marL="274320" indent="-274320">
-              <a:spcAft>
-                <a:spcPts val="990"/>
-              </a:spcAft>
-              <a:buClr>
-                <a:srgbClr val="0645AD"/>
-              </a:buClr>
-              <a:buFont typeface="Arial"/>
-              <a:buChar char="•"/>
-            </a:pPr>
-            <a:r>
-              <a:rPr sz="2200" b="0">
-                <a:solidFill>
-                  <a:srgbClr val="202122"/>
-                </a:solidFill>
-                <a:latin typeface="Calibri"/>
-              </a:rPr>
-              <a:t>Higher expectations of productivity and availability</a:t>
-            </a:r>
-          </a:p>
-          <a:p>
-            <a:pPr marL="274320" indent="-274320">
-              <a:spcAft>
-                <a:spcPts val="990"/>
-              </a:spcAft>
-              <a:buClr>
-                <a:srgbClr val="0645AD"/>
-              </a:buClr>
-              <a:buFont typeface="Arial"/>
-              <a:buChar char="•"/>
-            </a:pPr>
-            <a:r>
-              <a:rPr sz="2200" b="0">
-                <a:solidFill>
-                  <a:srgbClr val="202122"/>
-                </a:solidFill>
-                <a:latin typeface="Calibri"/>
-              </a:rPr>
-              <a:t>More staff monitoring</a:t>
-            </a:r>
-          </a:p>
-          <a:p>
-            <a:pPr marL="274320" indent="-274320">
-              <a:spcAft>
-                <a:spcPts val="990"/>
-              </a:spcAft>
-              <a:buClr>
-                <a:srgbClr val="0645AD"/>
-              </a:buClr>
-              <a:buFont typeface="Arial"/>
-              <a:buChar char="•"/>
-            </a:pPr>
-            <a:r>
-              <a:rPr sz="2200" b="0">
-                <a:solidFill>
-                  <a:srgbClr val="202122"/>
-                </a:solidFill>
-                <a:latin typeface="Calibri"/>
-              </a:rPr>
-              <a:t>Remote, hybrid and in-office working</a:t>
-            </a:r>
-          </a:p>
-          <a:p>
-            <a:pPr marL="274320" indent="-274320">
-              <a:spcAft>
-                <a:spcPts val="990"/>
-              </a:spcAft>
-              <a:buClr>
-                <a:srgbClr val="0645AD"/>
-              </a:buClr>
-              <a:buFont typeface="Arial"/>
-              <a:buChar char="•"/>
-            </a:pPr>
-            <a:r>
-              <a:rPr sz="2200" b="0">
-                <a:solidFill>
-                  <a:srgbClr val="202122"/>
-                </a:solidFill>
-                <a:latin typeface="Calibri"/>
-              </a:rPr>
-              <a:t>Automation, including AI</a:t>
-            </a:r>
-          </a:p>
-        </p:txBody>
-      </p:sp>
-      <p:sp>
-        <p:nvSpPr>
-          <p:cNvPr id="10" name="Rounded Rectangle 9"/>
-          <p:cNvSpPr/>
-          <p:nvPr/>
-        </p:nvSpPr>
-        <p:spPr>
-          <a:xfrm>
-            <a:off x="6278727" y="1600200"/>
-            <a:ext cx="5364327" cy="640080"/>
-          </a:xfrm>
-          <a:prstGeom prst="roundRect">
-            <a:avLst>
-              <a:gd name="adj" fmla="val 15000"/>
-            </a:avLst>
-          </a:prstGeom>
-          <a:solidFill>
-            <a:srgbClr val="0645AD"/>
-          </a:solidFill>
-          <a:ln>
-            <a:noFill/>
-          </a:ln>
-          <a:effectLst/>
-        </p:spPr>
-        <p:style>
-          <a:lnRef idx="1">
-            <a:schemeClr val="accent1"/>
-          </a:lnRef>
-          <a:fillRef idx="3">
-            <a:schemeClr val="accent1"/>
-          </a:fillRef>
-          <a:effectRef idx="2">
-            <a:schemeClr val="accent1"/>
-          </a:effectRef>
-          <a:fontRef idx="minor">
-            <a:schemeClr val="lt1"/>
-          </a:fontRef>
-        </p:style>
-        <p:txBody>
-          <a:bodyPr rtlCol="0" anchor="ctr"/>
-          <a:lstStyle/>
-          <a:p/>
-        </p:txBody>
-      </p:sp>
-      <p:sp>
-        <p:nvSpPr>
-          <p:cNvPr id="11" name="TextBox 10"/>
-          <p:cNvSpPr txBox="1"/>
-          <p:nvPr/>
-        </p:nvSpPr>
-        <p:spPr>
-          <a:xfrm>
-            <a:off x="6507327" y="1600200"/>
-            <a:ext cx="4907127" cy="640080"/>
-          </a:xfrm>
-          <a:prstGeom prst="rect">
-            <a:avLst/>
-          </a:prstGeom>
-          <a:noFill/>
-        </p:spPr>
-        <p:txBody>
-          <a:bodyPr wrap="square" anchor="ctr" lIns="0" rIns="0" tIns="0" bIns="0"/>
+            <a:off x="8046720" y="2560320"/>
+            <a:ext cx="3291840" cy="365760"/>
+          </a:xfrm>
+          <a:prstGeom prst="rect">
+            <a:avLst/>
+          </a:prstGeom>
+          <a:noFill/>
+        </p:spPr>
+        <p:txBody>
+          <a:bodyPr wrap="square" anchor="t" lIns="0" rIns="0" tIns="0" bIns="0"/>
           <a:lstStyle/>
           <a:p>
             <a:pPr algn="l"/>
             <a:r>
-              <a:rPr sz="2000" b="1" i="0">
+              <a:rPr sz="1300" b="1" i="0">
+                <a:solidFill>
+                  <a:srgbClr val="A9C8F0"/>
+                </a:solidFill>
+                <a:latin typeface="Calibri"/>
+              </a:rPr>
+              <a:t>EXAMPLE</a:t>
+            </a:r>
+          </a:p>
+        </p:txBody>
+      </p:sp>
+      <p:sp>
+        <p:nvSpPr>
+          <p:cNvPr id="10" name="TextBox 9"/>
+          <p:cNvSpPr txBox="1"/>
+          <p:nvPr/>
+        </p:nvSpPr>
+        <p:spPr>
+          <a:xfrm>
+            <a:off x="8046720" y="2971800"/>
+            <a:ext cx="3291840" cy="2971800"/>
+          </a:xfrm>
+          <a:prstGeom prst="rect">
+            <a:avLst/>
+          </a:prstGeom>
+          <a:noFill/>
+        </p:spPr>
+        <p:txBody>
+          <a:bodyPr wrap="square" anchor="t" lIns="0" rIns="0" tIns="0" bIns="0"/>
+          <a:lstStyle/>
+          <a:p>
+            <a:pPr algn="l"/>
+            <a:r>
+              <a:rPr sz="1900" b="0" i="0">
                 <a:solidFill>
                   <a:srgbClr val="FFFFFF"/>
                 </a:solidFill>
-                <a:latin typeface="Calibri"/>
-              </a:rPr>
-              <a:t>On society</a:t>
-            </a:r>
-          </a:p>
-        </p:txBody>
-      </p:sp>
-      <p:sp>
-        <p:nvSpPr>
-          <p:cNvPr id="12" name="Rounded Rectangle 11"/>
-          <p:cNvSpPr/>
-          <p:nvPr/>
-        </p:nvSpPr>
-        <p:spPr>
-          <a:xfrm>
-            <a:off x="6278727" y="2377440"/>
-            <a:ext cx="5364327" cy="3794760"/>
-          </a:xfrm>
-          <a:prstGeom prst="roundRect">
-            <a:avLst>
-              <a:gd name="adj" fmla="val 4000"/>
-            </a:avLst>
-          </a:prstGeom>
-          <a:solidFill>
-            <a:srgbClr val="EAF3FF"/>
-          </a:solidFill>
-          <a:ln>
-            <a:noFill/>
-          </a:ln>
-          <a:effectLst/>
-        </p:spPr>
-        <p:style>
-          <a:lnRef idx="1">
-            <a:schemeClr val="accent1"/>
-          </a:lnRef>
-          <a:fillRef idx="3">
-            <a:schemeClr val="accent1"/>
-          </a:fillRef>
-          <a:effectRef idx="2">
-            <a:schemeClr val="accent1"/>
-          </a:effectRef>
-          <a:fontRef idx="minor">
-            <a:schemeClr val="lt1"/>
-          </a:fontRef>
-        </p:style>
-        <p:txBody>
-          <a:bodyPr rtlCol="0" anchor="ctr"/>
-          <a:lstStyle/>
-          <a:p/>
-        </p:txBody>
-      </p:sp>
-      <p:sp>
-        <p:nvSpPr>
-          <p:cNvPr id="13" name="TextBox 12"/>
-          <p:cNvSpPr txBox="1"/>
-          <p:nvPr/>
-        </p:nvSpPr>
-        <p:spPr>
-          <a:xfrm>
-            <a:off x="6553047" y="2606040"/>
-            <a:ext cx="4815687" cy="3337560"/>
-          </a:xfrm>
-          <a:prstGeom prst="rect">
-            <a:avLst/>
-          </a:prstGeom>
-          <a:noFill/>
-        </p:spPr>
-        <p:txBody>
-          <a:bodyPr wrap="square" lIns="0" rIns="0" tIns="0" bIns="0">
-            <a:spAutoFit/>
-          </a:bodyPr>
-          <a:lstStyle/>
-          <a:p>
-            <a:pPr marL="274320" indent="-274320">
-              <a:spcAft>
-                <a:spcPts val="945"/>
-              </a:spcAft>
-              <a:buClr>
-                <a:srgbClr val="0645AD"/>
-              </a:buClr>
-              <a:buFont typeface="Arial"/>
-              <a:buChar char="•"/>
-            </a:pPr>
-            <a:r>
-              <a:rPr sz="2100" b="0">
-                <a:solidFill>
-                  <a:srgbClr val="202122"/>
-                </a:solidFill>
-                <a:latin typeface="Calibri"/>
-              </a:rPr>
-              <a:t>Job losses and changing skills</a:t>
-            </a:r>
-          </a:p>
-          <a:p>
-            <a:pPr marL="274320" indent="-274320">
-              <a:spcAft>
-                <a:spcPts val="945"/>
-              </a:spcAft>
-              <a:buClr>
-                <a:srgbClr val="0645AD"/>
-              </a:buClr>
-              <a:buFont typeface="Arial"/>
-              <a:buChar char="•"/>
-            </a:pPr>
-            <a:r>
-              <a:rPr sz="2100" b="0">
-                <a:solidFill>
-                  <a:srgbClr val="202122"/>
-                </a:solidFill>
-                <a:latin typeface="Calibri"/>
-              </a:rPr>
-              <a:t>Less human decision-making</a:t>
-            </a:r>
-          </a:p>
-          <a:p>
-            <a:pPr marL="274320" indent="-274320">
-              <a:spcAft>
-                <a:spcPts val="945"/>
-              </a:spcAft>
-              <a:buClr>
-                <a:srgbClr val="0645AD"/>
-              </a:buClr>
-              <a:buFont typeface="Arial"/>
-              <a:buChar char="•"/>
-            </a:pPr>
-            <a:r>
-              <a:rPr sz="2100" b="0">
-                <a:solidFill>
-                  <a:srgbClr val="202122"/>
-                </a:solidFill>
-                <a:latin typeface="Calibri"/>
-              </a:rPr>
-              <a:t>Privacy, digital footprint and surveillance</a:t>
-            </a:r>
-          </a:p>
-          <a:p>
-            <a:pPr marL="274320" indent="-274320">
-              <a:spcAft>
-                <a:spcPts val="945"/>
-              </a:spcAft>
-              <a:buClr>
-                <a:srgbClr val="0645AD"/>
-              </a:buClr>
-              <a:buFont typeface="Arial"/>
-              <a:buChar char="•"/>
-            </a:pPr>
-            <a:r>
-              <a:rPr sz="2100" b="0">
-                <a:solidFill>
-                  <a:srgbClr val="202122"/>
-                </a:solidFill>
-                <a:latin typeface="Calibri"/>
-              </a:rPr>
-              <a:t>Isolation for some, better access for others</a:t>
-            </a:r>
-          </a:p>
-          <a:p>
-            <a:pPr marL="274320" indent="-274320">
-              <a:spcAft>
-                <a:spcPts val="945"/>
-              </a:spcAft>
-              <a:buClr>
-                <a:srgbClr val="0645AD"/>
-              </a:buClr>
-              <a:buFont typeface="Arial"/>
-              <a:buChar char="•"/>
-            </a:pPr>
-            <a:r>
-              <a:rPr sz="2100" b="0">
-                <a:solidFill>
-                  <a:srgbClr val="202122"/>
-                </a:solidFill>
-                <a:latin typeface="Calibri"/>
-              </a:rPr>
-              <a:t>Generative AI and globalisation</a:t>
+                <a:latin typeface="Cambria"/>
+              </a:rPr>
+              <a:t>AI coding assistants speed up routine code, so developers spend more time on design, testing and checking the AI's output.</a:t>
             </a:r>
           </a:p>
         </p:txBody>
@@ -5269,7 +9193,7 @@
                 </a:solidFill>
                 <a:latin typeface="Cambria"/>
               </a:rPr>
-              <a:t>Digital inclusion</a:t>
+              <a:t>Impact of digital technologies</a:t>
             </a:r>
           </a:p>
         </p:txBody>
@@ -5342,14 +9266,135 @@
       </p:sp>
       <p:sp>
         <p:nvSpPr>
-          <p:cNvPr id="6" name="TextBox 5"/>
-          <p:cNvSpPr txBox="1"/>
+          <p:cNvPr id="6" name="Rounded Rectangle 5"/>
+          <p:cNvSpPr/>
           <p:nvPr/>
         </p:nvSpPr>
         <p:spPr>
           <a:xfrm>
             <a:off x="548640" y="1600200"/>
-            <a:ext cx="6675120" cy="4572000"/>
+            <a:ext cx="5364327" cy="640080"/>
+          </a:xfrm>
+          <a:prstGeom prst="roundRect">
+            <a:avLst>
+              <a:gd name="adj" fmla="val 15000"/>
+            </a:avLst>
+          </a:prstGeom>
+          <a:solidFill>
+            <a:srgbClr val="03306E"/>
+          </a:solidFill>
+          <a:ln>
+            <a:noFill/>
+          </a:ln>
+          <a:effectLst/>
+        </p:spPr>
+        <p:style>
+          <a:lnRef idx="1">
+            <a:schemeClr val="accent1"/>
+          </a:lnRef>
+          <a:fillRef idx="3">
+            <a:schemeClr val="accent1"/>
+          </a:fillRef>
+          <a:effectRef idx="2">
+            <a:schemeClr val="accent1"/>
+          </a:effectRef>
+          <a:fontRef idx="minor">
+            <a:schemeClr val="lt1"/>
+          </a:fontRef>
+        </p:style>
+        <p:txBody>
+          <a:bodyPr rtlCol="0" anchor="ctr"/>
+          <a:lstStyle/>
+          <a:p/>
+        </p:txBody>
+      </p:sp>
+      <p:sp>
+        <p:nvSpPr>
+          <p:cNvPr id="7" name="TextBox 6"/>
+          <p:cNvSpPr txBox="1"/>
+          <p:nvPr/>
+        </p:nvSpPr>
+        <p:spPr>
+          <a:xfrm>
+            <a:off x="777240" y="1600200"/>
+            <a:ext cx="4907127" cy="640080"/>
+          </a:xfrm>
+          <a:prstGeom prst="rect">
+            <a:avLst/>
+          </a:prstGeom>
+          <a:noFill/>
+        </p:spPr>
+        <p:txBody>
+          <a:bodyPr wrap="square" anchor="ctr" lIns="0" rIns="0" tIns="0" bIns="0"/>
+          <a:lstStyle/>
+          <a:p>
+            <a:pPr algn="l"/>
+            <a:r>
+              <a:rPr sz="2000" b="1" i="0">
+                <a:solidFill>
+                  <a:srgbClr val="FFFFFF"/>
+                </a:solidFill>
+                <a:latin typeface="Calibri"/>
+              </a:rPr>
+              <a:t>On organisational culture</a:t>
+            </a:r>
+          </a:p>
+        </p:txBody>
+      </p:sp>
+      <p:sp>
+        <p:nvSpPr>
+          <p:cNvPr id="8" name="Rounded Rectangle 7"/>
+          <p:cNvSpPr/>
+          <p:nvPr/>
+        </p:nvSpPr>
+        <p:spPr>
+          <a:xfrm>
+            <a:off x="548640" y="2377440"/>
+            <a:ext cx="5364327" cy="3794760"/>
+          </a:xfrm>
+          <a:prstGeom prst="roundRect">
+            <a:avLst>
+              <a:gd name="adj" fmla="val 4000"/>
+            </a:avLst>
+          </a:prstGeom>
+          <a:solidFill>
+            <a:srgbClr val="EAF3FF"/>
+          </a:solidFill>
+          <a:ln>
+            <a:noFill/>
+          </a:ln>
+          <a:effectLst/>
+        </p:spPr>
+        <p:style>
+          <a:lnRef idx="1">
+            <a:schemeClr val="accent1"/>
+          </a:lnRef>
+          <a:fillRef idx="3">
+            <a:schemeClr val="accent1"/>
+          </a:fillRef>
+          <a:effectRef idx="2">
+            <a:schemeClr val="accent1"/>
+          </a:effectRef>
+          <a:fontRef idx="minor">
+            <a:schemeClr val="lt1"/>
+          </a:fontRef>
+        </p:style>
+        <p:txBody>
+          <a:bodyPr rtlCol="0" anchor="ctr"/>
+          <a:lstStyle/>
+          <a:p/>
+        </p:txBody>
+      </p:sp>
+      <p:sp>
+        <p:nvSpPr>
+          <p:cNvPr id="9" name="TextBox 8"/>
+          <p:cNvSpPr txBox="1"/>
+          <p:nvPr/>
+        </p:nvSpPr>
+        <p:spPr>
+          <a:xfrm>
+            <a:off x="822959" y="2606040"/>
+            <a:ext cx="4815687" cy="3337560"/>
           </a:xfrm>
           <a:prstGeom prst="rect">
             <a:avLst/>
@@ -5364,7 +9409,7 @@
           <a:p>
             <a:pPr marL="274320" indent="-274320">
               <a:spcAft>
-                <a:spcPts val="1080"/>
+                <a:spcPts val="990"/>
               </a:spcAft>
               <a:buClr>
                 <a:srgbClr val="0645AD"/>
@@ -5373,19 +9418,19 @@
               <a:buChar char="•"/>
             </a:pPr>
             <a:r>
-              <a:rPr sz="2400" b="0">
+              <a:rPr sz="2200" b="0">
                 <a:solidFill>
                   <a:srgbClr val="202122"/>
                 </a:solidFill>
                 <a:latin typeface="Calibri"/>
               </a:rPr>
-              <a:t>Fair access needs suitable technology and connectivity.</a:t>
+              <a:t>New ways of communicating</a:t>
             </a:r>
           </a:p>
           <a:p>
             <a:pPr marL="274320" indent="-274320">
               <a:spcAft>
-                <a:spcPts val="1080"/>
+                <a:spcPts val="990"/>
               </a:spcAft>
               <a:buClr>
                 <a:srgbClr val="0645AD"/>
@@ -5394,19 +9439,19 @@
               <a:buChar char="•"/>
             </a:pPr>
             <a:r>
-              <a:rPr sz="2400" b="0">
+              <a:rPr sz="2200" b="0">
                 <a:solidFill>
                   <a:srgbClr val="202122"/>
                 </a:solidFill>
                 <a:latin typeface="Calibri"/>
               </a:rPr>
-              <a:t>Check datasets for bias before training or using them.</a:t>
+              <a:t>Higher expectations of productivity and availability</a:t>
             </a:r>
           </a:p>
           <a:p>
             <a:pPr marL="274320" indent="-274320">
               <a:spcAft>
-                <a:spcPts val="1080"/>
+                <a:spcPts val="990"/>
               </a:spcAft>
               <a:buClr>
                 <a:srgbClr val="0645AD"/>
@@ -5415,19 +9460,19 @@
               <a:buChar char="•"/>
             </a:pPr>
             <a:r>
-              <a:rPr sz="2400" b="0">
+              <a:rPr sz="2200" b="0">
                 <a:solidFill>
                   <a:srgbClr val="202122"/>
                 </a:solidFill>
                 <a:latin typeface="Calibri"/>
               </a:rPr>
-              <a:t>Follow best-practice codes and public sector accessibility regulations.</a:t>
+              <a:t>More staff monitoring</a:t>
             </a:r>
           </a:p>
           <a:p>
             <a:pPr marL="274320" indent="-274320">
               <a:spcAft>
-                <a:spcPts val="1080"/>
+                <a:spcPts val="990"/>
               </a:spcAft>
               <a:buClr>
                 <a:srgbClr val="0645AD"/>
@@ -5436,35 +9481,56 @@
               <a:buChar char="•"/>
             </a:pPr>
             <a:r>
-              <a:rPr sz="2400" b="0">
+              <a:rPr sz="2200" b="0">
                 <a:solidFill>
                   <a:srgbClr val="202122"/>
                 </a:solidFill>
                 <a:latin typeface="Calibri"/>
               </a:rPr>
-              <a:t>Consider users' age, digital and literacy skills, culture and accessibility needs.</a:t>
-            </a:r>
-          </a:p>
-        </p:txBody>
-      </p:sp>
-      <p:sp>
-        <p:nvSpPr>
-          <p:cNvPr id="7" name="Rounded Rectangle 6"/>
+              <a:t>Remote, hybrid and in-office working</a:t>
+            </a:r>
+          </a:p>
+          <a:p>
+            <a:pPr marL="274320" indent="-274320">
+              <a:spcAft>
+                <a:spcPts val="990"/>
+              </a:spcAft>
+              <a:buClr>
+                <a:srgbClr val="0645AD"/>
+              </a:buClr>
+              <a:buFont typeface="Arial"/>
+              <a:buChar char="•"/>
+            </a:pPr>
+            <a:r>
+              <a:rPr sz="2200" b="0">
+                <a:solidFill>
+                  <a:srgbClr val="202122"/>
+                </a:solidFill>
+                <a:latin typeface="Calibri"/>
+              </a:rPr>
+              <a:t>Automation, including AI</a:t>
+            </a:r>
+          </a:p>
+        </p:txBody>
+      </p:sp>
+      <p:sp>
+        <p:nvSpPr>
+          <p:cNvPr id="10" name="Rounded Rectangle 9"/>
           <p:cNvSpPr/>
           <p:nvPr/>
         </p:nvSpPr>
         <p:spPr>
           <a:xfrm>
-            <a:off x="7772400" y="1600200"/>
-            <a:ext cx="3867912" cy="4434840"/>
+            <a:off x="6278727" y="1600200"/>
+            <a:ext cx="5364327" cy="640080"/>
           </a:xfrm>
           <a:prstGeom prst="roundRect">
             <a:avLst>
-              <a:gd name="adj" fmla="val 8000"/>
+              <a:gd name="adj" fmla="val 15000"/>
             </a:avLst>
           </a:prstGeom>
           <a:solidFill>
-            <a:srgbClr val="03306E"/>
+            <a:srgbClr val="0645AD"/>
           </a:solidFill>
           <a:ln>
             <a:noFill/>
@@ -5493,20 +9559,55 @@
       </p:sp>
       <p:sp>
         <p:nvSpPr>
-          <p:cNvPr id="8" name="Oval 7"/>
+          <p:cNvPr id="11" name="TextBox 10"/>
+          <p:cNvSpPr txBox="1"/>
+          <p:nvPr/>
+        </p:nvSpPr>
+        <p:spPr>
+          <a:xfrm>
+            <a:off x="6507327" y="1600200"/>
+            <a:ext cx="4907127" cy="640080"/>
+          </a:xfrm>
+          <a:prstGeom prst="rect">
+            <a:avLst/>
+          </a:prstGeom>
+          <a:noFill/>
+        </p:spPr>
+        <p:txBody>
+          <a:bodyPr wrap="square" anchor="ctr" lIns="0" rIns="0" tIns="0" bIns="0"/>
+          <a:lstStyle/>
+          <a:p>
+            <a:pPr algn="l"/>
+            <a:r>
+              <a:rPr sz="2000" b="1" i="0">
+                <a:solidFill>
+                  <a:srgbClr val="FFFFFF"/>
+                </a:solidFill>
+                <a:latin typeface="Calibri"/>
+              </a:rPr>
+              <a:t>On society</a:t>
+            </a:r>
+          </a:p>
+        </p:txBody>
+      </p:sp>
+      <p:sp>
+        <p:nvSpPr>
+          <p:cNvPr id="12" name="Rounded Rectangle 11"/>
           <p:cNvSpPr/>
           <p:nvPr/>
         </p:nvSpPr>
         <p:spPr>
           <a:xfrm>
-            <a:off x="8046720" y="1874519"/>
-            <a:ext cx="548640" cy="548640"/>
-          </a:xfrm>
-          <a:prstGeom prst="ellipse">
-            <a:avLst/>
+            <a:off x="6278727" y="2377440"/>
+            <a:ext cx="5364327" cy="3794760"/>
+          </a:xfrm>
+          <a:prstGeom prst="roundRect">
+            <a:avLst>
+              <a:gd name="adj" fmla="val 4000"/>
+            </a:avLst>
           </a:prstGeom>
           <a:solidFill>
-            <a:srgbClr val="F2B705"/>
+            <a:srgbClr val="EAF3FF"/>
           </a:solidFill>
           <a:ln>
             <a:noFill/>
@@ -5528,84 +9629,135 @@
           </a:fontRef>
         </p:style>
         <p:txBody>
-          <a:bodyPr rtlCol="0" anchor="ctr" lIns="0" rIns="0" tIns="0" bIns="0"/>
-          <a:lstStyle/>
-          <a:p>
-            <a:pPr algn="ctr"/>
-            <a:r>
-              <a:rPr sz="2000" b="1">
+          <a:bodyPr rtlCol="0" anchor="ctr"/>
+          <a:lstStyle/>
+          <a:p/>
+        </p:txBody>
+      </p:sp>
+      <p:sp>
+        <p:nvSpPr>
+          <p:cNvPr id="13" name="TextBox 12"/>
+          <p:cNvSpPr txBox="1"/>
+          <p:nvPr/>
+        </p:nvSpPr>
+        <p:spPr>
+          <a:xfrm>
+            <a:off x="6553047" y="2606040"/>
+            <a:ext cx="4815687" cy="3337560"/>
+          </a:xfrm>
+          <a:prstGeom prst="rect">
+            <a:avLst/>
+          </a:prstGeom>
+          <a:noFill/>
+        </p:spPr>
+        <p:txBody>
+          <a:bodyPr wrap="square" lIns="0" rIns="0" tIns="0" bIns="0">
+            <a:spAutoFit/>
+          </a:bodyPr>
+          <a:lstStyle/>
+          <a:p>
+            <a:pPr marL="274320" indent="-274320">
+              <a:spcAft>
+                <a:spcPts val="945"/>
+              </a:spcAft>
+              <a:buClr>
+                <a:srgbClr val="0645AD"/>
+              </a:buClr>
+              <a:buFont typeface="Arial"/>
+              <a:buChar char="•"/>
+            </a:pPr>
+            <a:r>
+              <a:rPr sz="2100" b="0">
                 <a:solidFill>
                   <a:srgbClr val="202122"/>
                 </a:solidFill>
                 <a:latin typeface="Calibri"/>
               </a:rPr>
-              <a:t>!</a:t>
-            </a:r>
-          </a:p>
-        </p:txBody>
-      </p:sp>
-      <p:sp>
-        <p:nvSpPr>
-          <p:cNvPr id="9" name="TextBox 8"/>
-          <p:cNvSpPr txBox="1"/>
-          <p:nvPr/>
-        </p:nvSpPr>
-        <p:spPr>
-          <a:xfrm>
-            <a:off x="8046720" y="2606040"/>
-            <a:ext cx="3291840" cy="365760"/>
-          </a:xfrm>
-          <a:prstGeom prst="rect">
-            <a:avLst/>
-          </a:prstGeom>
-          <a:noFill/>
-        </p:spPr>
-        <p:txBody>
-          <a:bodyPr wrap="square" anchor="t" lIns="0" rIns="0" tIns="0" bIns="0"/>
-          <a:lstStyle/>
-          <a:p>
-            <a:pPr algn="l"/>
-            <a:r>
-              <a:rPr sz="1300" b="1" i="0">
-                <a:solidFill>
-                  <a:srgbClr val="A9C8F0"/>
-                </a:solidFill>
-                <a:latin typeface="Calibri"/>
-              </a:rPr>
-              <a:t>KEY IDEA</a:t>
-            </a:r>
-          </a:p>
-        </p:txBody>
-      </p:sp>
-      <p:sp>
-        <p:nvSpPr>
-          <p:cNvPr id="10" name="TextBox 9"/>
-          <p:cNvSpPr txBox="1"/>
-          <p:nvPr/>
-        </p:nvSpPr>
-        <p:spPr>
-          <a:xfrm>
-            <a:off x="8046720" y="3017520"/>
-            <a:ext cx="3291840" cy="2926080"/>
-          </a:xfrm>
-          <a:prstGeom prst="rect">
-            <a:avLst/>
-          </a:prstGeom>
-          <a:noFill/>
-        </p:spPr>
-        <p:txBody>
-          <a:bodyPr wrap="square" anchor="t" lIns="0" rIns="0" tIns="0" bIns="0"/>
-          <a:lstStyle/>
-          <a:p>
-            <a:pPr algn="l"/>
-            <a:r>
-              <a:rPr sz="2200" b="0" i="0">
-                <a:solidFill>
-                  <a:srgbClr val="FFFFFF"/>
-                </a:solidFill>
-                <a:latin typeface="Cambria"/>
-              </a:rPr>
-              <a:t>Biased training data produces biased software. Developers are responsible for checking it.</a:t>
+              <a:t>Job losses and changing skills</a:t>
+            </a:r>
+          </a:p>
+          <a:p>
+            <a:pPr marL="274320" indent="-274320">
+              <a:spcAft>
+                <a:spcPts val="945"/>
+              </a:spcAft>
+              <a:buClr>
+                <a:srgbClr val="0645AD"/>
+              </a:buClr>
+              <a:buFont typeface="Arial"/>
+              <a:buChar char="•"/>
+            </a:pPr>
+            <a:r>
+              <a:rPr sz="2100" b="0">
+                <a:solidFill>
+                  <a:srgbClr val="202122"/>
+                </a:solidFill>
+                <a:latin typeface="Calibri"/>
+              </a:rPr>
+              <a:t>Less human decision-making</a:t>
+            </a:r>
+          </a:p>
+          <a:p>
+            <a:pPr marL="274320" indent="-274320">
+              <a:spcAft>
+                <a:spcPts val="945"/>
+              </a:spcAft>
+              <a:buClr>
+                <a:srgbClr val="0645AD"/>
+              </a:buClr>
+              <a:buFont typeface="Arial"/>
+              <a:buChar char="•"/>
+            </a:pPr>
+            <a:r>
+              <a:rPr sz="2100" b="0">
+                <a:solidFill>
+                  <a:srgbClr val="202122"/>
+                </a:solidFill>
+                <a:latin typeface="Calibri"/>
+              </a:rPr>
+              <a:t>Privacy, digital footprint and surveillance</a:t>
+            </a:r>
+          </a:p>
+          <a:p>
+            <a:pPr marL="274320" indent="-274320">
+              <a:spcAft>
+                <a:spcPts val="945"/>
+              </a:spcAft>
+              <a:buClr>
+                <a:srgbClr val="0645AD"/>
+              </a:buClr>
+              <a:buFont typeface="Arial"/>
+              <a:buChar char="•"/>
+            </a:pPr>
+            <a:r>
+              <a:rPr sz="2100" b="0">
+                <a:solidFill>
+                  <a:srgbClr val="202122"/>
+                </a:solidFill>
+                <a:latin typeface="Calibri"/>
+              </a:rPr>
+              <a:t>Isolation for some, better access for others</a:t>
+            </a:r>
+          </a:p>
+          <a:p>
+            <a:pPr marL="274320" indent="-274320">
+              <a:spcAft>
+                <a:spcPts val="945"/>
+              </a:spcAft>
+              <a:buClr>
+                <a:srgbClr val="0645AD"/>
+              </a:buClr>
+              <a:buFont typeface="Arial"/>
+              <a:buChar char="•"/>
+            </a:pPr>
+            <a:r>
+              <a:rPr sz="2100" b="0">
+                <a:solidFill>
+                  <a:srgbClr val="202122"/>
+                </a:solidFill>
+                <a:latin typeface="Calibri"/>
+              </a:rPr>
+              <a:t>Generative AI and globalisation</a:t>
             </a:r>
           </a:p>
         </p:txBody>
@@ -5697,7 +9849,7 @@
                 </a:solidFill>
                 <a:latin typeface="Cambria"/>
               </a:rPr>
-              <a:t>Emerging technologies</a:t>
+              <a:t>Quick check: Impact of digital technologies</a:t>
             </a:r>
           </a:p>
         </p:txBody>
@@ -5770,58 +9922,14 @@
       </p:sp>
       <p:sp>
         <p:nvSpPr>
-          <p:cNvPr id="6" name="Rounded Rectangle 5"/>
+          <p:cNvPr id="6" name="Oval 5"/>
           <p:cNvSpPr/>
           <p:nvPr/>
         </p:nvSpPr>
         <p:spPr>
           <a:xfrm>
-            <a:off x="548640" y="1600200"/>
-            <a:ext cx="3515258" cy="2148840"/>
-          </a:xfrm>
-          <a:prstGeom prst="roundRect">
-            <a:avLst>
-              <a:gd name="adj" fmla="val 6000"/>
-            </a:avLst>
-          </a:prstGeom>
-          <a:solidFill>
-            <a:srgbClr val="EAF3FF"/>
-          </a:solidFill>
-          <a:ln>
-            <a:noFill/>
-          </a:ln>
-          <a:effectLst/>
-        </p:spPr>
-        <p:style>
-          <a:lnRef idx="1">
-            <a:schemeClr val="accent1"/>
-          </a:lnRef>
-          <a:fillRef idx="3">
-            <a:schemeClr val="accent1"/>
-          </a:fillRef>
-          <a:effectRef idx="2">
-            <a:schemeClr val="accent1"/>
-          </a:effectRef>
-          <a:fontRef idx="minor">
-            <a:schemeClr val="lt1"/>
-          </a:fontRef>
-        </p:style>
-        <p:txBody>
-          <a:bodyPr rtlCol="0" anchor="ctr"/>
-          <a:lstStyle/>
-          <a:p/>
-        </p:txBody>
-      </p:sp>
-      <p:sp>
-        <p:nvSpPr>
-          <p:cNvPr id="7" name="Oval 6"/>
-          <p:cNvSpPr/>
-          <p:nvPr/>
-        </p:nvSpPr>
-        <p:spPr>
-          <a:xfrm>
-            <a:off x="777240" y="1828800"/>
-            <a:ext cx="457200" cy="457200"/>
+            <a:off x="548640" y="1691640"/>
+            <a:ext cx="502920" cy="502920"/>
           </a:xfrm>
           <a:prstGeom prst="ellipse">
             <a:avLst/>
@@ -5854,7 +9962,7 @@
           <a:p>
             <a:pPr algn="ctr"/>
             <a:r>
-              <a:rPr sz="1500" b="1">
+              <a:rPr sz="1600" b="1">
                 <a:solidFill>
                   <a:srgbClr val="202122"/>
                 </a:solidFill>
@@ -5867,124 +9975,47 @@
       </p:sp>
       <p:sp>
         <p:nvSpPr>
-          <p:cNvPr id="8" name="TextBox 7"/>
-          <p:cNvSpPr txBox="1"/>
-          <p:nvPr/>
-        </p:nvSpPr>
-        <p:spPr>
-          <a:xfrm>
-            <a:off x="1371600" y="1801368"/>
-            <a:ext cx="2509418" cy="512064"/>
-          </a:xfrm>
-          <a:prstGeom prst="rect">
-            <a:avLst/>
-          </a:prstGeom>
-          <a:noFill/>
-        </p:spPr>
-        <p:txBody>
-          <a:bodyPr wrap="square" anchor="ctr" lIns="0" rIns="0" tIns="0" bIns="0"/>
+          <p:cNvPr id="7" name="TextBox 6"/>
+          <p:cNvSpPr txBox="1"/>
+          <p:nvPr/>
+        </p:nvSpPr>
+        <p:spPr>
+          <a:xfrm>
+            <a:off x="1371600" y="1645920"/>
+            <a:ext cx="10271455" cy="1188720"/>
+          </a:xfrm>
+          <a:prstGeom prst="rect">
+            <a:avLst/>
+          </a:prstGeom>
+          <a:noFill/>
+        </p:spPr>
+        <p:txBody>
+          <a:bodyPr wrap="square" anchor="t" lIns="0" rIns="0" tIns="0" bIns="0"/>
           <a:lstStyle/>
           <a:p>
             <a:pPr algn="l"/>
             <a:r>
-              <a:rPr sz="1600" b="1" i="0">
-                <a:solidFill>
-                  <a:srgbClr val="03306E"/>
-                </a:solidFill>
-                <a:latin typeface="Calibri"/>
-              </a:rPr>
-              <a:t>Processing and storage</a:t>
-            </a:r>
-          </a:p>
-        </p:txBody>
-      </p:sp>
-      <p:sp>
-        <p:nvSpPr>
-          <p:cNvPr id="9" name="TextBox 8"/>
-          <p:cNvSpPr txBox="1"/>
-          <p:nvPr/>
-        </p:nvSpPr>
-        <p:spPr>
-          <a:xfrm>
-            <a:off x="777240" y="2468880"/>
-            <a:ext cx="3058058" cy="1143000"/>
-          </a:xfrm>
-          <a:prstGeom prst="rect">
-            <a:avLst/>
-          </a:prstGeom>
-          <a:noFill/>
-        </p:spPr>
-        <p:txBody>
-          <a:bodyPr wrap="square" anchor="t" lIns="0" rIns="0" tIns="0" bIns="0"/>
-          <a:lstStyle/>
-          <a:p>
-            <a:pPr algn="l"/>
-            <a:r>
-              <a:rPr sz="2000" b="0" i="0">
+              <a:rPr sz="2400" b="0" i="0">
                 <a:solidFill>
                   <a:srgbClr val="202122"/>
                 </a:solidFill>
                 <a:latin typeface="Calibri"/>
               </a:rPr>
-              <a:t>Quantum computing and growing storage demand.</a:t>
-            </a:r>
-          </a:p>
-        </p:txBody>
-      </p:sp>
-      <p:sp>
-        <p:nvSpPr>
-          <p:cNvPr id="10" name="Rounded Rectangle 9"/>
+              <a:t>Give two impacts of technology on organisations.</a:t>
+            </a:r>
+          </a:p>
+        </p:txBody>
+      </p:sp>
+      <p:sp>
+        <p:nvSpPr>
+          <p:cNvPr id="8" name="Oval 7"/>
           <p:cNvSpPr/>
           <p:nvPr/>
         </p:nvSpPr>
         <p:spPr>
           <a:xfrm>
-            <a:off x="4338218" y="1600200"/>
-            <a:ext cx="3515258" cy="2148840"/>
-          </a:xfrm>
-          <a:prstGeom prst="roundRect">
-            <a:avLst>
-              <a:gd name="adj" fmla="val 6000"/>
-            </a:avLst>
-          </a:prstGeom>
-          <a:solidFill>
-            <a:srgbClr val="EAF3FF"/>
-          </a:solidFill>
-          <a:ln>
-            <a:noFill/>
-          </a:ln>
-          <a:effectLst/>
-        </p:spPr>
-        <p:style>
-          <a:lnRef idx="1">
-            <a:schemeClr val="accent1"/>
-          </a:lnRef>
-          <a:fillRef idx="3">
-            <a:schemeClr val="accent1"/>
-          </a:fillRef>
-          <a:effectRef idx="2">
-            <a:schemeClr val="accent1"/>
-          </a:effectRef>
-          <a:fontRef idx="minor">
-            <a:schemeClr val="lt1"/>
-          </a:fontRef>
-        </p:style>
-        <p:txBody>
-          <a:bodyPr rtlCol="0" anchor="ctr"/>
-          <a:lstStyle/>
-          <a:p/>
-        </p:txBody>
-      </p:sp>
-      <p:sp>
-        <p:nvSpPr>
-          <p:cNvPr id="11" name="Oval 10"/>
-          <p:cNvSpPr/>
-          <p:nvPr/>
-        </p:nvSpPr>
-        <p:spPr>
-          <a:xfrm>
-            <a:off x="4566818" y="1828800"/>
-            <a:ext cx="457200" cy="457200"/>
+            <a:off x="548640" y="3108960"/>
+            <a:ext cx="502920" cy="502920"/>
           </a:xfrm>
           <a:prstGeom prst="ellipse">
             <a:avLst/>
@@ -6017,7 +10048,7 @@
           <a:p>
             <a:pPr algn="ctr"/>
             <a:r>
-              <a:rPr sz="1500" b="1">
+              <a:rPr sz="1600" b="1">
                 <a:solidFill>
                   <a:srgbClr val="202122"/>
                 </a:solidFill>
@@ -6030,124 +10061,47 @@
       </p:sp>
       <p:sp>
         <p:nvSpPr>
-          <p:cNvPr id="12" name="TextBox 11"/>
-          <p:cNvSpPr txBox="1"/>
-          <p:nvPr/>
-        </p:nvSpPr>
-        <p:spPr>
-          <a:xfrm>
-            <a:off x="5161178" y="1801368"/>
-            <a:ext cx="2509418" cy="512064"/>
-          </a:xfrm>
-          <a:prstGeom prst="rect">
-            <a:avLst/>
-          </a:prstGeom>
-          <a:noFill/>
-        </p:spPr>
-        <p:txBody>
-          <a:bodyPr wrap="square" anchor="ctr" lIns="0" rIns="0" tIns="0" bIns="0"/>
+          <p:cNvPr id="9" name="TextBox 8"/>
+          <p:cNvSpPr txBox="1"/>
+          <p:nvPr/>
+        </p:nvSpPr>
+        <p:spPr>
+          <a:xfrm>
+            <a:off x="1371600" y="3063240"/>
+            <a:ext cx="10271455" cy="1188720"/>
+          </a:xfrm>
+          <a:prstGeom prst="rect">
+            <a:avLst/>
+          </a:prstGeom>
+          <a:noFill/>
+        </p:spPr>
+        <p:txBody>
+          <a:bodyPr wrap="square" anchor="t" lIns="0" rIns="0" tIns="0" bIns="0"/>
           <a:lstStyle/>
           <a:p>
             <a:pPr algn="l"/>
             <a:r>
-              <a:rPr sz="1900" b="1" i="0">
-                <a:solidFill>
-                  <a:srgbClr val="03306E"/>
-                </a:solidFill>
-                <a:latin typeface="Calibri"/>
-              </a:rPr>
-              <a:t>IoT</a:t>
-            </a:r>
-          </a:p>
-        </p:txBody>
-      </p:sp>
-      <p:sp>
-        <p:nvSpPr>
-          <p:cNvPr id="13" name="TextBox 12"/>
-          <p:cNvSpPr txBox="1"/>
-          <p:nvPr/>
-        </p:nvSpPr>
-        <p:spPr>
-          <a:xfrm>
-            <a:off x="4566818" y="2468880"/>
-            <a:ext cx="3058058" cy="1143000"/>
-          </a:xfrm>
-          <a:prstGeom prst="rect">
-            <a:avLst/>
-          </a:prstGeom>
-          <a:noFill/>
-        </p:spPr>
-        <p:txBody>
-          <a:bodyPr wrap="square" anchor="t" lIns="0" rIns="0" tIns="0" bIns="0"/>
-          <a:lstStyle/>
-          <a:p>
-            <a:pPr algn="l"/>
-            <a:r>
-              <a:rPr sz="2000" b="0" i="0">
+              <a:rPr sz="2400" b="0" i="0">
                 <a:solidFill>
                   <a:srgbClr val="202122"/>
                 </a:solidFill>
                 <a:latin typeface="Calibri"/>
               </a:rPr>
-              <a:t>Edge computing in industry, smart cities and homes.</a:t>
-            </a:r>
-          </a:p>
-        </p:txBody>
-      </p:sp>
-      <p:sp>
-        <p:nvSpPr>
-          <p:cNvPr id="14" name="Rounded Rectangle 13"/>
+              <a:t>Give one negative impact on society.</a:t>
+            </a:r>
+          </a:p>
+        </p:txBody>
+      </p:sp>
+      <p:sp>
+        <p:nvSpPr>
+          <p:cNvPr id="10" name="Oval 9"/>
           <p:cNvSpPr/>
           <p:nvPr/>
         </p:nvSpPr>
         <p:spPr>
           <a:xfrm>
-            <a:off x="8127796" y="1600200"/>
-            <a:ext cx="3515258" cy="2148840"/>
-          </a:xfrm>
-          <a:prstGeom prst="roundRect">
-            <a:avLst>
-              <a:gd name="adj" fmla="val 6000"/>
-            </a:avLst>
-          </a:prstGeom>
-          <a:solidFill>
-            <a:srgbClr val="EAF3FF"/>
-          </a:solidFill>
-          <a:ln>
-            <a:noFill/>
-          </a:ln>
-          <a:effectLst/>
-        </p:spPr>
-        <p:style>
-          <a:lnRef idx="1">
-            <a:schemeClr val="accent1"/>
-          </a:lnRef>
-          <a:fillRef idx="3">
-            <a:schemeClr val="accent1"/>
-          </a:fillRef>
-          <a:effectRef idx="2">
-            <a:schemeClr val="accent1"/>
-          </a:effectRef>
-          <a:fontRef idx="minor">
-            <a:schemeClr val="lt1"/>
-          </a:fontRef>
-        </p:style>
-        <p:txBody>
-          <a:bodyPr rtlCol="0" anchor="ctr"/>
-          <a:lstStyle/>
-          <a:p/>
-        </p:txBody>
-      </p:sp>
-      <p:sp>
-        <p:nvSpPr>
-          <p:cNvPr id="15" name="Oval 14"/>
-          <p:cNvSpPr/>
-          <p:nvPr/>
-        </p:nvSpPr>
-        <p:spPr>
-          <a:xfrm>
-            <a:off x="8356396" y="1828800"/>
-            <a:ext cx="457200" cy="457200"/>
+            <a:off x="548640" y="4526280"/>
+            <a:ext cx="502920" cy="502920"/>
           </a:xfrm>
           <a:prstGeom prst="ellipse">
             <a:avLst/>
@@ -6180,7 +10134,7 @@
           <a:p>
             <a:pPr algn="ctr"/>
             <a:r>
-              <a:rPr sz="1500" b="1">
+              <a:rPr sz="1600" b="1">
                 <a:solidFill>
                   <a:srgbClr val="202122"/>
                 </a:solidFill>
@@ -6193,47 +10147,47 @@
       </p:sp>
       <p:sp>
         <p:nvSpPr>
-          <p:cNvPr id="16" name="TextBox 15"/>
-          <p:cNvSpPr txBox="1"/>
-          <p:nvPr/>
-        </p:nvSpPr>
-        <p:spPr>
-          <a:xfrm>
-            <a:off x="8950756" y="1801368"/>
-            <a:ext cx="2509418" cy="512064"/>
-          </a:xfrm>
-          <a:prstGeom prst="rect">
-            <a:avLst/>
-          </a:prstGeom>
-          <a:noFill/>
-        </p:spPr>
-        <p:txBody>
-          <a:bodyPr wrap="square" anchor="ctr" lIns="0" rIns="0" tIns="0" bIns="0"/>
+          <p:cNvPr id="11" name="TextBox 10"/>
+          <p:cNvSpPr txBox="1"/>
+          <p:nvPr/>
+        </p:nvSpPr>
+        <p:spPr>
+          <a:xfrm>
+            <a:off x="1371600" y="4480560"/>
+            <a:ext cx="10271455" cy="1188720"/>
+          </a:xfrm>
+          <a:prstGeom prst="rect">
+            <a:avLst/>
+          </a:prstGeom>
+          <a:noFill/>
+        </p:spPr>
+        <p:txBody>
+          <a:bodyPr wrap="square" anchor="t" lIns="0" rIns="0" tIns="0" bIns="0"/>
           <a:lstStyle/>
           <a:p>
             <a:pPr algn="l"/>
             <a:r>
-              <a:rPr sz="1900" b="1" i="0">
-                <a:solidFill>
-                  <a:srgbClr val="03306E"/>
-                </a:solidFill>
-                <a:latin typeface="Calibri"/>
-              </a:rPr>
-              <a:t>AI</a:t>
-            </a:r>
-          </a:p>
-        </p:txBody>
-      </p:sp>
-      <p:sp>
-        <p:nvSpPr>
-          <p:cNvPr id="17" name="TextBox 16"/>
-          <p:cNvSpPr txBox="1"/>
-          <p:nvPr/>
-        </p:nvSpPr>
-        <p:spPr>
-          <a:xfrm>
-            <a:off x="8356396" y="2468880"/>
-            <a:ext cx="3058058" cy="1143000"/>
+              <a:rPr sz="2400" b="0" i="0">
+                <a:solidFill>
+                  <a:srgbClr val="202122"/>
+                </a:solidFill>
+                <a:latin typeface="Calibri"/>
+              </a:rPr>
+              <a:t>How is AI changing developers' work?</a:t>
+            </a:r>
+          </a:p>
+        </p:txBody>
+      </p:sp>
+      <p:sp>
+        <p:nvSpPr>
+          <p:cNvPr id="12" name="TextBox 11"/>
+          <p:cNvSpPr txBox="1"/>
+          <p:nvPr/>
+        </p:nvSpPr>
+        <p:spPr>
+          <a:xfrm>
+            <a:off x="548640" y="5852160"/>
+            <a:ext cx="11094415" cy="365760"/>
           </a:xfrm>
           <a:prstGeom prst="rect">
             <a:avLst/>
@@ -6246,502 +10200,13 @@
           <a:p>
             <a:pPr algn="l"/>
             <a:r>
-              <a:rPr sz="2000" b="0" i="0">
-                <a:solidFill>
-                  <a:srgbClr val="202122"/>
-                </a:solidFill>
-                <a:latin typeface="Calibri"/>
-              </a:rPr>
-              <a:t>Generative AI and machine learning.</a:t>
-            </a:r>
-          </a:p>
-        </p:txBody>
-      </p:sp>
-      <p:sp>
-        <p:nvSpPr>
-          <p:cNvPr id="18" name="Rounded Rectangle 17"/>
-          <p:cNvSpPr/>
-          <p:nvPr/>
-        </p:nvSpPr>
-        <p:spPr>
-          <a:xfrm>
-            <a:off x="548640" y="4023360"/>
-            <a:ext cx="3515258" cy="2148840"/>
-          </a:xfrm>
-          <a:prstGeom prst="roundRect">
-            <a:avLst>
-              <a:gd name="adj" fmla="val 6000"/>
-            </a:avLst>
-          </a:prstGeom>
-          <a:solidFill>
-            <a:srgbClr val="EAF3FF"/>
-          </a:solidFill>
-          <a:ln>
-            <a:noFill/>
-          </a:ln>
-          <a:effectLst/>
-        </p:spPr>
-        <p:style>
-          <a:lnRef idx="1">
-            <a:schemeClr val="accent1"/>
-          </a:lnRef>
-          <a:fillRef idx="3">
-            <a:schemeClr val="accent1"/>
-          </a:fillRef>
-          <a:effectRef idx="2">
-            <a:schemeClr val="accent1"/>
-          </a:effectRef>
-          <a:fontRef idx="minor">
-            <a:schemeClr val="lt1"/>
-          </a:fontRef>
-        </p:style>
-        <p:txBody>
-          <a:bodyPr rtlCol="0" anchor="ctr"/>
-          <a:lstStyle/>
-          <a:p/>
-        </p:txBody>
-      </p:sp>
-      <p:sp>
-        <p:nvSpPr>
-          <p:cNvPr id="19" name="Oval 18"/>
-          <p:cNvSpPr/>
-          <p:nvPr/>
-        </p:nvSpPr>
-        <p:spPr>
-          <a:xfrm>
-            <a:off x="777240" y="4251960"/>
-            <a:ext cx="457200" cy="457200"/>
-          </a:xfrm>
-          <a:prstGeom prst="ellipse">
-            <a:avLst/>
-          </a:prstGeom>
-          <a:solidFill>
-            <a:srgbClr val="F2B705"/>
-          </a:solidFill>
-          <a:ln>
-            <a:noFill/>
-          </a:ln>
-          <a:effectLst/>
-        </p:spPr>
-        <p:style>
-          <a:lnRef idx="1">
-            <a:schemeClr val="accent1"/>
-          </a:lnRef>
-          <a:fillRef idx="3">
-            <a:schemeClr val="accent1"/>
-          </a:fillRef>
-          <a:effectRef idx="2">
-            <a:schemeClr val="accent1"/>
-          </a:effectRef>
-          <a:fontRef idx="minor">
-            <a:schemeClr val="lt1"/>
-          </a:fontRef>
-        </p:style>
-        <p:txBody>
-          <a:bodyPr rtlCol="0" anchor="ctr" lIns="0" rIns="0" tIns="0" bIns="0"/>
-          <a:lstStyle/>
-          <a:p>
-            <a:pPr algn="ctr"/>
-            <a:r>
-              <a:rPr sz="1500" b="1">
-                <a:solidFill>
-                  <a:srgbClr val="202122"/>
-                </a:solidFill>
-                <a:latin typeface="Calibri"/>
-              </a:rPr>
-              <a:t>4</a:t>
-            </a:r>
-          </a:p>
-        </p:txBody>
-      </p:sp>
-      <p:sp>
-        <p:nvSpPr>
-          <p:cNvPr id="20" name="TextBox 19"/>
-          <p:cNvSpPr txBox="1"/>
-          <p:nvPr/>
-        </p:nvSpPr>
-        <p:spPr>
-          <a:xfrm>
-            <a:off x="1371600" y="4224528"/>
-            <a:ext cx="2509418" cy="512064"/>
-          </a:xfrm>
-          <a:prstGeom prst="rect">
-            <a:avLst/>
-          </a:prstGeom>
-          <a:noFill/>
-        </p:spPr>
-        <p:txBody>
-          <a:bodyPr wrap="square" anchor="ctr" lIns="0" rIns="0" tIns="0" bIns="0"/>
-          <a:lstStyle/>
-          <a:p>
-            <a:pPr algn="l"/>
-            <a:r>
-              <a:rPr sz="1900" b="1" i="0">
-                <a:solidFill>
-                  <a:srgbClr val="03306E"/>
-                </a:solidFill>
-                <a:latin typeface="Calibri"/>
-              </a:rPr>
-              <a:t>Extended reality</a:t>
-            </a:r>
-          </a:p>
-        </p:txBody>
-      </p:sp>
-      <p:sp>
-        <p:nvSpPr>
-          <p:cNvPr id="21" name="TextBox 20"/>
-          <p:cNvSpPr txBox="1"/>
-          <p:nvPr/>
-        </p:nvSpPr>
-        <p:spPr>
-          <a:xfrm>
-            <a:off x="777240" y="4892040"/>
-            <a:ext cx="3058058" cy="1143000"/>
-          </a:xfrm>
-          <a:prstGeom prst="rect">
-            <a:avLst/>
-          </a:prstGeom>
-          <a:noFill/>
-        </p:spPr>
-        <p:txBody>
-          <a:bodyPr wrap="square" anchor="t" lIns="0" rIns="0" tIns="0" bIns="0"/>
-          <a:lstStyle/>
-          <a:p>
-            <a:pPr algn="l"/>
-            <a:r>
-              <a:rPr sz="2000" b="0" i="0">
-                <a:solidFill>
-                  <a:srgbClr val="202122"/>
-                </a:solidFill>
-                <a:latin typeface="Calibri"/>
-              </a:rPr>
-              <a:t>Augmented and virtual reality.</a:t>
-            </a:r>
-          </a:p>
-        </p:txBody>
-      </p:sp>
-      <p:sp>
-        <p:nvSpPr>
-          <p:cNvPr id="22" name="Rounded Rectangle 21"/>
-          <p:cNvSpPr/>
-          <p:nvPr/>
-        </p:nvSpPr>
-        <p:spPr>
-          <a:xfrm>
-            <a:off x="4338218" y="4023360"/>
-            <a:ext cx="3515258" cy="2148840"/>
-          </a:xfrm>
-          <a:prstGeom prst="roundRect">
-            <a:avLst>
-              <a:gd name="adj" fmla="val 6000"/>
-            </a:avLst>
-          </a:prstGeom>
-          <a:solidFill>
-            <a:srgbClr val="EAF3FF"/>
-          </a:solidFill>
-          <a:ln>
-            <a:noFill/>
-          </a:ln>
-          <a:effectLst/>
-        </p:spPr>
-        <p:style>
-          <a:lnRef idx="1">
-            <a:schemeClr val="accent1"/>
-          </a:lnRef>
-          <a:fillRef idx="3">
-            <a:schemeClr val="accent1"/>
-          </a:fillRef>
-          <a:effectRef idx="2">
-            <a:schemeClr val="accent1"/>
-          </a:effectRef>
-          <a:fontRef idx="minor">
-            <a:schemeClr val="lt1"/>
-          </a:fontRef>
-        </p:style>
-        <p:txBody>
-          <a:bodyPr rtlCol="0" anchor="ctr"/>
-          <a:lstStyle/>
-          <a:p/>
-        </p:txBody>
-      </p:sp>
-      <p:sp>
-        <p:nvSpPr>
-          <p:cNvPr id="23" name="Oval 22"/>
-          <p:cNvSpPr/>
-          <p:nvPr/>
-        </p:nvSpPr>
-        <p:spPr>
-          <a:xfrm>
-            <a:off x="4566818" y="4251960"/>
-            <a:ext cx="457200" cy="457200"/>
-          </a:xfrm>
-          <a:prstGeom prst="ellipse">
-            <a:avLst/>
-          </a:prstGeom>
-          <a:solidFill>
-            <a:srgbClr val="F2B705"/>
-          </a:solidFill>
-          <a:ln>
-            <a:noFill/>
-          </a:ln>
-          <a:effectLst/>
-        </p:spPr>
-        <p:style>
-          <a:lnRef idx="1">
-            <a:schemeClr val="accent1"/>
-          </a:lnRef>
-          <a:fillRef idx="3">
-            <a:schemeClr val="accent1"/>
-          </a:fillRef>
-          <a:effectRef idx="2">
-            <a:schemeClr val="accent1"/>
-          </a:effectRef>
-          <a:fontRef idx="minor">
-            <a:schemeClr val="lt1"/>
-          </a:fontRef>
-        </p:style>
-        <p:txBody>
-          <a:bodyPr rtlCol="0" anchor="ctr" lIns="0" rIns="0" tIns="0" bIns="0"/>
-          <a:lstStyle/>
-          <a:p>
-            <a:pPr algn="ctr"/>
-            <a:r>
-              <a:rPr sz="1500" b="1">
-                <a:solidFill>
-                  <a:srgbClr val="202122"/>
-                </a:solidFill>
-                <a:latin typeface="Calibri"/>
-              </a:rPr>
-              <a:t>5</a:t>
-            </a:r>
-          </a:p>
-        </p:txBody>
-      </p:sp>
-      <p:sp>
-        <p:nvSpPr>
-          <p:cNvPr id="24" name="TextBox 23"/>
-          <p:cNvSpPr txBox="1"/>
-          <p:nvPr/>
-        </p:nvSpPr>
-        <p:spPr>
-          <a:xfrm>
-            <a:off x="5161178" y="4224528"/>
-            <a:ext cx="2509418" cy="512064"/>
-          </a:xfrm>
-          <a:prstGeom prst="rect">
-            <a:avLst/>
-          </a:prstGeom>
-          <a:noFill/>
-        </p:spPr>
-        <p:txBody>
-          <a:bodyPr wrap="square" anchor="ctr" lIns="0" rIns="0" tIns="0" bIns="0"/>
-          <a:lstStyle/>
-          <a:p>
-            <a:pPr algn="l"/>
-            <a:r>
-              <a:rPr sz="1600" b="1" i="0">
-                <a:solidFill>
-                  <a:srgbClr val="03306E"/>
-                </a:solidFill>
-                <a:latin typeface="Calibri"/>
-              </a:rPr>
-              <a:t>Open source and blockchain</a:t>
-            </a:r>
-          </a:p>
-        </p:txBody>
-      </p:sp>
-      <p:sp>
-        <p:nvSpPr>
-          <p:cNvPr id="25" name="TextBox 24"/>
-          <p:cNvSpPr txBox="1"/>
-          <p:nvPr/>
-        </p:nvSpPr>
-        <p:spPr>
-          <a:xfrm>
-            <a:off x="4566818" y="4892040"/>
-            <a:ext cx="3058058" cy="1143000"/>
-          </a:xfrm>
-          <a:prstGeom prst="rect">
-            <a:avLst/>
-          </a:prstGeom>
-          <a:noFill/>
-        </p:spPr>
-        <p:txBody>
-          <a:bodyPr wrap="square" anchor="t" lIns="0" rIns="0" tIns="0" bIns="0"/>
-          <a:lstStyle/>
-          <a:p>
-            <a:pPr algn="l"/>
-            <a:r>
-              <a:rPr sz="2000" b="0" i="0">
-                <a:solidFill>
-                  <a:srgbClr val="202122"/>
-                </a:solidFill>
-                <a:latin typeface="Calibri"/>
-              </a:rPr>
-              <a:t>Shared code and tamper-resistant ledgers.</a:t>
-            </a:r>
-          </a:p>
-        </p:txBody>
-      </p:sp>
-      <p:sp>
-        <p:nvSpPr>
-          <p:cNvPr id="26" name="Rounded Rectangle 25"/>
-          <p:cNvSpPr/>
-          <p:nvPr/>
-        </p:nvSpPr>
-        <p:spPr>
-          <a:xfrm>
-            <a:off x="8127796" y="4023360"/>
-            <a:ext cx="3515258" cy="2148840"/>
-          </a:xfrm>
-          <a:prstGeom prst="roundRect">
-            <a:avLst>
-              <a:gd name="adj" fmla="val 6000"/>
-            </a:avLst>
-          </a:prstGeom>
-          <a:solidFill>
-            <a:srgbClr val="EAF3FF"/>
-          </a:solidFill>
-          <a:ln>
-            <a:noFill/>
-          </a:ln>
-          <a:effectLst/>
-        </p:spPr>
-        <p:style>
-          <a:lnRef idx="1">
-            <a:schemeClr val="accent1"/>
-          </a:lnRef>
-          <a:fillRef idx="3">
-            <a:schemeClr val="accent1"/>
-          </a:fillRef>
-          <a:effectRef idx="2">
-            <a:schemeClr val="accent1"/>
-          </a:effectRef>
-          <a:fontRef idx="minor">
-            <a:schemeClr val="lt1"/>
-          </a:fontRef>
-        </p:style>
-        <p:txBody>
-          <a:bodyPr rtlCol="0" anchor="ctr"/>
-          <a:lstStyle/>
-          <a:p/>
-        </p:txBody>
-      </p:sp>
-      <p:sp>
-        <p:nvSpPr>
-          <p:cNvPr id="27" name="Oval 26"/>
-          <p:cNvSpPr/>
-          <p:nvPr/>
-        </p:nvSpPr>
-        <p:spPr>
-          <a:xfrm>
-            <a:off x="8356396" y="4251960"/>
-            <a:ext cx="457200" cy="457200"/>
-          </a:xfrm>
-          <a:prstGeom prst="ellipse">
-            <a:avLst/>
-          </a:prstGeom>
-          <a:solidFill>
-            <a:srgbClr val="F2B705"/>
-          </a:solidFill>
-          <a:ln>
-            <a:noFill/>
-          </a:ln>
-          <a:effectLst/>
-        </p:spPr>
-        <p:style>
-          <a:lnRef idx="1">
-            <a:schemeClr val="accent1"/>
-          </a:lnRef>
-          <a:fillRef idx="3">
-            <a:schemeClr val="accent1"/>
-          </a:fillRef>
-          <a:effectRef idx="2">
-            <a:schemeClr val="accent1"/>
-          </a:effectRef>
-          <a:fontRef idx="minor">
-            <a:schemeClr val="lt1"/>
-          </a:fontRef>
-        </p:style>
-        <p:txBody>
-          <a:bodyPr rtlCol="0" anchor="ctr" lIns="0" rIns="0" tIns="0" bIns="0"/>
-          <a:lstStyle/>
-          <a:p>
-            <a:pPr algn="ctr"/>
-            <a:r>
-              <a:rPr sz="1500" b="1">
-                <a:solidFill>
-                  <a:srgbClr val="202122"/>
-                </a:solidFill>
-                <a:latin typeface="Calibri"/>
-              </a:rPr>
-              <a:t>6</a:t>
-            </a:r>
-          </a:p>
-        </p:txBody>
-      </p:sp>
-      <p:sp>
-        <p:nvSpPr>
-          <p:cNvPr id="28" name="TextBox 27"/>
-          <p:cNvSpPr txBox="1"/>
-          <p:nvPr/>
-        </p:nvSpPr>
-        <p:spPr>
-          <a:xfrm>
-            <a:off x="8950756" y="4224528"/>
-            <a:ext cx="2509418" cy="512064"/>
-          </a:xfrm>
-          <a:prstGeom prst="rect">
-            <a:avLst/>
-          </a:prstGeom>
-          <a:noFill/>
-        </p:spPr>
-        <p:txBody>
-          <a:bodyPr wrap="square" anchor="ctr" lIns="0" rIns="0" tIns="0" bIns="0"/>
-          <a:lstStyle/>
-          <a:p>
-            <a:pPr algn="l"/>
-            <a:r>
-              <a:rPr sz="1900" b="1" i="0">
-                <a:solidFill>
-                  <a:srgbClr val="03306E"/>
-                </a:solidFill>
-                <a:latin typeface="Calibri"/>
-              </a:rPr>
-              <a:t>Autonomous machines</a:t>
-            </a:r>
-          </a:p>
-        </p:txBody>
-      </p:sp>
-      <p:sp>
-        <p:nvSpPr>
-          <p:cNvPr id="29" name="TextBox 28"/>
-          <p:cNvSpPr txBox="1"/>
-          <p:nvPr/>
-        </p:nvSpPr>
-        <p:spPr>
-          <a:xfrm>
-            <a:off x="8356396" y="4892040"/>
-            <a:ext cx="3058058" cy="1143000"/>
-          </a:xfrm>
-          <a:prstGeom prst="rect">
-            <a:avLst/>
-          </a:prstGeom>
-          <a:noFill/>
-        </p:spPr>
-        <p:txBody>
-          <a:bodyPr wrap="square" anchor="t" lIns="0" rIns="0" tIns="0" bIns="0"/>
-          <a:lstStyle/>
-          <a:p>
-            <a:pPr algn="l"/>
-            <a:r>
-              <a:rPr sz="1800" b="0" i="0">
-                <a:solidFill>
-                  <a:srgbClr val="202122"/>
-                </a:solidFill>
-                <a:latin typeface="Calibri"/>
-              </a:rPr>
-              <a:t>Self-driving cars, robotic assembly. Plus environmental costs: rare metals, energy, disposal.</a:t>
+              <a:rPr sz="1300" b="0" i="1">
+                <a:solidFill>
+                  <a:srgbClr val="54595D"/>
+                </a:solidFill>
+                <a:latin typeface="Calibri"/>
+              </a:rPr>
+              <a:t>Answer on mini whiteboards or in your book. Answers are in the speaker notes.</a:t>
             </a:r>
           </a:p>
         </p:txBody>
@@ -6833,7 +10298,7 @@
                 </a:solidFill>
                 <a:latin typeface="Cambria"/>
               </a:rPr>
-              <a:t>Check your understanding</a:t>
+              <a:t>Digital inclusion</a:t>
             </a:r>
           </a:p>
         </p:txBody>
@@ -6906,14 +10371,145 @@
       </p:sp>
       <p:sp>
         <p:nvSpPr>
-          <p:cNvPr id="6" name="Oval 5"/>
+          <p:cNvPr id="6" name="TextBox 5"/>
+          <p:cNvSpPr txBox="1"/>
+          <p:nvPr/>
+        </p:nvSpPr>
+        <p:spPr>
+          <a:xfrm>
+            <a:off x="548640" y="1554480"/>
+            <a:ext cx="6720840" cy="4617720"/>
+          </a:xfrm>
+          <a:prstGeom prst="rect">
+            <a:avLst/>
+          </a:prstGeom>
+          <a:noFill/>
+        </p:spPr>
+        <p:txBody>
+          <a:bodyPr wrap="square" lIns="0" rIns="0" tIns="0" bIns="0">
+            <a:spAutoFit/>
+          </a:bodyPr>
+          <a:lstStyle/>
+          <a:p>
+            <a:pPr>
+              <a:spcAft>
+                <a:spcPts val="1200"/>
+              </a:spcAft>
+            </a:pPr>
+            <a:r>
+              <a:rPr sz="2000" b="0">
+                <a:solidFill>
+                  <a:srgbClr val="202122"/>
+                </a:solidFill>
+                <a:latin typeface="Calibri"/>
+              </a:rPr>
+              <a:t>Digital inclusion means everyone can use digital products fairly.</a:t>
+            </a:r>
+          </a:p>
+          <a:p>
+            <a:pPr>
+              <a:spcAft>
+                <a:spcPts val="1200"/>
+              </a:spcAft>
+            </a:pPr>
+            <a:r>
+              <a:rPr sz="2000" b="0">
+                <a:solidFill>
+                  <a:srgbClr val="202122"/>
+                </a:solidFill>
+                <a:latin typeface="Calibri"/>
+              </a:rPr>
+              <a:t>It needs suitable technology and connectivity, design that follows accessibility best practice, and, for public sector services, meeting accessibility regulations by law.</a:t>
+            </a:r>
+          </a:p>
+          <a:p>
+            <a:pPr>
+              <a:spcAft>
+                <a:spcPts val="1200"/>
+              </a:spcAft>
+            </a:pPr>
+            <a:r>
+              <a:rPr sz="2000" b="0">
+                <a:solidFill>
+                  <a:srgbClr val="202122"/>
+                </a:solidFill>
+                <a:latin typeface="Calibri"/>
+              </a:rPr>
+              <a:t>Developers must also check datasets for bias. An AI trained on data that under-represents some groups will treat those groups unfairly.</a:t>
+            </a:r>
+          </a:p>
+          <a:p>
+            <a:pPr>
+              <a:spcAft>
+                <a:spcPts val="1200"/>
+              </a:spcAft>
+            </a:pPr>
+            <a:r>
+              <a:rPr sz="2000" b="0">
+                <a:solidFill>
+                  <a:srgbClr val="202122"/>
+                </a:solidFill>
+                <a:latin typeface="Calibri"/>
+              </a:rPr>
+              <a:t>Think about users' age, digital and literacy skills, whether they're staff or the public, culture, and accessibility needs such as screen readers or limited mobility.</a:t>
+            </a:r>
+          </a:p>
+        </p:txBody>
+      </p:sp>
+      <p:sp>
+        <p:nvSpPr>
+          <p:cNvPr id="7" name="Rounded Rectangle 6"/>
           <p:cNvSpPr/>
           <p:nvPr/>
         </p:nvSpPr>
         <p:spPr>
           <a:xfrm>
-            <a:off x="548640" y="1618488"/>
-            <a:ext cx="411480" cy="411480"/>
+            <a:off x="7772400" y="1554480"/>
+            <a:ext cx="3867912" cy="4526280"/>
+          </a:xfrm>
+          <a:prstGeom prst="roundRect">
+            <a:avLst>
+              <a:gd name="adj" fmla="val 8000"/>
+            </a:avLst>
+          </a:prstGeom>
+          <a:solidFill>
+            <a:srgbClr val="03306E"/>
+          </a:solidFill>
+          <a:ln>
+            <a:noFill/>
+          </a:ln>
+          <a:effectLst/>
+        </p:spPr>
+        <p:style>
+          <a:lnRef idx="1">
+            <a:schemeClr val="accent1"/>
+          </a:lnRef>
+          <a:fillRef idx="3">
+            <a:schemeClr val="accent1"/>
+          </a:fillRef>
+          <a:effectRef idx="2">
+            <a:schemeClr val="accent1"/>
+          </a:effectRef>
+          <a:fontRef idx="minor">
+            <a:schemeClr val="lt1"/>
+          </a:fontRef>
+        </p:style>
+        <p:txBody>
+          <a:bodyPr rtlCol="0" anchor="ctr"/>
+          <a:lstStyle/>
+          <a:p/>
+        </p:txBody>
+      </p:sp>
+      <p:sp>
+        <p:nvSpPr>
+          <p:cNvPr id="8" name="Oval 7"/>
+          <p:cNvSpPr/>
+          <p:nvPr/>
+        </p:nvSpPr>
+        <p:spPr>
+          <a:xfrm>
+            <a:off x="8046720" y="1828800"/>
+            <a:ext cx="548640" cy="548640"/>
           </a:xfrm>
           <a:prstGeom prst="ellipse">
             <a:avLst/>
@@ -6946,27 +10542,27 @@
           <a:p>
             <a:pPr algn="ctr"/>
             <a:r>
-              <a:rPr sz="1400" b="1">
+              <a:rPr sz="1300" b="1">
                 <a:solidFill>
                   <a:srgbClr val="202122"/>
                 </a:solidFill>
                 <a:latin typeface="Calibri"/>
               </a:rPr>
-              <a:t>1</a:t>
-            </a:r>
-          </a:p>
-        </p:txBody>
-      </p:sp>
-      <p:sp>
-        <p:nvSpPr>
-          <p:cNvPr id="7" name="TextBox 6"/>
-          <p:cNvSpPr txBox="1"/>
-          <p:nvPr/>
-        </p:nvSpPr>
-        <p:spPr>
-          <a:xfrm>
-            <a:off x="1234440" y="1600200"/>
-            <a:ext cx="10408615" cy="1030986"/>
+              <a:t>e.g.</a:t>
+            </a:r>
+          </a:p>
+        </p:txBody>
+      </p:sp>
+      <p:sp>
+        <p:nvSpPr>
+          <p:cNvPr id="9" name="TextBox 8"/>
+          <p:cNvSpPr txBox="1"/>
+          <p:nvPr/>
+        </p:nvSpPr>
+        <p:spPr>
+          <a:xfrm>
+            <a:off x="8046720" y="2560320"/>
+            <a:ext cx="3291840" cy="365760"/>
           </a:xfrm>
           <a:prstGeom prst="rect">
             <a:avLst/>
@@ -6979,80 +10575,27 @@
           <a:p>
             <a:pPr algn="l"/>
             <a:r>
-              <a:rPr sz="2200" b="0" i="0">
-                <a:solidFill>
-                  <a:srgbClr val="202122"/>
-                </a:solidFill>
-                <a:latin typeface="Calibri"/>
-              </a:rPr>
-              <a:t>Give two impacts of digital technology on society.</a:t>
-            </a:r>
-          </a:p>
-        </p:txBody>
-      </p:sp>
-      <p:sp>
-        <p:nvSpPr>
-          <p:cNvPr id="8" name="Oval 7"/>
-          <p:cNvSpPr/>
-          <p:nvPr/>
-        </p:nvSpPr>
-        <p:spPr>
-          <a:xfrm>
-            <a:off x="548640" y="2814066"/>
-            <a:ext cx="411480" cy="411480"/>
-          </a:xfrm>
-          <a:prstGeom prst="ellipse">
-            <a:avLst/>
-          </a:prstGeom>
-          <a:solidFill>
-            <a:srgbClr val="F2B705"/>
-          </a:solidFill>
-          <a:ln>
-            <a:noFill/>
-          </a:ln>
-          <a:effectLst/>
-        </p:spPr>
-        <p:style>
-          <a:lnRef idx="1">
-            <a:schemeClr val="accent1"/>
-          </a:lnRef>
-          <a:fillRef idx="3">
-            <a:schemeClr val="accent1"/>
-          </a:fillRef>
-          <a:effectRef idx="2">
-            <a:schemeClr val="accent1"/>
-          </a:effectRef>
-          <a:fontRef idx="minor">
-            <a:schemeClr val="lt1"/>
-          </a:fontRef>
-        </p:style>
-        <p:txBody>
-          <a:bodyPr rtlCol="0" anchor="ctr" lIns="0" rIns="0" tIns="0" bIns="0"/>
-          <a:lstStyle/>
-          <a:p>
-            <a:pPr algn="ctr"/>
-            <a:r>
-              <a:rPr sz="1400" b="1">
-                <a:solidFill>
-                  <a:srgbClr val="202122"/>
-                </a:solidFill>
-                <a:latin typeface="Calibri"/>
-              </a:rPr>
-              <a:t>2</a:t>
-            </a:r>
-          </a:p>
-        </p:txBody>
-      </p:sp>
-      <p:sp>
-        <p:nvSpPr>
-          <p:cNvPr id="9" name="TextBox 8"/>
-          <p:cNvSpPr txBox="1"/>
-          <p:nvPr/>
-        </p:nvSpPr>
-        <p:spPr>
-          <a:xfrm>
-            <a:off x="1234440" y="2795778"/>
-            <a:ext cx="10408615" cy="1030986"/>
+              <a:rPr sz="1300" b="1" i="0">
+                <a:solidFill>
+                  <a:srgbClr val="A9C8F0"/>
+                </a:solidFill>
+                <a:latin typeface="Calibri"/>
+              </a:rPr>
+              <a:t>EXAMPLE</a:t>
+            </a:r>
+          </a:p>
+        </p:txBody>
+      </p:sp>
+      <p:sp>
+        <p:nvSpPr>
+          <p:cNvPr id="10" name="TextBox 9"/>
+          <p:cNvSpPr txBox="1"/>
+          <p:nvPr/>
+        </p:nvSpPr>
+        <p:spPr>
+          <a:xfrm>
+            <a:off x="8046720" y="2971800"/>
+            <a:ext cx="3291840" cy="2971800"/>
           </a:xfrm>
           <a:prstGeom prst="rect">
             <a:avLst/>
@@ -7065,185 +10608,13 @@
           <a:p>
             <a:pPr algn="l"/>
             <a:r>
-              <a:rPr sz="2200" b="0" i="0">
-                <a:solidFill>
-                  <a:srgbClr val="202122"/>
-                </a:solidFill>
-                <a:latin typeface="Calibri"/>
-              </a:rPr>
-              <a:t>Why should developers check datasets for bias?</a:t>
-            </a:r>
-          </a:p>
-        </p:txBody>
-      </p:sp>
-      <p:sp>
-        <p:nvSpPr>
-          <p:cNvPr id="10" name="Oval 9"/>
-          <p:cNvSpPr/>
-          <p:nvPr/>
-        </p:nvSpPr>
-        <p:spPr>
-          <a:xfrm>
-            <a:off x="548640" y="4009644"/>
-            <a:ext cx="411480" cy="411480"/>
-          </a:xfrm>
-          <a:prstGeom prst="ellipse">
-            <a:avLst/>
-          </a:prstGeom>
-          <a:solidFill>
-            <a:srgbClr val="F2B705"/>
-          </a:solidFill>
-          <a:ln>
-            <a:noFill/>
-          </a:ln>
-          <a:effectLst/>
-        </p:spPr>
-        <p:style>
-          <a:lnRef idx="1">
-            <a:schemeClr val="accent1"/>
-          </a:lnRef>
-          <a:fillRef idx="3">
-            <a:schemeClr val="accent1"/>
-          </a:fillRef>
-          <a:effectRef idx="2">
-            <a:schemeClr val="accent1"/>
-          </a:effectRef>
-          <a:fontRef idx="minor">
-            <a:schemeClr val="lt1"/>
-          </a:fontRef>
-        </p:style>
-        <p:txBody>
-          <a:bodyPr rtlCol="0" anchor="ctr" lIns="0" rIns="0" tIns="0" bIns="0"/>
-          <a:lstStyle/>
-          <a:p>
-            <a:pPr algn="ctr"/>
-            <a:r>
-              <a:rPr sz="1400" b="1">
-                <a:solidFill>
-                  <a:srgbClr val="202122"/>
-                </a:solidFill>
-                <a:latin typeface="Calibri"/>
-              </a:rPr>
-              <a:t>3</a:t>
-            </a:r>
-          </a:p>
-        </p:txBody>
-      </p:sp>
-      <p:sp>
-        <p:nvSpPr>
-          <p:cNvPr id="11" name="TextBox 10"/>
-          <p:cNvSpPr txBox="1"/>
-          <p:nvPr/>
-        </p:nvSpPr>
-        <p:spPr>
-          <a:xfrm>
-            <a:off x="1234440" y="3991356"/>
-            <a:ext cx="10408615" cy="1030986"/>
-          </a:xfrm>
-          <a:prstGeom prst="rect">
-            <a:avLst/>
-          </a:prstGeom>
-          <a:noFill/>
-        </p:spPr>
-        <p:txBody>
-          <a:bodyPr wrap="square" anchor="t" lIns="0" rIns="0" tIns="0" bIns="0"/>
-          <a:lstStyle/>
-          <a:p>
-            <a:pPr algn="l"/>
-            <a:r>
-              <a:rPr sz="2200" b="0" i="0">
-                <a:solidFill>
-                  <a:srgbClr val="202122"/>
-                </a:solidFill>
-                <a:latin typeface="Calibri"/>
-              </a:rPr>
-              <a:t>What is edge computing?</a:t>
-            </a:r>
-          </a:p>
-        </p:txBody>
-      </p:sp>
-      <p:sp>
-        <p:nvSpPr>
-          <p:cNvPr id="12" name="Oval 11"/>
-          <p:cNvSpPr/>
-          <p:nvPr/>
-        </p:nvSpPr>
-        <p:spPr>
-          <a:xfrm>
-            <a:off x="548640" y="5205221"/>
-            <a:ext cx="411480" cy="411480"/>
-          </a:xfrm>
-          <a:prstGeom prst="ellipse">
-            <a:avLst/>
-          </a:prstGeom>
-          <a:solidFill>
-            <a:srgbClr val="F2B705"/>
-          </a:solidFill>
-          <a:ln>
-            <a:noFill/>
-          </a:ln>
-          <a:effectLst/>
-        </p:spPr>
-        <p:style>
-          <a:lnRef idx="1">
-            <a:schemeClr val="accent1"/>
-          </a:lnRef>
-          <a:fillRef idx="3">
-            <a:schemeClr val="accent1"/>
-          </a:fillRef>
-          <a:effectRef idx="2">
-            <a:schemeClr val="accent1"/>
-          </a:effectRef>
-          <a:fontRef idx="minor">
-            <a:schemeClr val="lt1"/>
-          </a:fontRef>
-        </p:style>
-        <p:txBody>
-          <a:bodyPr rtlCol="0" anchor="ctr" lIns="0" rIns="0" tIns="0" bIns="0"/>
-          <a:lstStyle/>
-          <a:p>
-            <a:pPr algn="ctr"/>
-            <a:r>
-              <a:rPr sz="1400" b="1">
-                <a:solidFill>
-                  <a:srgbClr val="202122"/>
-                </a:solidFill>
-                <a:latin typeface="Calibri"/>
-              </a:rPr>
-              <a:t>4</a:t>
-            </a:r>
-          </a:p>
-        </p:txBody>
-      </p:sp>
-      <p:sp>
-        <p:nvSpPr>
-          <p:cNvPr id="13" name="TextBox 12"/>
-          <p:cNvSpPr txBox="1"/>
-          <p:nvPr/>
-        </p:nvSpPr>
-        <p:spPr>
-          <a:xfrm>
-            <a:off x="1234440" y="5186933"/>
-            <a:ext cx="10408615" cy="1030986"/>
-          </a:xfrm>
-          <a:prstGeom prst="rect">
-            <a:avLst/>
-          </a:prstGeom>
-          <a:noFill/>
-        </p:spPr>
-        <p:txBody>
-          <a:bodyPr wrap="square" anchor="t" lIns="0" rIns="0" tIns="0" bIns="0"/>
-          <a:lstStyle/>
-          <a:p>
-            <a:pPr algn="l"/>
-            <a:r>
-              <a:rPr sz="2200" b="0" i="0">
-                <a:solidFill>
-                  <a:srgbClr val="202122"/>
-                </a:solidFill>
-                <a:latin typeface="Calibri"/>
-              </a:rPr>
-              <a:t>Give one environmental impact of new technology.</a:t>
+              <a:rPr sz="1900" b="0" i="0">
+                <a:solidFill>
+                  <a:srgbClr val="FFFFFF"/>
+                </a:solidFill>
+                <a:latin typeface="Cambria"/>
+              </a:rPr>
+              <a:t>A face-unlock feature trained mostly on lighter skin tones fails more often for darker-skinned users: biased data, unfair product.</a:t>
             </a:r>
           </a:p>
         </p:txBody>
@@ -7335,7 +10706,7 @@
                 </a:solidFill>
                 <a:latin typeface="Cambria"/>
               </a:rPr>
-              <a:t>Answers</a:t>
+              <a:t>Digital inclusion</a:t>
             </a:r>
           </a:p>
         </p:txBody>
@@ -7408,14 +10779,165 @@
       </p:sp>
       <p:sp>
         <p:nvSpPr>
-          <p:cNvPr id="6" name="Oval 5"/>
+          <p:cNvPr id="6" name="TextBox 5"/>
+          <p:cNvSpPr txBox="1"/>
+          <p:nvPr/>
+        </p:nvSpPr>
+        <p:spPr>
+          <a:xfrm>
+            <a:off x="548640" y="1600200"/>
+            <a:ext cx="6675120" cy="4572000"/>
+          </a:xfrm>
+          <a:prstGeom prst="rect">
+            <a:avLst/>
+          </a:prstGeom>
+          <a:noFill/>
+        </p:spPr>
+        <p:txBody>
+          <a:bodyPr wrap="square" lIns="0" rIns="0" tIns="0" bIns="0">
+            <a:spAutoFit/>
+          </a:bodyPr>
+          <a:lstStyle/>
+          <a:p>
+            <a:pPr marL="274320" indent="-274320">
+              <a:spcAft>
+                <a:spcPts val="1080"/>
+              </a:spcAft>
+              <a:buClr>
+                <a:srgbClr val="0645AD"/>
+              </a:buClr>
+              <a:buFont typeface="Arial"/>
+              <a:buChar char="•"/>
+            </a:pPr>
+            <a:r>
+              <a:rPr sz="2400" b="0">
+                <a:solidFill>
+                  <a:srgbClr val="202122"/>
+                </a:solidFill>
+                <a:latin typeface="Calibri"/>
+              </a:rPr>
+              <a:t>Fair access needs suitable technology and connectivity.</a:t>
+            </a:r>
+          </a:p>
+          <a:p>
+            <a:pPr marL="274320" indent="-274320">
+              <a:spcAft>
+                <a:spcPts val="1080"/>
+              </a:spcAft>
+              <a:buClr>
+                <a:srgbClr val="0645AD"/>
+              </a:buClr>
+              <a:buFont typeface="Arial"/>
+              <a:buChar char="•"/>
+            </a:pPr>
+            <a:r>
+              <a:rPr sz="2400" b="0">
+                <a:solidFill>
+                  <a:srgbClr val="202122"/>
+                </a:solidFill>
+                <a:latin typeface="Calibri"/>
+              </a:rPr>
+              <a:t>Check datasets for bias before training or using them.</a:t>
+            </a:r>
+          </a:p>
+          <a:p>
+            <a:pPr marL="274320" indent="-274320">
+              <a:spcAft>
+                <a:spcPts val="1080"/>
+              </a:spcAft>
+              <a:buClr>
+                <a:srgbClr val="0645AD"/>
+              </a:buClr>
+              <a:buFont typeface="Arial"/>
+              <a:buChar char="•"/>
+            </a:pPr>
+            <a:r>
+              <a:rPr sz="2400" b="0">
+                <a:solidFill>
+                  <a:srgbClr val="202122"/>
+                </a:solidFill>
+                <a:latin typeface="Calibri"/>
+              </a:rPr>
+              <a:t>Follow best-practice codes and public sector accessibility regulations.</a:t>
+            </a:r>
+          </a:p>
+          <a:p>
+            <a:pPr marL="274320" indent="-274320">
+              <a:spcAft>
+                <a:spcPts val="1080"/>
+              </a:spcAft>
+              <a:buClr>
+                <a:srgbClr val="0645AD"/>
+              </a:buClr>
+              <a:buFont typeface="Arial"/>
+              <a:buChar char="•"/>
+            </a:pPr>
+            <a:r>
+              <a:rPr sz="2400" b="0">
+                <a:solidFill>
+                  <a:srgbClr val="202122"/>
+                </a:solidFill>
+                <a:latin typeface="Calibri"/>
+              </a:rPr>
+              <a:t>Consider users' age, digital and literacy skills, culture and accessibility needs.</a:t>
+            </a:r>
+          </a:p>
+        </p:txBody>
+      </p:sp>
+      <p:sp>
+        <p:nvSpPr>
+          <p:cNvPr id="7" name="Rounded Rectangle 6"/>
           <p:cNvSpPr/>
           <p:nvPr/>
         </p:nvSpPr>
         <p:spPr>
           <a:xfrm>
-            <a:off x="548640" y="1618488"/>
-            <a:ext cx="411480" cy="411480"/>
+            <a:off x="7772400" y="1600200"/>
+            <a:ext cx="3867912" cy="4434840"/>
+          </a:xfrm>
+          <a:prstGeom prst="roundRect">
+            <a:avLst>
+              <a:gd name="adj" fmla="val 8000"/>
+            </a:avLst>
+          </a:prstGeom>
+          <a:solidFill>
+            <a:srgbClr val="03306E"/>
+          </a:solidFill>
+          <a:ln>
+            <a:noFill/>
+          </a:ln>
+          <a:effectLst/>
+        </p:spPr>
+        <p:style>
+          <a:lnRef idx="1">
+            <a:schemeClr val="accent1"/>
+          </a:lnRef>
+          <a:fillRef idx="3">
+            <a:schemeClr val="accent1"/>
+          </a:fillRef>
+          <a:effectRef idx="2">
+            <a:schemeClr val="accent1"/>
+          </a:effectRef>
+          <a:fontRef idx="minor">
+            <a:schemeClr val="lt1"/>
+          </a:fontRef>
+        </p:style>
+        <p:txBody>
+          <a:bodyPr rtlCol="0" anchor="ctr"/>
+          <a:lstStyle/>
+          <a:p/>
+        </p:txBody>
+      </p:sp>
+      <p:sp>
+        <p:nvSpPr>
+          <p:cNvPr id="8" name="Oval 7"/>
+          <p:cNvSpPr/>
+          <p:nvPr/>
+        </p:nvSpPr>
+        <p:spPr>
+          <a:xfrm>
+            <a:off x="8046720" y="1874519"/>
+            <a:ext cx="548640" cy="548640"/>
           </a:xfrm>
           <a:prstGeom prst="ellipse">
             <a:avLst/>
@@ -7448,27 +10970,27 @@
           <a:p>
             <a:pPr algn="ctr"/>
             <a:r>
-              <a:rPr sz="1400" b="1">
+              <a:rPr sz="2000" b="1">
                 <a:solidFill>
                   <a:srgbClr val="202122"/>
                 </a:solidFill>
                 <a:latin typeface="Calibri"/>
               </a:rPr>
-              <a:t>1</a:t>
-            </a:r>
-          </a:p>
-        </p:txBody>
-      </p:sp>
-      <p:sp>
-        <p:nvSpPr>
-          <p:cNvPr id="7" name="TextBox 6"/>
-          <p:cNvSpPr txBox="1"/>
-          <p:nvPr/>
-        </p:nvSpPr>
-        <p:spPr>
-          <a:xfrm>
-            <a:off x="1234440" y="1600200"/>
-            <a:ext cx="10408615" cy="1030986"/>
+              <a:t>!</a:t>
+            </a:r>
+          </a:p>
+        </p:txBody>
+      </p:sp>
+      <p:sp>
+        <p:nvSpPr>
+          <p:cNvPr id="9" name="TextBox 8"/>
+          <p:cNvSpPr txBox="1"/>
+          <p:nvPr/>
+        </p:nvSpPr>
+        <p:spPr>
+          <a:xfrm>
+            <a:off x="8046720" y="2606040"/>
+            <a:ext cx="3291840" cy="365760"/>
           </a:xfrm>
           <a:prstGeom prst="rect">
             <a:avLst/>
@@ -7481,91 +11003,27 @@
           <a:p>
             <a:pPr algn="l"/>
             <a:r>
-              <a:rPr sz="1800" b="0" i="0">
-                <a:solidFill>
-                  <a:srgbClr val="54595D"/>
-                </a:solidFill>
-                <a:latin typeface="Calibri"/>
-              </a:rPr>
-              <a:t>Give two impacts of digital technology on society.</a:t>
-            </a:r>
-          </a:p>
-          <a:p>
-            <a:r>
-              <a:rPr sz="1800" b="1">
-                <a:solidFill>
-                  <a:srgbClr val="03306E"/>
-                </a:solidFill>
-                <a:latin typeface="Calibri"/>
-              </a:rPr>
-              <a:t>Any two, e.g. job losses, privacy concerns, better access to information.</a:t>
-            </a:r>
-          </a:p>
-        </p:txBody>
-      </p:sp>
-      <p:sp>
-        <p:nvSpPr>
-          <p:cNvPr id="8" name="Oval 7"/>
-          <p:cNvSpPr/>
-          <p:nvPr/>
-        </p:nvSpPr>
-        <p:spPr>
-          <a:xfrm>
-            <a:off x="548640" y="2814066"/>
-            <a:ext cx="411480" cy="411480"/>
-          </a:xfrm>
-          <a:prstGeom prst="ellipse">
-            <a:avLst/>
-          </a:prstGeom>
-          <a:solidFill>
-            <a:srgbClr val="F2B705"/>
-          </a:solidFill>
-          <a:ln>
-            <a:noFill/>
-          </a:ln>
-          <a:effectLst/>
-        </p:spPr>
-        <p:style>
-          <a:lnRef idx="1">
-            <a:schemeClr val="accent1"/>
-          </a:lnRef>
-          <a:fillRef idx="3">
-            <a:schemeClr val="accent1"/>
-          </a:fillRef>
-          <a:effectRef idx="2">
-            <a:schemeClr val="accent1"/>
-          </a:effectRef>
-          <a:fontRef idx="minor">
-            <a:schemeClr val="lt1"/>
-          </a:fontRef>
-        </p:style>
-        <p:txBody>
-          <a:bodyPr rtlCol="0" anchor="ctr" lIns="0" rIns="0" tIns="0" bIns="0"/>
-          <a:lstStyle/>
-          <a:p>
-            <a:pPr algn="ctr"/>
-            <a:r>
-              <a:rPr sz="1400" b="1">
-                <a:solidFill>
-                  <a:srgbClr val="202122"/>
-                </a:solidFill>
-                <a:latin typeface="Calibri"/>
-              </a:rPr>
-              <a:t>2</a:t>
-            </a:r>
-          </a:p>
-        </p:txBody>
-      </p:sp>
-      <p:sp>
-        <p:nvSpPr>
-          <p:cNvPr id="9" name="TextBox 8"/>
-          <p:cNvSpPr txBox="1"/>
-          <p:nvPr/>
-        </p:nvSpPr>
-        <p:spPr>
-          <a:xfrm>
-            <a:off x="1234440" y="2795778"/>
-            <a:ext cx="10408615" cy="1030986"/>
+              <a:rPr sz="1300" b="1" i="0">
+                <a:solidFill>
+                  <a:srgbClr val="A9C8F0"/>
+                </a:solidFill>
+                <a:latin typeface="Calibri"/>
+              </a:rPr>
+              <a:t>KEY IDEA</a:t>
+            </a:r>
+          </a:p>
+        </p:txBody>
+      </p:sp>
+      <p:sp>
+        <p:nvSpPr>
+          <p:cNvPr id="10" name="TextBox 9"/>
+          <p:cNvSpPr txBox="1"/>
+          <p:nvPr/>
+        </p:nvSpPr>
+        <p:spPr>
+          <a:xfrm>
+            <a:off x="8046720" y="3017520"/>
+            <a:ext cx="3291840" cy="2926080"/>
           </a:xfrm>
           <a:prstGeom prst="rect">
             <a:avLst/>
@@ -7578,218 +11036,13 @@
           <a:p>
             <a:pPr algn="l"/>
             <a:r>
-              <a:rPr sz="1800" b="0" i="0">
-                <a:solidFill>
-                  <a:srgbClr val="54595D"/>
-                </a:solidFill>
-                <a:latin typeface="Calibri"/>
-              </a:rPr>
-              <a:t>Why should developers check datasets for bias?</a:t>
-            </a:r>
-          </a:p>
-          <a:p>
-            <a:r>
-              <a:rPr sz="1800" b="1">
-                <a:solidFill>
-                  <a:srgbClr val="03306E"/>
-                </a:solidFill>
-                <a:latin typeface="Calibri"/>
-              </a:rPr>
-              <a:t>Biased data leads to unfair or inaccurate software.</a:t>
-            </a:r>
-          </a:p>
-        </p:txBody>
-      </p:sp>
-      <p:sp>
-        <p:nvSpPr>
-          <p:cNvPr id="10" name="Oval 9"/>
-          <p:cNvSpPr/>
-          <p:nvPr/>
-        </p:nvSpPr>
-        <p:spPr>
-          <a:xfrm>
-            <a:off x="548640" y="4009644"/>
-            <a:ext cx="411480" cy="411480"/>
-          </a:xfrm>
-          <a:prstGeom prst="ellipse">
-            <a:avLst/>
-          </a:prstGeom>
-          <a:solidFill>
-            <a:srgbClr val="F2B705"/>
-          </a:solidFill>
-          <a:ln>
-            <a:noFill/>
-          </a:ln>
-          <a:effectLst/>
-        </p:spPr>
-        <p:style>
-          <a:lnRef idx="1">
-            <a:schemeClr val="accent1"/>
-          </a:lnRef>
-          <a:fillRef idx="3">
-            <a:schemeClr val="accent1"/>
-          </a:fillRef>
-          <a:effectRef idx="2">
-            <a:schemeClr val="accent1"/>
-          </a:effectRef>
-          <a:fontRef idx="minor">
-            <a:schemeClr val="lt1"/>
-          </a:fontRef>
-        </p:style>
-        <p:txBody>
-          <a:bodyPr rtlCol="0" anchor="ctr" lIns="0" rIns="0" tIns="0" bIns="0"/>
-          <a:lstStyle/>
-          <a:p>
-            <a:pPr algn="ctr"/>
-            <a:r>
-              <a:rPr sz="1400" b="1">
-                <a:solidFill>
-                  <a:srgbClr val="202122"/>
-                </a:solidFill>
-                <a:latin typeface="Calibri"/>
-              </a:rPr>
-              <a:t>3</a:t>
-            </a:r>
-          </a:p>
-        </p:txBody>
-      </p:sp>
-      <p:sp>
-        <p:nvSpPr>
-          <p:cNvPr id="11" name="TextBox 10"/>
-          <p:cNvSpPr txBox="1"/>
-          <p:nvPr/>
-        </p:nvSpPr>
-        <p:spPr>
-          <a:xfrm>
-            <a:off x="1234440" y="3991356"/>
-            <a:ext cx="10408615" cy="1030986"/>
-          </a:xfrm>
-          <a:prstGeom prst="rect">
-            <a:avLst/>
-          </a:prstGeom>
-          <a:noFill/>
-        </p:spPr>
-        <p:txBody>
-          <a:bodyPr wrap="square" anchor="t" lIns="0" rIns="0" tIns="0" bIns="0"/>
-          <a:lstStyle/>
-          <a:p>
-            <a:pPr algn="l"/>
-            <a:r>
-              <a:rPr sz="1800" b="0" i="0">
-                <a:solidFill>
-                  <a:srgbClr val="54595D"/>
-                </a:solidFill>
-                <a:latin typeface="Calibri"/>
-              </a:rPr>
-              <a:t>What is edge computing?</a:t>
-            </a:r>
-          </a:p>
-          <a:p>
-            <a:r>
-              <a:rPr sz="1800" b="1">
-                <a:solidFill>
-                  <a:srgbClr val="03306E"/>
-                </a:solidFill>
-                <a:latin typeface="Calibri"/>
-              </a:rPr>
-              <a:t>Processing data near where it is collected rather than centrally.</a:t>
-            </a:r>
-          </a:p>
-        </p:txBody>
-      </p:sp>
-      <p:sp>
-        <p:nvSpPr>
-          <p:cNvPr id="12" name="Oval 11"/>
-          <p:cNvSpPr/>
-          <p:nvPr/>
-        </p:nvSpPr>
-        <p:spPr>
-          <a:xfrm>
-            <a:off x="548640" y="5205221"/>
-            <a:ext cx="411480" cy="411480"/>
-          </a:xfrm>
-          <a:prstGeom prst="ellipse">
-            <a:avLst/>
-          </a:prstGeom>
-          <a:solidFill>
-            <a:srgbClr val="F2B705"/>
-          </a:solidFill>
-          <a:ln>
-            <a:noFill/>
-          </a:ln>
-          <a:effectLst/>
-        </p:spPr>
-        <p:style>
-          <a:lnRef idx="1">
-            <a:schemeClr val="accent1"/>
-          </a:lnRef>
-          <a:fillRef idx="3">
-            <a:schemeClr val="accent1"/>
-          </a:fillRef>
-          <a:effectRef idx="2">
-            <a:schemeClr val="accent1"/>
-          </a:effectRef>
-          <a:fontRef idx="minor">
-            <a:schemeClr val="lt1"/>
-          </a:fontRef>
-        </p:style>
-        <p:txBody>
-          <a:bodyPr rtlCol="0" anchor="ctr" lIns="0" rIns="0" tIns="0" bIns="0"/>
-          <a:lstStyle/>
-          <a:p>
-            <a:pPr algn="ctr"/>
-            <a:r>
-              <a:rPr sz="1400" b="1">
-                <a:solidFill>
-                  <a:srgbClr val="202122"/>
-                </a:solidFill>
-                <a:latin typeface="Calibri"/>
-              </a:rPr>
-              <a:t>4</a:t>
-            </a:r>
-          </a:p>
-        </p:txBody>
-      </p:sp>
-      <p:sp>
-        <p:nvSpPr>
-          <p:cNvPr id="13" name="TextBox 12"/>
-          <p:cNvSpPr txBox="1"/>
-          <p:nvPr/>
-        </p:nvSpPr>
-        <p:spPr>
-          <a:xfrm>
-            <a:off x="1234440" y="5186933"/>
-            <a:ext cx="10408615" cy="1030986"/>
-          </a:xfrm>
-          <a:prstGeom prst="rect">
-            <a:avLst/>
-          </a:prstGeom>
-          <a:noFill/>
-        </p:spPr>
-        <p:txBody>
-          <a:bodyPr wrap="square" anchor="t" lIns="0" rIns="0" tIns="0" bIns="0"/>
-          <a:lstStyle/>
-          <a:p>
-            <a:pPr algn="l"/>
-            <a:r>
-              <a:rPr sz="1800" b="0" i="0">
-                <a:solidFill>
-                  <a:srgbClr val="54595D"/>
-                </a:solidFill>
-                <a:latin typeface="Calibri"/>
-              </a:rPr>
-              <a:t>Give one environmental impact of new technology.</a:t>
-            </a:r>
-          </a:p>
-          <a:p>
-            <a:r>
-              <a:rPr sz="1800" b="1">
-                <a:solidFill>
-                  <a:srgbClr val="03306E"/>
-                </a:solidFill>
-                <a:latin typeface="Calibri"/>
-              </a:rPr>
-              <a:t>Rare metal use, energy use or disposal.</a:t>
+              <a:rPr sz="2200" b="0" i="0">
+                <a:solidFill>
+                  <a:srgbClr val="FFFFFF"/>
+                </a:solidFill>
+                <a:latin typeface="Cambria"/>
+              </a:rPr>
+              <a:t>Biased training data produces biased software. Developers are responsible for checking it.</a:t>
             </a:r>
           </a:p>
         </p:txBody>
@@ -7881,7 +11134,7 @@
                 </a:solidFill>
                 <a:latin typeface="Cambria"/>
               </a:rPr>
-              <a:t>Activity: Ethics review</a:t>
+              <a:t>Quick check: Digital inclusion</a:t>
             </a:r>
           </a:p>
         </p:txBody>
@@ -7954,19 +11207,17 @@
       </p:sp>
       <p:sp>
         <p:nvSpPr>
-          <p:cNvPr id="6" name="Rounded Rectangle 5"/>
+          <p:cNvPr id="6" name="Oval 5"/>
           <p:cNvSpPr/>
           <p:nvPr/>
         </p:nvSpPr>
         <p:spPr>
           <a:xfrm>
-            <a:off x="548640" y="1508760"/>
-            <a:ext cx="2011680" cy="457200"/>
-          </a:xfrm>
-          <a:prstGeom prst="roundRect">
-            <a:avLst>
-              <a:gd name="adj" fmla="val 50000"/>
-            </a:avLst>
+            <a:off x="548640" y="1691640"/>
+            <a:ext cx="502920" cy="502920"/>
+          </a:xfrm>
+          <a:prstGeom prst="ellipse">
+            <a:avLst/>
           </a:prstGeom>
           <a:solidFill>
             <a:srgbClr val="F2B705"/>
@@ -7991,9 +11242,20 @@
           </a:fontRef>
         </p:style>
         <p:txBody>
-          <a:bodyPr rtlCol="0" anchor="ctr"/>
-          <a:lstStyle/>
-          <a:p/>
+          <a:bodyPr rtlCol="0" anchor="ctr" lIns="0" rIns="0" tIns="0" bIns="0"/>
+          <a:lstStyle/>
+          <a:p>
+            <a:pPr algn="ctr"/>
+            <a:r>
+              <a:rPr sz="1600" b="1">
+                <a:solidFill>
+                  <a:srgbClr val="202122"/>
+                </a:solidFill>
+                <a:latin typeface="Calibri"/>
+              </a:rPr>
+              <a:t>1</a:t>
+            </a:r>
+          </a:p>
         </p:txBody>
       </p:sp>
       <p:sp>
@@ -8004,80 +11266,47 @@
         </p:nvSpPr>
         <p:spPr>
           <a:xfrm>
-            <a:off x="548640" y="1508760"/>
-            <a:ext cx="2011680" cy="457200"/>
-          </a:xfrm>
-          <a:prstGeom prst="rect">
-            <a:avLst/>
-          </a:prstGeom>
-          <a:noFill/>
-        </p:spPr>
-        <p:txBody>
-          <a:bodyPr wrap="square" anchor="ctr" lIns="0" rIns="0" tIns="0" bIns="0"/>
-          <a:lstStyle/>
-          <a:p>
-            <a:pPr algn="ctr"/>
-            <a:r>
-              <a:rPr sz="1400" b="1" i="0">
+            <a:off x="1371600" y="1645920"/>
+            <a:ext cx="10271455" cy="1188720"/>
+          </a:xfrm>
+          <a:prstGeom prst="rect">
+            <a:avLst/>
+          </a:prstGeom>
+          <a:noFill/>
+        </p:spPr>
+        <p:txBody>
+          <a:bodyPr wrap="square" anchor="t" lIns="0" rIns="0" tIns="0" bIns="0"/>
+          <a:lstStyle/>
+          <a:p>
+            <a:pPr algn="l"/>
+            <a:r>
+              <a:rPr sz="2400" b="0" i="0">
                 <a:solidFill>
                   <a:srgbClr val="202122"/>
                 </a:solidFill>
                 <a:latin typeface="Calibri"/>
               </a:rPr>
-              <a:t>25 minutes</a:t>
-            </a:r>
-          </a:p>
-        </p:txBody>
-      </p:sp>
-      <p:sp>
-        <p:nvSpPr>
-          <p:cNvPr id="8" name="TextBox 7"/>
-          <p:cNvSpPr txBox="1"/>
-          <p:nvPr/>
-        </p:nvSpPr>
-        <p:spPr>
-          <a:xfrm>
-            <a:off x="2743200" y="1508760"/>
-            <a:ext cx="4754880" cy="457200"/>
-          </a:xfrm>
-          <a:prstGeom prst="rect">
-            <a:avLst/>
-          </a:prstGeom>
-          <a:noFill/>
-        </p:spPr>
-        <p:txBody>
-          <a:bodyPr wrap="square" anchor="ctr" lIns="0" rIns="0" tIns="0" bIns="0"/>
-          <a:lstStyle/>
-          <a:p>
-            <a:pPr algn="l"/>
-            <a:r>
-              <a:rPr sz="1400" b="0" i="1">
-                <a:solidFill>
-                  <a:srgbClr val="54595D"/>
-                </a:solidFill>
-                <a:latin typeface="Calibri"/>
-              </a:rPr>
-              <a:t>Small groups</a:t>
-            </a:r>
-          </a:p>
-        </p:txBody>
-      </p:sp>
-      <p:sp>
-        <p:nvSpPr>
-          <p:cNvPr id="9" name="Oval 8"/>
+              <a:t>What is digital inclusion?</a:t>
+            </a:r>
+          </a:p>
+        </p:txBody>
+      </p:sp>
+      <p:sp>
+        <p:nvSpPr>
+          <p:cNvPr id="8" name="Oval 7"/>
           <p:cNvSpPr/>
           <p:nvPr/>
         </p:nvSpPr>
         <p:spPr>
           <a:xfrm>
-            <a:off x="548640" y="2482596"/>
-            <a:ext cx="384048" cy="384048"/>
+            <a:off x="548640" y="3108960"/>
+            <a:ext cx="502920" cy="502920"/>
           </a:xfrm>
           <a:prstGeom prst="ellipse">
             <a:avLst/>
           </a:prstGeom>
           <a:solidFill>
-            <a:srgbClr val="0645AD"/>
+            <a:srgbClr val="F2B705"/>
           </a:solidFill>
           <a:ln>
             <a:noFill/>
@@ -8104,66 +11333,66 @@
           <a:p>
             <a:pPr algn="ctr"/>
             <a:r>
-              <a:rPr sz="1300" b="1">
-                <a:solidFill>
-                  <a:srgbClr val="FFFFFF"/>
-                </a:solidFill>
-                <a:latin typeface="Calibri"/>
-              </a:rPr>
-              <a:t>1</a:t>
-            </a:r>
-          </a:p>
-        </p:txBody>
-      </p:sp>
-      <p:sp>
-        <p:nvSpPr>
-          <p:cNvPr id="10" name="TextBox 9"/>
-          <p:cNvSpPr txBox="1"/>
-          <p:nvPr/>
-        </p:nvSpPr>
-        <p:spPr>
-          <a:xfrm>
-            <a:off x="1143000" y="2240280"/>
-            <a:ext cx="5943600" cy="868680"/>
-          </a:xfrm>
-          <a:prstGeom prst="rect">
-            <a:avLst/>
-          </a:prstGeom>
-          <a:noFill/>
-        </p:spPr>
-        <p:txBody>
-          <a:bodyPr wrap="square" anchor="ctr" lIns="0" rIns="0" tIns="0" bIns="0"/>
+              <a:rPr sz="1600" b="1">
+                <a:solidFill>
+                  <a:srgbClr val="202122"/>
+                </a:solidFill>
+                <a:latin typeface="Calibri"/>
+              </a:rPr>
+              <a:t>2</a:t>
+            </a:r>
+          </a:p>
+        </p:txBody>
+      </p:sp>
+      <p:sp>
+        <p:nvSpPr>
+          <p:cNvPr id="9" name="TextBox 8"/>
+          <p:cNvSpPr txBox="1"/>
+          <p:nvPr/>
+        </p:nvSpPr>
+        <p:spPr>
+          <a:xfrm>
+            <a:off x="1371600" y="3063240"/>
+            <a:ext cx="10271455" cy="1188720"/>
+          </a:xfrm>
+          <a:prstGeom prst="rect">
+            <a:avLst/>
+          </a:prstGeom>
+          <a:noFill/>
+        </p:spPr>
+        <p:txBody>
+          <a:bodyPr wrap="square" anchor="t" lIns="0" rIns="0" tIns="0" bIns="0"/>
           <a:lstStyle/>
           <a:p>
             <a:pPr algn="l"/>
             <a:r>
-              <a:rPr sz="1700" b="0" i="0">
+              <a:rPr sz="2400" b="0" i="0">
                 <a:solidFill>
                   <a:srgbClr val="202122"/>
                 </a:solidFill>
                 <a:latin typeface="Calibri"/>
               </a:rPr>
-              <a:t>Your group is building an AI tool to shortlist job applicants.</a:t>
-            </a:r>
-          </a:p>
-        </p:txBody>
-      </p:sp>
-      <p:sp>
-        <p:nvSpPr>
-          <p:cNvPr id="11" name="Oval 10"/>
+              <a:t>Why check datasets for bias?</a:t>
+            </a:r>
+          </a:p>
+        </p:txBody>
+      </p:sp>
+      <p:sp>
+        <p:nvSpPr>
+          <p:cNvPr id="10" name="Oval 9"/>
           <p:cNvSpPr/>
           <p:nvPr/>
         </p:nvSpPr>
         <p:spPr>
           <a:xfrm>
-            <a:off x="548640" y="3461004"/>
-            <a:ext cx="384048" cy="384048"/>
+            <a:off x="548640" y="4526280"/>
+            <a:ext cx="502920" cy="502920"/>
           </a:xfrm>
           <a:prstGeom prst="ellipse">
             <a:avLst/>
           </a:prstGeom>
           <a:solidFill>
-            <a:srgbClr val="0645AD"/>
+            <a:srgbClr val="F2B705"/>
           </a:solidFill>
           <a:ln>
             <a:noFill/>
@@ -8190,13 +11419,46 @@
           <a:p>
             <a:pPr algn="ctr"/>
             <a:r>
-              <a:rPr sz="1300" b="1">
-                <a:solidFill>
-                  <a:srgbClr val="FFFFFF"/>
-                </a:solidFill>
-                <a:latin typeface="Calibri"/>
-              </a:rPr>
-              <a:t>2</a:t>
+              <a:rPr sz="1600" b="1">
+                <a:solidFill>
+                  <a:srgbClr val="202122"/>
+                </a:solidFill>
+                <a:latin typeface="Calibri"/>
+              </a:rPr>
+              <a:t>3</a:t>
+            </a:r>
+          </a:p>
+        </p:txBody>
+      </p:sp>
+      <p:sp>
+        <p:nvSpPr>
+          <p:cNvPr id="11" name="TextBox 10"/>
+          <p:cNvSpPr txBox="1"/>
+          <p:nvPr/>
+        </p:nvSpPr>
+        <p:spPr>
+          <a:xfrm>
+            <a:off x="1371600" y="4480560"/>
+            <a:ext cx="10271455" cy="1188720"/>
+          </a:xfrm>
+          <a:prstGeom prst="rect">
+            <a:avLst/>
+          </a:prstGeom>
+          <a:noFill/>
+        </p:spPr>
+        <p:txBody>
+          <a:bodyPr wrap="square" anchor="t" lIns="0" rIns="0" tIns="0" bIns="0"/>
+          <a:lstStyle/>
+          <a:p>
+            <a:pPr algn="l"/>
+            <a:r>
+              <a:rPr sz="2400" b="0" i="0">
+                <a:solidFill>
+                  <a:srgbClr val="202122"/>
+                </a:solidFill>
+                <a:latin typeface="Calibri"/>
+              </a:rPr>
+              <a:t>Name two user characteristics that affect inclusion.</a:t>
             </a:r>
           </a:p>
         </p:txBody>
@@ -8209,362 +11471,27 @@
         </p:nvSpPr>
         <p:spPr>
           <a:xfrm>
-            <a:off x="1143000" y="3218688"/>
-            <a:ext cx="5943600" cy="868680"/>
-          </a:xfrm>
-          <a:prstGeom prst="rect">
-            <a:avLst/>
-          </a:prstGeom>
-          <a:noFill/>
-        </p:spPr>
-        <p:txBody>
-          <a:bodyPr wrap="square" anchor="ctr" lIns="0" rIns="0" tIns="0" bIns="0"/>
+            <a:off x="548640" y="5852160"/>
+            <a:ext cx="11094415" cy="365760"/>
+          </a:xfrm>
+          <a:prstGeom prst="rect">
+            <a:avLst/>
+          </a:prstGeom>
+          <a:noFill/>
+        </p:spPr>
+        <p:txBody>
+          <a:bodyPr wrap="square" anchor="t" lIns="0" rIns="0" tIns="0" bIns="0"/>
           <a:lstStyle/>
           <a:p>
             <a:pPr algn="l"/>
             <a:r>
-              <a:rPr sz="1700" b="0" i="0">
-                <a:solidFill>
-                  <a:srgbClr val="202122"/>
-                </a:solidFill>
-                <a:latin typeface="Calibri"/>
-              </a:rPr>
-              <a:t>Identify three ways it could exclude or disadvantage people.</a:t>
-            </a:r>
-          </a:p>
-        </p:txBody>
-      </p:sp>
-      <p:sp>
-        <p:nvSpPr>
-          <p:cNvPr id="13" name="Oval 12"/>
-          <p:cNvSpPr/>
-          <p:nvPr/>
-        </p:nvSpPr>
-        <p:spPr>
-          <a:xfrm>
-            <a:off x="548640" y="4439412"/>
-            <a:ext cx="384048" cy="384048"/>
-          </a:xfrm>
-          <a:prstGeom prst="ellipse">
-            <a:avLst/>
-          </a:prstGeom>
-          <a:solidFill>
-            <a:srgbClr val="0645AD"/>
-          </a:solidFill>
-          <a:ln>
-            <a:noFill/>
-          </a:ln>
-          <a:effectLst/>
-        </p:spPr>
-        <p:style>
-          <a:lnRef idx="1">
-            <a:schemeClr val="accent1"/>
-          </a:lnRef>
-          <a:fillRef idx="3">
-            <a:schemeClr val="accent1"/>
-          </a:fillRef>
-          <a:effectRef idx="2">
-            <a:schemeClr val="accent1"/>
-          </a:effectRef>
-          <a:fontRef idx="minor">
-            <a:schemeClr val="lt1"/>
-          </a:fontRef>
-        </p:style>
-        <p:txBody>
-          <a:bodyPr rtlCol="0" anchor="ctr" lIns="0" rIns="0" tIns="0" bIns="0"/>
-          <a:lstStyle/>
-          <a:p>
-            <a:pPr algn="ctr"/>
-            <a:r>
-              <a:rPr sz="1300" b="1">
-                <a:solidFill>
-                  <a:srgbClr val="FFFFFF"/>
-                </a:solidFill>
-                <a:latin typeface="Calibri"/>
-              </a:rPr>
-              <a:t>3</a:t>
-            </a:r>
-          </a:p>
-        </p:txBody>
-      </p:sp>
-      <p:sp>
-        <p:nvSpPr>
-          <p:cNvPr id="14" name="TextBox 13"/>
-          <p:cNvSpPr txBox="1"/>
-          <p:nvPr/>
-        </p:nvSpPr>
-        <p:spPr>
-          <a:xfrm>
-            <a:off x="1143000" y="4197096"/>
-            <a:ext cx="5943600" cy="868680"/>
-          </a:xfrm>
-          <a:prstGeom prst="rect">
-            <a:avLst/>
-          </a:prstGeom>
-          <a:noFill/>
-        </p:spPr>
-        <p:txBody>
-          <a:bodyPr wrap="square" anchor="ctr" lIns="0" rIns="0" tIns="0" bIns="0"/>
-          <a:lstStyle/>
-          <a:p>
-            <a:pPr algn="l"/>
-            <a:r>
-              <a:rPr sz="1700" b="0" i="0">
-                <a:solidFill>
-                  <a:srgbClr val="202122"/>
-                </a:solidFill>
-                <a:latin typeface="Calibri"/>
-              </a:rPr>
-              <a:t>Suggest a fix for each.</a:t>
-            </a:r>
-          </a:p>
-        </p:txBody>
-      </p:sp>
-      <p:sp>
-        <p:nvSpPr>
-          <p:cNvPr id="15" name="Oval 14"/>
-          <p:cNvSpPr/>
-          <p:nvPr/>
-        </p:nvSpPr>
-        <p:spPr>
-          <a:xfrm>
-            <a:off x="548640" y="5417820"/>
-            <a:ext cx="384048" cy="384048"/>
-          </a:xfrm>
-          <a:prstGeom prst="ellipse">
-            <a:avLst/>
-          </a:prstGeom>
-          <a:solidFill>
-            <a:srgbClr val="0645AD"/>
-          </a:solidFill>
-          <a:ln>
-            <a:noFill/>
-          </a:ln>
-          <a:effectLst/>
-        </p:spPr>
-        <p:style>
-          <a:lnRef idx="1">
-            <a:schemeClr val="accent1"/>
-          </a:lnRef>
-          <a:fillRef idx="3">
-            <a:schemeClr val="accent1"/>
-          </a:fillRef>
-          <a:effectRef idx="2">
-            <a:schemeClr val="accent1"/>
-          </a:effectRef>
-          <a:fontRef idx="minor">
-            <a:schemeClr val="lt1"/>
-          </a:fontRef>
-        </p:style>
-        <p:txBody>
-          <a:bodyPr rtlCol="0" anchor="ctr" lIns="0" rIns="0" tIns="0" bIns="0"/>
-          <a:lstStyle/>
-          <a:p>
-            <a:pPr algn="ctr"/>
-            <a:r>
-              <a:rPr sz="1300" b="1">
-                <a:solidFill>
-                  <a:srgbClr val="FFFFFF"/>
-                </a:solidFill>
-                <a:latin typeface="Calibri"/>
-              </a:rPr>
-              <a:t>4</a:t>
-            </a:r>
-          </a:p>
-        </p:txBody>
-      </p:sp>
-      <p:sp>
-        <p:nvSpPr>
-          <p:cNvPr id="16" name="TextBox 15"/>
-          <p:cNvSpPr txBox="1"/>
-          <p:nvPr/>
-        </p:nvSpPr>
-        <p:spPr>
-          <a:xfrm>
-            <a:off x="1143000" y="5175504"/>
-            <a:ext cx="5943600" cy="868680"/>
-          </a:xfrm>
-          <a:prstGeom prst="rect">
-            <a:avLst/>
-          </a:prstGeom>
-          <a:noFill/>
-        </p:spPr>
-        <p:txBody>
-          <a:bodyPr wrap="square" anchor="ctr" lIns="0" rIns="0" tIns="0" bIns="0"/>
-          <a:lstStyle/>
-          <a:p>
-            <a:pPr algn="l"/>
-            <a:r>
-              <a:rPr sz="1700" b="0" i="0">
-                <a:solidFill>
-                  <a:srgbClr val="202122"/>
-                </a:solidFill>
-                <a:latin typeface="Calibri"/>
-              </a:rPr>
-              <a:t>Present your review in two minutes.</a:t>
-            </a:r>
-          </a:p>
-        </p:txBody>
-      </p:sp>
-      <p:sp>
-        <p:nvSpPr>
-          <p:cNvPr id="17" name="Rounded Rectangle 16"/>
-          <p:cNvSpPr/>
-          <p:nvPr/>
-        </p:nvSpPr>
-        <p:spPr>
-          <a:xfrm>
-            <a:off x="7772400" y="1508760"/>
-            <a:ext cx="3867912" cy="4572000"/>
-          </a:xfrm>
-          <a:prstGeom prst="roundRect">
-            <a:avLst>
-              <a:gd name="adj" fmla="val 8000"/>
-            </a:avLst>
-          </a:prstGeom>
-          <a:solidFill>
-            <a:srgbClr val="EAF3FF"/>
-          </a:solidFill>
-          <a:ln>
-            <a:noFill/>
-          </a:ln>
-          <a:effectLst/>
-        </p:spPr>
-        <p:style>
-          <a:lnRef idx="1">
-            <a:schemeClr val="accent1"/>
-          </a:lnRef>
-          <a:fillRef idx="3">
-            <a:schemeClr val="accent1"/>
-          </a:fillRef>
-          <a:effectRef idx="2">
-            <a:schemeClr val="accent1"/>
-          </a:effectRef>
-          <a:fontRef idx="minor">
-            <a:schemeClr val="lt1"/>
-          </a:fontRef>
-        </p:style>
-        <p:txBody>
-          <a:bodyPr rtlCol="0" anchor="ctr"/>
-          <a:lstStyle/>
-          <a:p/>
-        </p:txBody>
-      </p:sp>
-      <p:sp>
-        <p:nvSpPr>
-          <p:cNvPr id="18" name="TextBox 17"/>
-          <p:cNvSpPr txBox="1"/>
-          <p:nvPr/>
-        </p:nvSpPr>
-        <p:spPr>
-          <a:xfrm>
-            <a:off x="8046720" y="1737360"/>
-            <a:ext cx="3291840" cy="365760"/>
-          </a:xfrm>
-          <a:prstGeom prst="rect">
-            <a:avLst/>
-          </a:prstGeom>
-          <a:noFill/>
-        </p:spPr>
-        <p:txBody>
-          <a:bodyPr wrap="square" anchor="t" lIns="0" rIns="0" tIns="0" bIns="0"/>
-          <a:lstStyle/>
-          <a:p>
-            <a:pPr algn="l"/>
-            <a:r>
-              <a:rPr sz="1300" b="1" i="0">
-                <a:solidFill>
-                  <a:srgbClr val="0645AD"/>
-                </a:solidFill>
-                <a:latin typeface="Calibri"/>
-              </a:rPr>
-              <a:t>SUCCESS CRITERIA</a:t>
-            </a:r>
-          </a:p>
-        </p:txBody>
-      </p:sp>
-      <p:sp>
-        <p:nvSpPr>
-          <p:cNvPr id="19" name="TextBox 18"/>
-          <p:cNvSpPr txBox="1"/>
-          <p:nvPr/>
-        </p:nvSpPr>
-        <p:spPr>
-          <a:xfrm>
-            <a:off x="8046720" y="2240280"/>
-            <a:ext cx="3337560" cy="3657600"/>
-          </a:xfrm>
-          <a:prstGeom prst="rect">
-            <a:avLst/>
-          </a:prstGeom>
-          <a:noFill/>
-        </p:spPr>
-        <p:txBody>
-          <a:bodyPr wrap="square" lIns="0" rIns="0" tIns="0" bIns="0">
-            <a:spAutoFit/>
-          </a:bodyPr>
-          <a:lstStyle/>
-          <a:p>
-            <a:pPr marL="274320" indent="-274320">
-              <a:spcAft>
-                <a:spcPts val="810"/>
-              </a:spcAft>
-              <a:buClr>
-                <a:srgbClr val="0645AD"/>
-              </a:buClr>
-              <a:buFont typeface="Arial"/>
-              <a:buChar char="•"/>
-            </a:pPr>
-            <a:r>
-              <a:rPr sz="1800" b="0">
-                <a:solidFill>
-                  <a:srgbClr val="202122"/>
-                </a:solidFill>
-                <a:latin typeface="Calibri"/>
-              </a:rPr>
-              <a:t>Considers bias in training data</a:t>
-            </a:r>
-          </a:p>
-          <a:p>
-            <a:pPr marL="274320" indent="-274320">
-              <a:spcAft>
-                <a:spcPts val="810"/>
-              </a:spcAft>
-              <a:buClr>
-                <a:srgbClr val="0645AD"/>
-              </a:buClr>
-              <a:buFont typeface="Arial"/>
-              <a:buChar char="•"/>
-            </a:pPr>
-            <a:r>
-              <a:rPr sz="1800" b="0">
-                <a:solidFill>
-                  <a:srgbClr val="202122"/>
-                </a:solidFill>
-                <a:latin typeface="Calibri"/>
-              </a:rPr>
-              <a:t>Considers accessibility</a:t>
-            </a:r>
-          </a:p>
-          <a:p>
-            <a:pPr marL="274320" indent="-274320">
-              <a:spcAft>
-                <a:spcPts val="810"/>
-              </a:spcAft>
-              <a:buClr>
-                <a:srgbClr val="0645AD"/>
-              </a:buClr>
-              <a:buFont typeface="Arial"/>
-              <a:buChar char="•"/>
-            </a:pPr>
-            <a:r>
-              <a:rPr sz="1800" b="0">
-                <a:solidFill>
-                  <a:srgbClr val="202122"/>
-                </a:solidFill>
-                <a:latin typeface="Calibri"/>
-              </a:rPr>
-              <a:t>Fixes are realistic</a:t>
+              <a:rPr sz="1300" b="0" i="1">
+                <a:solidFill>
+                  <a:srgbClr val="54595D"/>
+                </a:solidFill>
+                <a:latin typeface="Calibri"/>
+              </a:rPr>
+              <a:t>Answer on mini whiteboards or in your book. Answers are in the speaker notes.</a:t>
             </a:r>
           </a:p>
         </p:txBody>
@@ -8583,7 +11510,7 @@
     <p:bg>
       <p:bgPr>
         <a:solidFill>
-          <a:srgbClr val="03306E"/>
+          <a:srgbClr val="FFFFFF"/>
         </a:solidFill>
         <a:effectLst/>
       </p:bgPr>
@@ -8619,7 +11546,7 @@
             <a:r>
               <a:rPr sz="1100" b="1" i="0">
                 <a:solidFill>
-                  <a:srgbClr val="A9C8F0"/>
+                  <a:srgbClr val="54595D"/>
                 </a:solidFill>
                 <a:latin typeface="Calibri"/>
               </a:rPr>
@@ -8652,25 +11579,215 @@
             <a:r>
               <a:rPr sz="3200" b="1" i="0">
                 <a:solidFill>
-                  <a:srgbClr val="FFFFFF"/>
+                  <a:srgbClr val="03306E"/>
                 </a:solidFill>
                 <a:latin typeface="Cambria"/>
               </a:rPr>
-              <a:t>Exit ticket</a:t>
-            </a:r>
-          </a:p>
-        </p:txBody>
-      </p:sp>
-      <p:sp>
-        <p:nvSpPr>
-          <p:cNvPr id="4" name="Oval 3"/>
+              <a:t>Emerging technologies</a:t>
+            </a:r>
+          </a:p>
+        </p:txBody>
+      </p:sp>
+      <p:sp>
+        <p:nvSpPr>
+          <p:cNvPr id="4" name="TextBox 3"/>
+          <p:cNvSpPr txBox="1"/>
+          <p:nvPr/>
+        </p:nvSpPr>
+        <p:spPr>
+          <a:xfrm>
+            <a:off x="548640" y="6446520"/>
+            <a:ext cx="8229600" cy="274320"/>
+          </a:xfrm>
+          <a:prstGeom prst="rect">
+            <a:avLst/>
+          </a:prstGeom>
+          <a:noFill/>
+        </p:spPr>
+        <p:txBody>
+          <a:bodyPr wrap="square" anchor="t" lIns="0" rIns="0" tIns="0" bIns="0"/>
+          <a:lstStyle/>
+          <a:p>
+            <a:pPr algn="l"/>
+            <a:r>
+              <a:rPr sz="1000" b="0" i="0">
+                <a:solidFill>
+                  <a:srgbClr val="54595D"/>
+                </a:solidFill>
+                <a:latin typeface="Calibri"/>
+              </a:rPr>
+              <a:t>Digital Software Development T Level  ·  Emerging Issues and Technologies</a:t>
+            </a:r>
+          </a:p>
+        </p:txBody>
+      </p:sp>
+      <p:sp>
+        <p:nvSpPr>
+          <p:cNvPr id="5" name="TextBox 4"/>
+          <p:cNvSpPr txBox="1"/>
+          <p:nvPr/>
+        </p:nvSpPr>
+        <p:spPr>
+          <a:xfrm>
+            <a:off x="10728655" y="6446520"/>
+            <a:ext cx="914400" cy="274320"/>
+          </a:xfrm>
+          <a:prstGeom prst="rect">
+            <a:avLst/>
+          </a:prstGeom>
+          <a:noFill/>
+        </p:spPr>
+        <p:txBody>
+          <a:bodyPr wrap="square" anchor="t" lIns="0" rIns="0" tIns="0" bIns="0"/>
+          <a:lstStyle/>
+          <a:p>
+            <a:pPr algn="r"/>
+            <a:r>
+              <a:rPr sz="1000" b="0" i="0">
+                <a:solidFill>
+                  <a:srgbClr val="54595D"/>
+                </a:solidFill>
+                <a:latin typeface="Calibri"/>
+              </a:rPr>
+              <a:t>9</a:t>
+            </a:r>
+          </a:p>
+        </p:txBody>
+      </p:sp>
+      <p:sp>
+        <p:nvSpPr>
+          <p:cNvPr id="6" name="TextBox 5"/>
+          <p:cNvSpPr txBox="1"/>
+          <p:nvPr/>
+        </p:nvSpPr>
+        <p:spPr>
+          <a:xfrm>
+            <a:off x="548640" y="1554480"/>
+            <a:ext cx="6720840" cy="4617720"/>
+          </a:xfrm>
+          <a:prstGeom prst="rect">
+            <a:avLst/>
+          </a:prstGeom>
+          <a:noFill/>
+        </p:spPr>
+        <p:txBody>
+          <a:bodyPr wrap="square" lIns="0" rIns="0" tIns="0" bIns="0">
+            <a:spAutoFit/>
+          </a:bodyPr>
+          <a:lstStyle/>
+          <a:p>
+            <a:pPr>
+              <a:spcAft>
+                <a:spcPts val="1200"/>
+              </a:spcAft>
+            </a:pPr>
+            <a:r>
+              <a:rPr sz="2000" b="0">
+                <a:solidFill>
+                  <a:srgbClr val="202122"/>
+                </a:solidFill>
+                <a:latin typeface="Calibri"/>
+              </a:rPr>
+              <a:t>Several technologies are changing what developers build.</a:t>
+            </a:r>
+          </a:p>
+          <a:p>
+            <a:pPr>
+              <a:spcAft>
+                <a:spcPts val="1200"/>
+              </a:spcAft>
+            </a:pPr>
+            <a:r>
+              <a:rPr sz="2000" b="0">
+                <a:solidFill>
+                  <a:srgbClr val="202122"/>
+                </a:solidFill>
+                <a:latin typeface="Calibri"/>
+              </a:rPr>
+              <a:t>Quantum computing could solve problems ordinary computers can't. The Internet of Things connects billions of devices, with edge computing processing data close to where it's collected. AI and machine learning power recommendations and generative tools. Augmented and virtual reality create new interfaces. Open source software and blockchain change how code and data are shared. Autonomous machines, such as self-driving cars, rely on software to make decisions.</a:t>
+            </a:r>
+          </a:p>
+          <a:p>
+            <a:pPr>
+              <a:spcAft>
+                <a:spcPts val="1200"/>
+              </a:spcAft>
+            </a:pPr>
+            <a:r>
+              <a:rPr sz="2000" b="1">
+                <a:solidFill>
+                  <a:srgbClr val="202122"/>
+                </a:solidFill>
+                <a:latin typeface="Calibri"/>
+              </a:rPr>
+              <a:t>All have environmental costs:</a:t>
+            </a:r>
+            <a:r>
+              <a:rPr sz="2000" b="0">
+                <a:solidFill>
+                  <a:srgbClr val="202122"/>
+                </a:solidFill>
+                <a:latin typeface="Calibri"/>
+              </a:rPr>
+              <a:t> rare metals, energy use and disposal.</a:t>
+            </a:r>
+          </a:p>
+        </p:txBody>
+      </p:sp>
+      <p:sp>
+        <p:nvSpPr>
+          <p:cNvPr id="7" name="Rounded Rectangle 6"/>
           <p:cNvSpPr/>
           <p:nvPr/>
         </p:nvSpPr>
         <p:spPr>
           <a:xfrm>
-            <a:off x="548640" y="1737360"/>
-            <a:ext cx="502920" cy="502920"/>
+            <a:off x="7772400" y="1554480"/>
+            <a:ext cx="3867912" cy="4526280"/>
+          </a:xfrm>
+          <a:prstGeom prst="roundRect">
+            <a:avLst>
+              <a:gd name="adj" fmla="val 8000"/>
+            </a:avLst>
+          </a:prstGeom>
+          <a:solidFill>
+            <a:srgbClr val="03306E"/>
+          </a:solidFill>
+          <a:ln>
+            <a:noFill/>
+          </a:ln>
+          <a:effectLst/>
+        </p:spPr>
+        <p:style>
+          <a:lnRef idx="1">
+            <a:schemeClr val="accent1"/>
+          </a:lnRef>
+          <a:fillRef idx="3">
+            <a:schemeClr val="accent1"/>
+          </a:fillRef>
+          <a:effectRef idx="2">
+            <a:schemeClr val="accent1"/>
+          </a:effectRef>
+          <a:fontRef idx="minor">
+            <a:schemeClr val="lt1"/>
+          </a:fontRef>
+        </p:style>
+        <p:txBody>
+          <a:bodyPr rtlCol="0" anchor="ctr"/>
+          <a:lstStyle/>
+          <a:p/>
+        </p:txBody>
+      </p:sp>
+      <p:sp>
+        <p:nvSpPr>
+          <p:cNvPr id="8" name="Oval 7"/>
+          <p:cNvSpPr/>
+          <p:nvPr/>
+        </p:nvSpPr>
+        <p:spPr>
+          <a:xfrm>
+            <a:off x="8046720" y="1828800"/>
+            <a:ext cx="548640" cy="548640"/>
           </a:xfrm>
           <a:prstGeom prst="ellipse">
             <a:avLst/>
@@ -8703,394 +11820,79 @@
           <a:p>
             <a:pPr algn="ctr"/>
             <a:r>
-              <a:rPr sz="1700" b="1">
+              <a:rPr sz="1300" b="1">
                 <a:solidFill>
                   <a:srgbClr val="202122"/>
                 </a:solidFill>
                 <a:latin typeface="Calibri"/>
               </a:rPr>
-              <a:t>1</a:t>
-            </a:r>
-          </a:p>
-        </p:txBody>
-      </p:sp>
-      <p:sp>
-        <p:nvSpPr>
-          <p:cNvPr id="5" name="TextBox 4"/>
-          <p:cNvSpPr txBox="1"/>
-          <p:nvPr/>
-        </p:nvSpPr>
-        <p:spPr>
-          <a:xfrm>
-            <a:off x="1325880" y="1645920"/>
-            <a:ext cx="6583680" cy="822960"/>
-          </a:xfrm>
-          <a:prstGeom prst="rect">
-            <a:avLst/>
-          </a:prstGeom>
-          <a:noFill/>
-        </p:spPr>
-        <p:txBody>
-          <a:bodyPr wrap="square" anchor="ctr" lIns="0" rIns="0" tIns="0" bIns="0"/>
+              <a:t>e.g.</a:t>
+            </a:r>
+          </a:p>
+        </p:txBody>
+      </p:sp>
+      <p:sp>
+        <p:nvSpPr>
+          <p:cNvPr id="9" name="TextBox 8"/>
+          <p:cNvSpPr txBox="1"/>
+          <p:nvPr/>
+        </p:nvSpPr>
+        <p:spPr>
+          <a:xfrm>
+            <a:off x="8046720" y="2560320"/>
+            <a:ext cx="3291840" cy="365760"/>
+          </a:xfrm>
+          <a:prstGeom prst="rect">
+            <a:avLst/>
+          </a:prstGeom>
+          <a:noFill/>
+        </p:spPr>
+        <p:txBody>
+          <a:bodyPr wrap="square" anchor="t" lIns="0" rIns="0" tIns="0" bIns="0"/>
           <a:lstStyle/>
           <a:p>
             <a:pPr algn="l"/>
             <a:r>
-              <a:rPr sz="2000" b="0" i="0">
+              <a:rPr sz="1300" b="1" i="0">
+                <a:solidFill>
+                  <a:srgbClr val="A9C8F0"/>
+                </a:solidFill>
+                <a:latin typeface="Calibri"/>
+              </a:rPr>
+              <a:t>EXAMPLE</a:t>
+            </a:r>
+          </a:p>
+        </p:txBody>
+      </p:sp>
+      <p:sp>
+        <p:nvSpPr>
+          <p:cNvPr id="10" name="TextBox 9"/>
+          <p:cNvSpPr txBox="1"/>
+          <p:nvPr/>
+        </p:nvSpPr>
+        <p:spPr>
+          <a:xfrm>
+            <a:off x="8046720" y="2971800"/>
+            <a:ext cx="3291840" cy="2971800"/>
+          </a:xfrm>
+          <a:prstGeom prst="rect">
+            <a:avLst/>
+          </a:prstGeom>
+          <a:noFill/>
+        </p:spPr>
+        <p:txBody>
+          <a:bodyPr wrap="square" anchor="t" lIns="0" rIns="0" tIns="0" bIns="0"/>
+          <a:lstStyle/>
+          <a:p>
+            <a:pPr algn="l"/>
+            <a:r>
+              <a:rPr sz="1900" b="0" i="0">
                 <a:solidFill>
                   <a:srgbClr val="FFFFFF"/>
                 </a:solidFill>
-                <a:latin typeface="Calibri"/>
-              </a:rPr>
-              <a:t>Which emerging technology will most change software development?</a:t>
-            </a:r>
-          </a:p>
-        </p:txBody>
-      </p:sp>
-      <p:sp>
-        <p:nvSpPr>
-          <p:cNvPr id="6" name="Oval 5"/>
-          <p:cNvSpPr/>
-          <p:nvPr/>
-        </p:nvSpPr>
-        <p:spPr>
-          <a:xfrm>
-            <a:off x="548640" y="2697480"/>
-            <a:ext cx="502920" cy="502920"/>
-          </a:xfrm>
-          <a:prstGeom prst="ellipse">
-            <a:avLst/>
-          </a:prstGeom>
-          <a:solidFill>
-            <a:srgbClr val="F2B705"/>
-          </a:solidFill>
-          <a:ln>
-            <a:noFill/>
-          </a:ln>
-          <a:effectLst/>
-        </p:spPr>
-        <p:style>
-          <a:lnRef idx="1">
-            <a:schemeClr val="accent1"/>
-          </a:lnRef>
-          <a:fillRef idx="3">
-            <a:schemeClr val="accent1"/>
-          </a:fillRef>
-          <a:effectRef idx="2">
-            <a:schemeClr val="accent1"/>
-          </a:effectRef>
-          <a:fontRef idx="minor">
-            <a:schemeClr val="lt1"/>
-          </a:fontRef>
-        </p:style>
-        <p:txBody>
-          <a:bodyPr rtlCol="0" anchor="ctr" lIns="0" rIns="0" tIns="0" bIns="0"/>
-          <a:lstStyle/>
-          <a:p>
-            <a:pPr algn="ctr"/>
-            <a:r>
-              <a:rPr sz="1700" b="1">
-                <a:solidFill>
-                  <a:srgbClr val="202122"/>
-                </a:solidFill>
-                <a:latin typeface="Calibri"/>
-              </a:rPr>
-              <a:t>2</a:t>
-            </a:r>
-          </a:p>
-        </p:txBody>
-      </p:sp>
-      <p:sp>
-        <p:nvSpPr>
-          <p:cNvPr id="7" name="TextBox 6"/>
-          <p:cNvSpPr txBox="1"/>
-          <p:nvPr/>
-        </p:nvSpPr>
-        <p:spPr>
-          <a:xfrm>
-            <a:off x="1325880" y="2606040"/>
-            <a:ext cx="6583680" cy="822960"/>
-          </a:xfrm>
-          <a:prstGeom prst="rect">
-            <a:avLst/>
-          </a:prstGeom>
-          <a:noFill/>
-        </p:spPr>
-        <p:txBody>
-          <a:bodyPr wrap="square" anchor="ctr" lIns="0" rIns="0" tIns="0" bIns="0"/>
-          <a:lstStyle/>
-          <a:p>
-            <a:pPr algn="l"/>
-            <a:r>
-              <a:rPr sz="2000" b="0" i="0">
-                <a:solidFill>
-                  <a:srgbClr val="FFFFFF"/>
-                </a:solidFill>
-                <a:latin typeface="Calibri"/>
-              </a:rPr>
-              <a:t>Name one characteristic that affects inclusivity.</a:t>
-            </a:r>
-          </a:p>
-        </p:txBody>
-      </p:sp>
-      <p:sp>
-        <p:nvSpPr>
-          <p:cNvPr id="8" name="Oval 7"/>
-          <p:cNvSpPr/>
-          <p:nvPr/>
-        </p:nvSpPr>
-        <p:spPr>
-          <a:xfrm>
-            <a:off x="548640" y="3657600"/>
-            <a:ext cx="502920" cy="502920"/>
-          </a:xfrm>
-          <a:prstGeom prst="ellipse">
-            <a:avLst/>
-          </a:prstGeom>
-          <a:solidFill>
-            <a:srgbClr val="F2B705"/>
-          </a:solidFill>
-          <a:ln>
-            <a:noFill/>
-          </a:ln>
-          <a:effectLst/>
-        </p:spPr>
-        <p:style>
-          <a:lnRef idx="1">
-            <a:schemeClr val="accent1"/>
-          </a:lnRef>
-          <a:fillRef idx="3">
-            <a:schemeClr val="accent1"/>
-          </a:fillRef>
-          <a:effectRef idx="2">
-            <a:schemeClr val="accent1"/>
-          </a:effectRef>
-          <a:fontRef idx="minor">
-            <a:schemeClr val="lt1"/>
-          </a:fontRef>
-        </p:style>
-        <p:txBody>
-          <a:bodyPr rtlCol="0" anchor="ctr" lIns="0" rIns="0" tIns="0" bIns="0"/>
-          <a:lstStyle/>
-          <a:p>
-            <a:pPr algn="ctr"/>
-            <a:r>
-              <a:rPr sz="1700" b="1">
-                <a:solidFill>
-                  <a:srgbClr val="202122"/>
-                </a:solidFill>
-                <a:latin typeface="Calibri"/>
-              </a:rPr>
-              <a:t>3</a:t>
-            </a:r>
-          </a:p>
-        </p:txBody>
-      </p:sp>
-      <p:sp>
-        <p:nvSpPr>
-          <p:cNvPr id="9" name="TextBox 8"/>
-          <p:cNvSpPr txBox="1"/>
-          <p:nvPr/>
-        </p:nvSpPr>
-        <p:spPr>
-          <a:xfrm>
-            <a:off x="1325880" y="3566160"/>
-            <a:ext cx="6583680" cy="822960"/>
-          </a:xfrm>
-          <a:prstGeom prst="rect">
-            <a:avLst/>
-          </a:prstGeom>
-          <a:noFill/>
-        </p:spPr>
-        <p:txBody>
-          <a:bodyPr wrap="square" anchor="ctr" lIns="0" rIns="0" tIns="0" bIns="0"/>
-          <a:lstStyle/>
-          <a:p>
-            <a:pPr algn="l"/>
-            <a:r>
-              <a:rPr sz="2000" b="0" i="0">
-                <a:solidFill>
-                  <a:srgbClr val="FFFFFF"/>
-                </a:solidFill>
-                <a:latin typeface="Calibri"/>
-              </a:rPr>
-              <a:t>Why does professional development matter for developers?</a:t>
-            </a:r>
-          </a:p>
-        </p:txBody>
-      </p:sp>
-      <p:sp>
-        <p:nvSpPr>
-          <p:cNvPr id="10" name="Rounded Rectangle 9"/>
-          <p:cNvSpPr/>
-          <p:nvPr/>
-        </p:nvSpPr>
-        <p:spPr>
-          <a:xfrm>
-            <a:off x="8229600" y="1645920"/>
-            <a:ext cx="3410712" cy="2926080"/>
-          </a:xfrm>
-          <a:prstGeom prst="roundRect">
-            <a:avLst>
-              <a:gd name="adj" fmla="val 8000"/>
-            </a:avLst>
-          </a:prstGeom>
-          <a:solidFill>
-            <a:srgbClr val="0645AD"/>
-          </a:solidFill>
-          <a:ln>
-            <a:noFill/>
-          </a:ln>
-          <a:effectLst/>
-        </p:spPr>
-        <p:style>
-          <a:lnRef idx="1">
-            <a:schemeClr val="accent1"/>
-          </a:lnRef>
-          <a:fillRef idx="3">
-            <a:schemeClr val="accent1"/>
-          </a:fillRef>
-          <a:effectRef idx="2">
-            <a:schemeClr val="accent1"/>
-          </a:effectRef>
-          <a:fontRef idx="minor">
-            <a:schemeClr val="lt1"/>
-          </a:fontRef>
-        </p:style>
-        <p:txBody>
-          <a:bodyPr rtlCol="0" anchor="ctr"/>
-          <a:lstStyle/>
-          <a:p/>
-        </p:txBody>
-      </p:sp>
-      <p:sp>
-        <p:nvSpPr>
-          <p:cNvPr id="11" name="TextBox 10"/>
-          <p:cNvSpPr txBox="1"/>
-          <p:nvPr/>
-        </p:nvSpPr>
-        <p:spPr>
-          <a:xfrm>
-            <a:off x="8503920" y="1874519"/>
-            <a:ext cx="2926080" cy="365760"/>
-          </a:xfrm>
-          <a:prstGeom prst="rect">
-            <a:avLst/>
-          </a:prstGeom>
-          <a:noFill/>
-        </p:spPr>
-        <p:txBody>
-          <a:bodyPr wrap="square" anchor="t" lIns="0" rIns="0" tIns="0" bIns="0"/>
-          <a:lstStyle/>
-          <a:p>
-            <a:pPr algn="l"/>
-            <a:r>
-              <a:rPr sz="1300" b="1" i="0">
-                <a:solidFill>
-                  <a:srgbClr val="A9C8F0"/>
-                </a:solidFill>
-                <a:latin typeface="Calibri"/>
-              </a:rPr>
-              <a:t>REVISE THIS TOPIC</a:t>
-            </a:r>
-          </a:p>
-        </p:txBody>
-      </p:sp>
-      <p:sp>
-        <p:nvSpPr>
-          <p:cNvPr id="12" name="TextBox 11"/>
-          <p:cNvSpPr txBox="1"/>
-          <p:nvPr/>
-        </p:nvSpPr>
-        <p:spPr>
-          <a:xfrm>
-            <a:off x="8503920" y="2286000"/>
-            <a:ext cx="2926080" cy="548640"/>
-          </a:xfrm>
-          <a:prstGeom prst="rect">
-            <a:avLst/>
-          </a:prstGeom>
-          <a:noFill/>
-        </p:spPr>
-        <p:txBody>
-          <a:bodyPr wrap="square" anchor="t" lIns="0" rIns="0" tIns="0" bIns="0"/>
-          <a:lstStyle/>
-          <a:p>
-            <a:pPr algn="l"/>
-            <a:r>
-              <a:rPr sz="1400" b="0" i="0">
-                <a:solidFill>
-                  <a:srgbClr val="FFFFFF"/>
-                </a:solidFill>
-                <a:latin typeface="Calibri"/>
-              </a:rPr>
-              <a:t>Revision notes for this lesson are on the study wiki:</a:t>
-            </a:r>
-          </a:p>
-        </p:txBody>
-      </p:sp>
-      <p:sp>
-        <p:nvSpPr>
-          <p:cNvPr id="13" name="TextBox 12"/>
-          <p:cNvSpPr txBox="1"/>
-          <p:nvPr/>
-        </p:nvSpPr>
-        <p:spPr>
-          <a:xfrm>
-            <a:off x="8503920" y="2926080"/>
-            <a:ext cx="2926080" cy="1463040"/>
-          </a:xfrm>
-          <a:prstGeom prst="rect">
-            <a:avLst/>
-          </a:prstGeom>
-          <a:noFill/>
-        </p:spPr>
-        <p:txBody>
-          <a:bodyPr wrap="square" anchor="t" lIns="0" rIns="0" tIns="0" bIns="0"/>
-          <a:lstStyle/>
-          <a:p>
-            <a:pPr algn="l"/>
-            <a:r>
-              <a:rPr sz="2000" b="1" i="0">
-                <a:solidFill>
-                  <a:srgbClr val="FFFFFF"/>
-                </a:solidFill>
                 <a:latin typeface="Cambria"/>
               </a:rPr>
-              <a:t>Core Paper 1: Problem Solving, Programming, Emerging Issues and Legislation</a:t>
-            </a:r>
-          </a:p>
-        </p:txBody>
-      </p:sp>
-      <p:sp>
-        <p:nvSpPr>
-          <p:cNvPr id="14" name="TextBox 13"/>
-          <p:cNvSpPr txBox="1"/>
-          <p:nvPr/>
-        </p:nvSpPr>
-        <p:spPr>
-          <a:xfrm>
-            <a:off x="548640" y="5669280"/>
-            <a:ext cx="11094415" cy="548640"/>
-          </a:xfrm>
-          <a:prstGeom prst="rect">
-            <a:avLst/>
-          </a:prstGeom>
-          <a:noFill/>
-        </p:spPr>
-        <p:txBody>
-          <a:bodyPr wrap="square" anchor="t" lIns="0" rIns="0" tIns="0" bIns="0"/>
-          <a:lstStyle/>
-          <a:p>
-            <a:pPr algn="l"/>
-            <a:r>
-              <a:rPr sz="1200" b="0" i="0">
-                <a:solidFill>
-                  <a:srgbClr val="A9C8F0"/>
-                </a:solidFill>
-                <a:latin typeface="Calibri"/>
-              </a:rPr>
-              <a:t>https://lana6478.github.io/T-level-Digital-Software-Development/#/01-core-component/01-core-paper-1.md</a:t>
+              <a:t>A smart-farm app combines IoT soil sensors, edge computing on a field hub, and machine learning to decide when to water.</a:t>
             </a:r>
           </a:p>
         </p:txBody>
